--- a/pokemon-card-original-template.pptx
+++ b/pokemon-card-original-template.pptx
@@ -9619,1899 +9619,9 @@
           </a:ln>
         </p:spPr>
       </p:sp>
-      <p:sp>
-        <p:nvSpPr>
-          <p:cNvPr id="11" name="Text 9"/>
-          <p:cNvSpPr txBox="1"/>
-          <p:nvPr/>
-        </p:nvSpPr>
-        <p:spPr>
-          <a:xfrm>
-            <a:off x="653796" y="1010412"/>
-            <a:ext cx="1719072" cy="1225296"/>
-          </a:xfrm>
-          <a:prstGeom prst="rect">
-            <a:avLst/>
-          </a:prstGeom>
-          <a:noFill/>
-          <a:ln/>
-        </p:spPr>
-        <p:txBody>
-          <a:bodyPr wrap="square" lIns="0" tIns="0" rIns="0" bIns="0" rtlCol="0" anchor="ctr"/>
-          <a:lstStyle/>
-          <a:p>
-            <a:pPr algn="ctr" indent="0" marL="0">
-              <a:buNone/>
-            </a:pPr>
-            <a:r>
-              <a:rPr lang="en-US" sz="950" dirty="0">
-                <a:solidFill>
-                  <a:srgbClr val="AAAAAA"/>
-                </a:solidFill>
-                <a:latin typeface="Meiryo" pitchFamily="34" charset="0"/>
-                <a:ea typeface="Meiryo" pitchFamily="34" charset="-122"/>
-                <a:cs typeface="Meiryo" pitchFamily="34" charset="-120"/>
-              </a:rPr>
-              <a:t>ここに絵をはる</a:t>
-            </a:r>
-            <a:endParaRPr lang="en-US" sz="950" dirty="0"/>
-          </a:p>
-          <a:p>
-            <a:pPr algn="ctr" indent="0" marL="0">
-              <a:buNone/>
-            </a:pPr>
-            <a:r>
-              <a:rPr lang="en-US" sz="950" dirty="0">
-                <a:solidFill>
-                  <a:srgbClr val="AAAAAA"/>
-                </a:solidFill>
-                <a:latin typeface="Meiryo" pitchFamily="34" charset="0"/>
-                <a:ea typeface="Meiryo" pitchFamily="34" charset="-122"/>
-                <a:cs typeface="Meiryo" pitchFamily="34" charset="-120"/>
-              </a:rPr>
-              <a:t>（炎をまとった大きなドラゴン。火山のてっぺん）</a:t>
-            </a:r>
-            <a:endParaRPr lang="en-US" sz="950" dirty="0"/>
-          </a:p>
-        </p:txBody>
-      </p:sp>
-      <p:sp>
-        <p:nvSpPr>
-          <p:cNvPr id="12" name="Text 10"/>
-          <p:cNvSpPr txBox="1"/>
-          <p:nvPr/>
-        </p:nvSpPr>
-        <p:spPr>
-          <a:xfrm>
-            <a:off x="553212" y="2244852"/>
-            <a:ext cx="822960" cy="146304"/>
-          </a:xfrm>
-          <a:prstGeom prst="rect">
-            <a:avLst/>
-          </a:prstGeom>
-          <a:noFill/>
-          <a:ln/>
-        </p:spPr>
-        <p:txBody>
-          <a:bodyPr wrap="square" lIns="0" tIns="0" rIns="0" bIns="0" rtlCol="0" anchor="ctr"/>
-          <a:lstStyle/>
-          <a:p>
-            <a:pPr indent="0" marL="0">
-              <a:buNone/>
-            </a:pPr>
-            <a:r>
-              <a:rPr lang="en-US" sz="800" b="1" dirty="0">
-                <a:solidFill>
-                  <a:srgbClr val="444444"/>
-                </a:solidFill>
-                <a:latin typeface="Meiryo" pitchFamily="34" charset="0"/>
-                <a:ea typeface="Meiryo" pitchFamily="34" charset="-122"/>
-                <a:cs typeface="Meiryo" pitchFamily="34" charset="-120"/>
-              </a:rPr>
-              <a:t>ランク A</a:t>
-            </a:r>
-            <a:endParaRPr lang="en-US" sz="800" dirty="0"/>
-          </a:p>
-        </p:txBody>
-      </p:sp>
-      <p:sp>
-        <p:nvSpPr>
-          <p:cNvPr id="13" name="Shape 11"/>
-          <p:cNvSpPr/>
-          <p:nvPr/>
-        </p:nvSpPr>
-        <p:spPr>
-          <a:xfrm>
-            <a:off x="562356" y="2482596"/>
-            <a:ext cx="155448" cy="155448"/>
-          </a:xfrm>
-          <a:prstGeom prst="ellipse">
-            <a:avLst/>
-          </a:prstGeom>
-          <a:solidFill>
-            <a:srgbClr val="E8452E"/>
-          </a:solidFill>
-          <a:ln w="9525">
-            <a:solidFill>
-              <a:srgbClr val="555555"/>
-            </a:solidFill>
-            <a:prstDash val="solid"/>
-          </a:ln>
-        </p:spPr>
-      </p:sp>
-      <p:sp>
-        <p:nvSpPr>
-          <p:cNvPr id="14" name="Text 12"/>
-          <p:cNvSpPr txBox="1"/>
-          <p:nvPr/>
-        </p:nvSpPr>
-        <p:spPr>
-          <a:xfrm>
-            <a:off x="1019556" y="2446020"/>
-            <a:ext cx="1097280" cy="228600"/>
-          </a:xfrm>
-          <a:prstGeom prst="rect">
-            <a:avLst/>
-          </a:prstGeom>
-          <a:noFill/>
-          <a:ln/>
-        </p:spPr>
-        <p:txBody>
-          <a:bodyPr wrap="none" lIns="0" tIns="0" rIns="0" bIns="0" rtlCol="0" anchor="ctr"/>
-          <a:lstStyle/>
-          <a:p>
-            <a:pPr indent="0" marL="0">
-              <a:buNone/>
-            </a:pPr>
-            <a:r>
-              <a:rPr lang="en-US" sz="1200" b="1" dirty="0">
-                <a:solidFill>
-                  <a:srgbClr val="222222"/>
-                </a:solidFill>
-                <a:latin typeface="Meiryo" pitchFamily="34" charset="0"/>
-                <a:ea typeface="Meiryo" pitchFamily="34" charset="-122"/>
-                <a:cs typeface="Meiryo" pitchFamily="34" charset="-120"/>
-              </a:rPr>
-              <a:t>ひのたま</a:t>
-            </a:r>
-            <a:endParaRPr lang="en-US" sz="1200" dirty="0"/>
-          </a:p>
-        </p:txBody>
-      </p:sp>
-      <p:sp>
-        <p:nvSpPr>
-          <p:cNvPr id="15" name="Text 13"/>
-          <p:cNvSpPr txBox="1"/>
-          <p:nvPr/>
-        </p:nvSpPr>
-        <p:spPr>
-          <a:xfrm>
-            <a:off x="1979676" y="2446020"/>
-            <a:ext cx="502920" cy="228600"/>
-          </a:xfrm>
-          <a:prstGeom prst="rect">
-            <a:avLst/>
-          </a:prstGeom>
-          <a:noFill/>
-          <a:ln/>
-        </p:spPr>
-        <p:txBody>
-          <a:bodyPr wrap="square" lIns="0" tIns="0" rIns="0" bIns="0" rtlCol="0" anchor="ctr"/>
-          <a:lstStyle/>
-          <a:p>
-            <a:pPr algn="r" indent="0" marL="0">
-              <a:buNone/>
-            </a:pPr>
-            <a:r>
-              <a:rPr lang="en-US" sz="1400" b="1" dirty="0">
-                <a:solidFill>
-                  <a:srgbClr val="222222"/>
-                </a:solidFill>
-                <a:latin typeface="Meiryo" pitchFamily="34" charset="0"/>
-                <a:ea typeface="Meiryo" pitchFamily="34" charset="-122"/>
-                <a:cs typeface="Meiryo" pitchFamily="34" charset="-120"/>
-              </a:rPr>
-              <a:t>30</a:t>
-            </a:r>
-            <a:endParaRPr lang="en-US" sz="1400" dirty="0"/>
-          </a:p>
-        </p:txBody>
-      </p:sp>
-      <p:sp>
-        <p:nvSpPr>
-          <p:cNvPr id="16" name="Text 14"/>
-          <p:cNvSpPr txBox="1"/>
-          <p:nvPr/>
-        </p:nvSpPr>
-        <p:spPr>
-          <a:xfrm>
-            <a:off x="562356" y="2692908"/>
-            <a:ext cx="1901952" cy="201168"/>
-          </a:xfrm>
-          <a:prstGeom prst="rect">
-            <a:avLst/>
-          </a:prstGeom>
-          <a:noFill/>
-          <a:ln/>
-        </p:spPr>
-        <p:txBody>
-          <a:bodyPr wrap="square" lIns="0" tIns="0" rIns="0" bIns="0" rtlCol="0" anchor="t"/>
-          <a:lstStyle/>
-          <a:p>
-            <a:pPr indent="0" marL="0">
-              <a:buNone/>
-            </a:pPr>
-            <a:r>
-              <a:rPr lang="en-US" sz="850" dirty="0">
-                <a:solidFill>
-                  <a:srgbClr val="444444"/>
-                </a:solidFill>
-                <a:latin typeface="Meiryo" pitchFamily="34" charset="0"/>
-                <a:ea typeface="Meiryo" pitchFamily="34" charset="-122"/>
-                <a:cs typeface="Meiryo" pitchFamily="34" charset="-120"/>
-              </a:rPr>
-              <a:t>せつめいをかく</a:t>
-            </a:r>
-            <a:endParaRPr lang="en-US" sz="850" dirty="0"/>
-          </a:p>
-        </p:txBody>
-      </p:sp>
-      <p:sp>
-        <p:nvSpPr>
-          <p:cNvPr id="17" name="Shape 15"/>
-          <p:cNvSpPr/>
-          <p:nvPr/>
-        </p:nvSpPr>
-        <p:spPr>
-          <a:xfrm>
-            <a:off x="562356" y="2967228"/>
-            <a:ext cx="155448" cy="155448"/>
-          </a:xfrm>
-          <a:prstGeom prst="ellipse">
-            <a:avLst/>
-          </a:prstGeom>
-          <a:solidFill>
-            <a:srgbClr val="E8452E"/>
-          </a:solidFill>
-          <a:ln w="9525">
-            <a:solidFill>
-              <a:srgbClr val="555555"/>
-            </a:solidFill>
-            <a:prstDash val="solid"/>
-          </a:ln>
-        </p:spPr>
-      </p:sp>
-      <p:sp>
-        <p:nvSpPr>
-          <p:cNvPr id="18" name="Shape 16"/>
-          <p:cNvSpPr/>
-          <p:nvPr/>
-        </p:nvSpPr>
-        <p:spPr>
-          <a:xfrm>
-            <a:off x="745236" y="2967228"/>
-            <a:ext cx="155448" cy="155448"/>
-          </a:xfrm>
-          <a:prstGeom prst="ellipse">
-            <a:avLst/>
-          </a:prstGeom>
-          <a:solidFill>
-            <a:srgbClr val="E8452E"/>
-          </a:solidFill>
-          <a:ln w="9525">
-            <a:solidFill>
-              <a:srgbClr val="555555"/>
-            </a:solidFill>
-            <a:prstDash val="solid"/>
-          </a:ln>
-        </p:spPr>
-      </p:sp>
-      <p:sp>
-        <p:nvSpPr>
-          <p:cNvPr id="19" name="Text 17"/>
-          <p:cNvSpPr txBox="1"/>
-          <p:nvPr/>
-        </p:nvSpPr>
-        <p:spPr>
-          <a:xfrm>
-            <a:off x="1019556" y="2930652"/>
-            <a:ext cx="1097280" cy="228600"/>
-          </a:xfrm>
-          <a:prstGeom prst="rect">
-            <a:avLst/>
-          </a:prstGeom>
-          <a:noFill/>
-          <a:ln/>
-        </p:spPr>
-        <p:txBody>
-          <a:bodyPr wrap="none" lIns="0" tIns="0" rIns="0" bIns="0" rtlCol="0" anchor="ctr"/>
-          <a:lstStyle/>
-          <a:p>
-            <a:pPr indent="0" marL="0">
-              <a:buNone/>
-            </a:pPr>
-            <a:r>
-              <a:rPr lang="en-US" sz="1200" b="1" dirty="0">
-                <a:solidFill>
-                  <a:srgbClr val="222222"/>
-                </a:solidFill>
-                <a:latin typeface="Meiryo" pitchFamily="34" charset="0"/>
-                <a:ea typeface="Meiryo" pitchFamily="34" charset="-122"/>
-                <a:cs typeface="Meiryo" pitchFamily="34" charset="-120"/>
-              </a:rPr>
-              <a:t>だいもんじ</a:t>
-            </a:r>
-            <a:endParaRPr lang="en-US" sz="1200" dirty="0"/>
-          </a:p>
-        </p:txBody>
-      </p:sp>
-      <p:sp>
-        <p:nvSpPr>
-          <p:cNvPr id="20" name="Text 18"/>
-          <p:cNvSpPr txBox="1"/>
-          <p:nvPr/>
-        </p:nvSpPr>
-        <p:spPr>
-          <a:xfrm>
-            <a:off x="1979676" y="2930652"/>
-            <a:ext cx="502920" cy="228600"/>
-          </a:xfrm>
-          <a:prstGeom prst="rect">
-            <a:avLst/>
-          </a:prstGeom>
-          <a:noFill/>
-          <a:ln/>
-        </p:spPr>
-        <p:txBody>
-          <a:bodyPr wrap="square" lIns="0" tIns="0" rIns="0" bIns="0" rtlCol="0" anchor="ctr"/>
-          <a:lstStyle/>
-          <a:p>
-            <a:pPr algn="r" indent="0" marL="0">
-              <a:buNone/>
-            </a:pPr>
-            <a:r>
-              <a:rPr lang="en-US" sz="1400" b="1" dirty="0">
-                <a:solidFill>
-                  <a:srgbClr val="222222"/>
-                </a:solidFill>
-                <a:latin typeface="Meiryo" pitchFamily="34" charset="0"/>
-                <a:ea typeface="Meiryo" pitchFamily="34" charset="-122"/>
-                <a:cs typeface="Meiryo" pitchFamily="34" charset="-120"/>
-              </a:rPr>
-              <a:t>60</a:t>
-            </a:r>
-            <a:endParaRPr lang="en-US" sz="1400" dirty="0"/>
-          </a:p>
-        </p:txBody>
-      </p:sp>
-      <p:sp>
-        <p:nvSpPr>
-          <p:cNvPr id="21" name="Text 19"/>
-          <p:cNvSpPr txBox="1"/>
-          <p:nvPr/>
-        </p:nvSpPr>
-        <p:spPr>
-          <a:xfrm>
-            <a:off x="562356" y="3177540"/>
-            <a:ext cx="1901952" cy="201168"/>
-          </a:xfrm>
-          <a:prstGeom prst="rect">
-            <a:avLst/>
-          </a:prstGeom>
-          <a:noFill/>
-          <a:ln/>
-        </p:spPr>
-        <p:txBody>
-          <a:bodyPr wrap="square" lIns="0" tIns="0" rIns="0" bIns="0" rtlCol="0" anchor="t"/>
-          <a:lstStyle/>
-          <a:p>
-            <a:pPr indent="0" marL="0">
-              <a:buNone/>
-            </a:pPr>
-            <a:r>
-              <a:rPr lang="en-US" sz="850" dirty="0">
-                <a:solidFill>
-                  <a:srgbClr val="444444"/>
-                </a:solidFill>
-                <a:latin typeface="Meiryo" pitchFamily="34" charset="0"/>
-                <a:ea typeface="Meiryo" pitchFamily="34" charset="-122"/>
-                <a:cs typeface="Meiryo" pitchFamily="34" charset="-120"/>
-              </a:rPr>
-              <a:t>せつめいをかく</a:t>
-            </a:r>
-            <a:endParaRPr lang="en-US" sz="850" dirty="0"/>
-          </a:p>
-        </p:txBody>
-      </p:sp>
-      <p:sp>
-        <p:nvSpPr>
-          <p:cNvPr id="22" name="Shape 20"/>
-          <p:cNvSpPr/>
-          <p:nvPr/>
-        </p:nvSpPr>
-        <p:spPr>
-          <a:xfrm>
-            <a:off x="470916" y="3415284"/>
-            <a:ext cx="2084832" cy="182880"/>
-          </a:xfrm>
-          <a:prstGeom prst="rect">
-            <a:avLst/>
-          </a:prstGeom>
-          <a:solidFill>
-            <a:srgbClr val="DADDE0"/>
-          </a:solidFill>
-          <a:ln w="6350">
-            <a:solidFill>
-              <a:srgbClr val="DADDE0"/>
-            </a:solidFill>
-            <a:prstDash val="solid"/>
-          </a:ln>
-        </p:spPr>
-      </p:sp>
-      <p:sp>
-        <p:nvSpPr>
-          <p:cNvPr id="23" name="Text 21"/>
-          <p:cNvSpPr txBox="1"/>
-          <p:nvPr/>
-        </p:nvSpPr>
-        <p:spPr>
-          <a:xfrm>
-            <a:off x="507492" y="3415284"/>
-            <a:ext cx="274320" cy="182880"/>
-          </a:xfrm>
-          <a:prstGeom prst="rect">
-            <a:avLst/>
-          </a:prstGeom>
-          <a:noFill/>
-          <a:ln/>
-        </p:spPr>
-        <p:txBody>
-          <a:bodyPr wrap="square" lIns="0" tIns="0" rIns="0" bIns="0" rtlCol="0" anchor="ctr"/>
-          <a:lstStyle/>
-          <a:p>
-            <a:pPr indent="0" marL="0">
-              <a:buNone/>
-            </a:pPr>
-            <a:r>
-              <a:rPr lang="en-US" sz="700" b="1" dirty="0">
-                <a:solidFill>
-                  <a:srgbClr val="222222"/>
-                </a:solidFill>
-                <a:latin typeface="Meiryo" pitchFamily="34" charset="0"/>
-                <a:ea typeface="Meiryo" pitchFamily="34" charset="-122"/>
-                <a:cs typeface="Meiryo" pitchFamily="34" charset="-120"/>
-              </a:rPr>
-              <a:t>弱点</a:t>
-            </a:r>
-            <a:endParaRPr lang="en-US" sz="700" dirty="0"/>
-          </a:p>
-        </p:txBody>
-      </p:sp>
-      <p:sp>
-        <p:nvSpPr>
-          <p:cNvPr id="24" name="Shape 22"/>
-          <p:cNvSpPr/>
-          <p:nvPr/>
-        </p:nvSpPr>
-        <p:spPr>
-          <a:xfrm>
-            <a:off x="781812" y="3438144"/>
-            <a:ext cx="137160" cy="137160"/>
-          </a:xfrm>
-          <a:prstGeom prst="ellipse">
-            <a:avLst/>
-          </a:prstGeom>
-          <a:solidFill>
-            <a:srgbClr val="2F8FE0"/>
-          </a:solidFill>
-          <a:ln w="9525">
-            <a:solidFill>
-              <a:srgbClr val="555555"/>
-            </a:solidFill>
-            <a:prstDash val="solid"/>
-          </a:ln>
-        </p:spPr>
-      </p:sp>
-      <p:sp>
-        <p:nvSpPr>
-          <p:cNvPr id="25" name="Text 23"/>
-          <p:cNvSpPr txBox="1"/>
-          <p:nvPr/>
-        </p:nvSpPr>
-        <p:spPr>
-          <a:xfrm>
-            <a:off x="937260" y="3415284"/>
-            <a:ext cx="228600" cy="182880"/>
-          </a:xfrm>
-          <a:prstGeom prst="rect">
-            <a:avLst/>
-          </a:prstGeom>
-          <a:noFill/>
-          <a:ln/>
-        </p:spPr>
-        <p:txBody>
-          <a:bodyPr wrap="square" lIns="0" tIns="0" rIns="0" bIns="0" rtlCol="0" anchor="ctr"/>
-          <a:lstStyle/>
-          <a:p>
-            <a:pPr indent="0" marL="0">
-              <a:buNone/>
-            </a:pPr>
-            <a:r>
-              <a:rPr lang="en-US" sz="900" b="1" dirty="0">
-                <a:solidFill>
-                  <a:srgbClr val="222222"/>
-                </a:solidFill>
-                <a:latin typeface="Meiryo" pitchFamily="34" charset="0"/>
-                <a:ea typeface="Meiryo" pitchFamily="34" charset="-122"/>
-                <a:cs typeface="Meiryo" pitchFamily="34" charset="-120"/>
-              </a:rPr>
-              <a:t>×2</a:t>
-            </a:r>
-            <a:endParaRPr lang="en-US" sz="900" dirty="0"/>
-          </a:p>
-        </p:txBody>
-      </p:sp>
-      <p:sp>
-        <p:nvSpPr>
-          <p:cNvPr id="26" name="Text 24"/>
-          <p:cNvSpPr txBox="1"/>
-          <p:nvPr/>
-        </p:nvSpPr>
-        <p:spPr>
-          <a:xfrm>
-            <a:off x="1184148" y="3415284"/>
-            <a:ext cx="365760" cy="182880"/>
-          </a:xfrm>
-          <a:prstGeom prst="rect">
-            <a:avLst/>
-          </a:prstGeom>
-          <a:noFill/>
-          <a:ln/>
-        </p:spPr>
-        <p:txBody>
-          <a:bodyPr wrap="square" lIns="0" tIns="0" rIns="0" bIns="0" rtlCol="0" anchor="ctr"/>
-          <a:lstStyle/>
-          <a:p>
-            <a:pPr indent="0" marL="0">
-              <a:buNone/>
-            </a:pPr>
-            <a:r>
-              <a:rPr lang="en-US" sz="700" b="1" dirty="0">
-                <a:solidFill>
-                  <a:srgbClr val="222222"/>
-                </a:solidFill>
-                <a:latin typeface="Meiryo" pitchFamily="34" charset="0"/>
-                <a:ea typeface="Meiryo" pitchFamily="34" charset="-122"/>
-                <a:cs typeface="Meiryo" pitchFamily="34" charset="-120"/>
-              </a:rPr>
-              <a:t>抵抗力</a:t>
-            </a:r>
-            <a:endParaRPr lang="en-US" sz="700" dirty="0"/>
-          </a:p>
-        </p:txBody>
-      </p:sp>
-      <p:sp>
-        <p:nvSpPr>
-          <p:cNvPr id="27" name="Text 25"/>
-          <p:cNvSpPr txBox="1"/>
-          <p:nvPr/>
-        </p:nvSpPr>
-        <p:spPr>
-          <a:xfrm>
-            <a:off x="1531620" y="3415284"/>
-            <a:ext cx="274320" cy="182880"/>
-          </a:xfrm>
-          <a:prstGeom prst="rect">
-            <a:avLst/>
-          </a:prstGeom>
-          <a:noFill/>
-          <a:ln/>
-        </p:spPr>
-        <p:txBody>
-          <a:bodyPr wrap="square" lIns="0" tIns="0" rIns="0" bIns="0" rtlCol="0" anchor="ctr"/>
-          <a:lstStyle/>
-          <a:p>
-            <a:pPr indent="0" marL="0">
-              <a:buNone/>
-            </a:pPr>
-            <a:r>
-              <a:rPr lang="en-US" sz="800" b="1" dirty="0">
-                <a:solidFill>
-                  <a:srgbClr val="222222"/>
-                </a:solidFill>
-                <a:latin typeface="Meiryo" pitchFamily="34" charset="0"/>
-                <a:ea typeface="Meiryo" pitchFamily="34" charset="-122"/>
-                <a:cs typeface="Meiryo" pitchFamily="34" charset="-120"/>
-              </a:rPr>
-              <a:t>－20</a:t>
-            </a:r>
-            <a:endParaRPr lang="en-US" sz="800" dirty="0"/>
-          </a:p>
-        </p:txBody>
-      </p:sp>
-      <p:sp>
-        <p:nvSpPr>
-          <p:cNvPr id="28" name="Text 26"/>
-          <p:cNvSpPr txBox="1"/>
-          <p:nvPr/>
-        </p:nvSpPr>
-        <p:spPr>
-          <a:xfrm>
-            <a:off x="1952244" y="3415284"/>
-            <a:ext cx="320040" cy="182880"/>
-          </a:xfrm>
-          <a:prstGeom prst="rect">
-            <a:avLst/>
-          </a:prstGeom>
-          <a:noFill/>
-          <a:ln/>
-        </p:spPr>
-        <p:txBody>
-          <a:bodyPr wrap="square" lIns="0" tIns="0" rIns="0" bIns="0" rtlCol="0" anchor="ctr"/>
-          <a:lstStyle/>
-          <a:p>
-            <a:pPr indent="0" marL="0">
-              <a:buNone/>
-            </a:pPr>
-            <a:r>
-              <a:rPr lang="en-US" sz="700" b="1" dirty="0">
-                <a:solidFill>
-                  <a:srgbClr val="222222"/>
-                </a:solidFill>
-                <a:latin typeface="Meiryo" pitchFamily="34" charset="0"/>
-                <a:ea typeface="Meiryo" pitchFamily="34" charset="-122"/>
-                <a:cs typeface="Meiryo" pitchFamily="34" charset="-120"/>
-              </a:rPr>
-              <a:t>にげる</a:t>
-            </a:r>
-            <a:endParaRPr lang="en-US" sz="700" dirty="0"/>
-          </a:p>
-        </p:txBody>
-      </p:sp>
-      <p:sp>
-        <p:nvSpPr>
-          <p:cNvPr id="29" name="Shape 27"/>
-          <p:cNvSpPr/>
-          <p:nvPr/>
-        </p:nvSpPr>
-        <p:spPr>
-          <a:xfrm>
-            <a:off x="2281428" y="3438144"/>
-            <a:ext cx="137160" cy="137160"/>
-          </a:xfrm>
-          <a:prstGeom prst="ellipse">
-            <a:avLst/>
-          </a:prstGeom>
-          <a:solidFill>
-            <a:srgbClr val="F2F2F2"/>
-          </a:solidFill>
-          <a:ln w="9525">
-            <a:solidFill>
-              <a:srgbClr val="555555"/>
-            </a:solidFill>
-            <a:prstDash val="solid"/>
-          </a:ln>
-        </p:spPr>
-      </p:sp>
-      <p:sp>
-        <p:nvSpPr>
-          <p:cNvPr id="30" name="Shape 28"/>
-          <p:cNvSpPr/>
-          <p:nvPr/>
-        </p:nvSpPr>
-        <p:spPr>
-          <a:xfrm>
-            <a:off x="2647188" y="598932"/>
-            <a:ext cx="2267712" cy="3163824"/>
-          </a:xfrm>
-          <a:prstGeom prst="rect">
-            <a:avLst/>
-          </a:prstGeom>
-          <a:solidFill>
-            <a:srgbClr val="FFFFFF"/>
-          </a:solidFill>
-          <a:ln w="6350">
-            <a:solidFill>
-              <a:srgbClr val="999999"/>
-            </a:solidFill>
-            <a:prstDash val="dash"/>
-          </a:ln>
-        </p:spPr>
-      </p:sp>
-      <p:sp>
-        <p:nvSpPr>
-          <p:cNvPr id="31" name="Shape 29"/>
-          <p:cNvSpPr/>
-          <p:nvPr/>
-        </p:nvSpPr>
-        <p:spPr>
-          <a:xfrm>
-            <a:off x="2674620" y="626364"/>
-            <a:ext cx="2212848" cy="3108960"/>
-          </a:xfrm>
-          <a:prstGeom prst="roundRect">
-            <a:avLst>
-              <a:gd name="adj" fmla="val 4132"/>
-            </a:avLst>
-          </a:prstGeom>
-          <a:solidFill>
-            <a:srgbClr val="C9CCD0"/>
-          </a:solidFill>
-          <a:ln w="6350">
-            <a:solidFill>
-              <a:srgbClr val="C9CCD0"/>
-            </a:solidFill>
-            <a:prstDash val="solid"/>
-          </a:ln>
-        </p:spPr>
-      </p:sp>
-      <p:sp>
-        <p:nvSpPr>
-          <p:cNvPr id="32" name="Shape 30"/>
-          <p:cNvSpPr/>
-          <p:nvPr/>
-        </p:nvSpPr>
-        <p:spPr>
-          <a:xfrm>
-            <a:off x="2738628" y="690372"/>
-            <a:ext cx="2084832" cy="2980944"/>
-          </a:xfrm>
-          <a:prstGeom prst="rect">
-            <a:avLst/>
-          </a:prstGeom>
-          <a:solidFill>
-            <a:srgbClr val="A9D6F5"/>
-          </a:solidFill>
-          <a:ln w="6350">
-            <a:solidFill>
-              <a:srgbClr val="A9D6F5"/>
-            </a:solidFill>
-            <a:prstDash val="solid"/>
-          </a:ln>
-        </p:spPr>
-      </p:sp>
-      <p:sp>
-        <p:nvSpPr>
-          <p:cNvPr id="33" name="Shape 31"/>
-          <p:cNvSpPr/>
-          <p:nvPr/>
-        </p:nvSpPr>
-        <p:spPr>
-          <a:xfrm>
-            <a:off x="2738628" y="690372"/>
-            <a:ext cx="384048" cy="155448"/>
-          </a:xfrm>
-          <a:prstGeom prst="roundRect">
-            <a:avLst>
-              <a:gd name="adj" fmla="val 29412"/>
-            </a:avLst>
-          </a:prstGeom>
-          <a:solidFill>
-            <a:srgbClr val="C9CCD0"/>
-          </a:solidFill>
-          <a:ln w="6350">
-            <a:solidFill>
-              <a:srgbClr val="C9CCD0"/>
-            </a:solidFill>
-            <a:prstDash val="solid"/>
-          </a:ln>
-        </p:spPr>
-      </p:sp>
-      <p:sp>
-        <p:nvSpPr>
-          <p:cNvPr id="34" name="Text 32"/>
-          <p:cNvSpPr txBox="1"/>
-          <p:nvPr/>
-        </p:nvSpPr>
-        <p:spPr>
-          <a:xfrm>
-            <a:off x="2738628" y="690372"/>
-            <a:ext cx="384048" cy="155448"/>
-          </a:xfrm>
-          <a:prstGeom prst="rect">
-            <a:avLst/>
-          </a:prstGeom>
-          <a:noFill/>
-          <a:ln/>
-        </p:spPr>
-        <p:txBody>
-          <a:bodyPr wrap="square" lIns="0" tIns="0" rIns="0" bIns="0" rtlCol="0" anchor="ctr"/>
-          <a:lstStyle/>
-          <a:p>
-            <a:pPr algn="ctr" indent="0" marL="0">
-              <a:buNone/>
-            </a:pPr>
-            <a:r>
-              <a:rPr lang="en-US" sz="800" b="1" i="1" dirty="0">
-                <a:solidFill>
-                  <a:srgbClr val="222222"/>
-                </a:solidFill>
-                <a:latin typeface="Meiryo" pitchFamily="34" charset="0"/>
-                <a:ea typeface="Meiryo" pitchFamily="34" charset="-122"/>
-                <a:cs typeface="Meiryo" pitchFamily="34" charset="-120"/>
-              </a:rPr>
-              <a:t>たね</a:t>
-            </a:r>
-            <a:endParaRPr lang="en-US" sz="800" dirty="0"/>
-          </a:p>
-        </p:txBody>
-      </p:sp>
-      <p:sp>
-        <p:nvSpPr>
-          <p:cNvPr id="35" name="Text 33"/>
-          <p:cNvSpPr txBox="1"/>
-          <p:nvPr/>
-        </p:nvSpPr>
-        <p:spPr>
-          <a:xfrm>
-            <a:off x="3168396" y="708660"/>
-            <a:ext cx="914400" cy="274320"/>
-          </a:xfrm>
-          <a:prstGeom prst="rect">
-            <a:avLst/>
-          </a:prstGeom>
-          <a:noFill/>
-          <a:ln/>
-        </p:spPr>
-        <p:txBody>
-          <a:bodyPr wrap="none" lIns="0" tIns="0" rIns="0" bIns="0" rtlCol="0" anchor="ctr"/>
-          <a:lstStyle/>
-          <a:p>
-            <a:pPr indent="0" marL="0">
-              <a:buNone/>
-            </a:pPr>
-            <a:r>
-              <a:rPr lang="en-US" sz="1100" b="1" dirty="0">
-                <a:solidFill>
-                  <a:srgbClr val="222222"/>
-                </a:solidFill>
-                <a:latin typeface="Meiryo" pitchFamily="34" charset="0"/>
-                <a:ea typeface="Meiryo" pitchFamily="34" charset="-122"/>
-                <a:cs typeface="Meiryo" pitchFamily="34" charset="-120"/>
-              </a:rPr>
-              <a:t>あらしクジラ</a:t>
-            </a:r>
-            <a:endParaRPr lang="en-US" sz="1100" dirty="0"/>
-          </a:p>
-        </p:txBody>
-      </p:sp>
-      <p:sp>
-        <p:nvSpPr>
-          <p:cNvPr id="36" name="Text 34"/>
-          <p:cNvSpPr txBox="1"/>
-          <p:nvPr/>
-        </p:nvSpPr>
-        <p:spPr>
-          <a:xfrm>
-            <a:off x="4018788" y="708660"/>
-            <a:ext cx="566928" cy="274320"/>
-          </a:xfrm>
-          <a:prstGeom prst="rect">
-            <a:avLst/>
-          </a:prstGeom>
-          <a:noFill/>
-          <a:ln/>
-        </p:spPr>
-        <p:txBody>
-          <a:bodyPr wrap="square" lIns="0" tIns="0" rIns="0" bIns="0" rtlCol="0" anchor="ctr"/>
-          <a:lstStyle/>
-          <a:p>
-            <a:pPr algn="r" indent="0" marL="0">
-              <a:buNone/>
-            </a:pPr>
-            <a:r>
-              <a:rPr lang="en-US" sz="1200" b="1" dirty="0">
-                <a:solidFill>
-                  <a:srgbClr val="222222"/>
-                </a:solidFill>
-                <a:latin typeface="Meiryo" pitchFamily="34" charset="0"/>
-                <a:ea typeface="Meiryo" pitchFamily="34" charset="-122"/>
-                <a:cs typeface="Meiryo" pitchFamily="34" charset="-120"/>
-              </a:rPr>
-              <a:t>HP 100</a:t>
-            </a:r>
-            <a:endParaRPr lang="en-US" sz="1200" dirty="0"/>
-          </a:p>
-        </p:txBody>
-      </p:sp>
-      <p:sp>
-        <p:nvSpPr>
-          <p:cNvPr id="37" name="Shape 35"/>
-          <p:cNvSpPr/>
-          <p:nvPr/>
-        </p:nvSpPr>
-        <p:spPr>
-          <a:xfrm>
-            <a:off x="4613148" y="754380"/>
-            <a:ext cx="173736" cy="173736"/>
-          </a:xfrm>
-          <a:prstGeom prst="ellipse">
-            <a:avLst/>
-          </a:prstGeom>
-          <a:solidFill>
-            <a:srgbClr val="2F8FE0"/>
-          </a:solidFill>
-          <a:ln w="9525">
-            <a:solidFill>
-              <a:srgbClr val="555555"/>
-            </a:solidFill>
-            <a:prstDash val="solid"/>
-          </a:ln>
-        </p:spPr>
-      </p:sp>
-      <p:sp>
-        <p:nvSpPr>
-          <p:cNvPr id="38" name="Shape 36"/>
-          <p:cNvSpPr/>
-          <p:nvPr/>
-        </p:nvSpPr>
-        <p:spPr>
-          <a:xfrm>
-            <a:off x="2820924" y="1010412"/>
-            <a:ext cx="1920240" cy="1225296"/>
-          </a:xfrm>
-          <a:prstGeom prst="rect">
-            <a:avLst/>
-          </a:prstGeom>
-          <a:solidFill>
-            <a:srgbClr val="FFFFFF"/>
-          </a:solidFill>
-          <a:ln w="31750">
-            <a:solidFill>
-              <a:srgbClr val="C9CCD0"/>
-            </a:solidFill>
-            <a:prstDash val="solid"/>
-          </a:ln>
-        </p:spPr>
-      </p:sp>
-      <p:sp>
-        <p:nvSpPr>
-          <p:cNvPr id="39" name="Text 37"/>
-          <p:cNvSpPr txBox="1"/>
-          <p:nvPr/>
-        </p:nvSpPr>
-        <p:spPr>
-          <a:xfrm>
-            <a:off x="2921508" y="1010412"/>
-            <a:ext cx="1719072" cy="1225296"/>
-          </a:xfrm>
-          <a:prstGeom prst="rect">
-            <a:avLst/>
-          </a:prstGeom>
-          <a:noFill/>
-          <a:ln/>
-        </p:spPr>
-        <p:txBody>
-          <a:bodyPr wrap="square" lIns="0" tIns="0" rIns="0" bIns="0" rtlCol="0" anchor="ctr"/>
-          <a:lstStyle/>
-          <a:p>
-            <a:pPr algn="ctr" indent="0" marL="0">
-              <a:buNone/>
-            </a:pPr>
-            <a:r>
-              <a:rPr lang="en-US" sz="950" dirty="0">
-                <a:solidFill>
-                  <a:srgbClr val="AAAAAA"/>
-                </a:solidFill>
-                <a:latin typeface="Meiryo" pitchFamily="34" charset="0"/>
-                <a:ea typeface="Meiryo" pitchFamily="34" charset="-122"/>
-                <a:cs typeface="Meiryo" pitchFamily="34" charset="-120"/>
-              </a:rPr>
-              <a:t>ここに絵をはる</a:t>
-            </a:r>
-            <a:endParaRPr lang="en-US" sz="950" dirty="0"/>
-          </a:p>
-          <a:p>
-            <a:pPr algn="ctr" indent="0" marL="0">
-              <a:buNone/>
-            </a:pPr>
-            <a:r>
-              <a:rPr lang="en-US" sz="950" dirty="0">
-                <a:solidFill>
-                  <a:srgbClr val="AAAAAA"/>
-                </a:solidFill>
-                <a:latin typeface="Meiryo" pitchFamily="34" charset="0"/>
-                <a:ea typeface="Meiryo" pitchFamily="34" charset="-122"/>
-                <a:cs typeface="Meiryo" pitchFamily="34" charset="-120"/>
-              </a:rPr>
-              <a:t>（あらしの海をおよぐ、大きなクジラ）</a:t>
-            </a:r>
-            <a:endParaRPr lang="en-US" sz="950" dirty="0"/>
-          </a:p>
-        </p:txBody>
-      </p:sp>
-      <p:sp>
-        <p:nvSpPr>
-          <p:cNvPr id="40" name="Text 38"/>
-          <p:cNvSpPr txBox="1"/>
-          <p:nvPr/>
-        </p:nvSpPr>
-        <p:spPr>
-          <a:xfrm>
-            <a:off x="2820924" y="2244852"/>
-            <a:ext cx="822960" cy="146304"/>
-          </a:xfrm>
-          <a:prstGeom prst="rect">
-            <a:avLst/>
-          </a:prstGeom>
-          <a:noFill/>
-          <a:ln/>
-        </p:spPr>
-        <p:txBody>
-          <a:bodyPr wrap="square" lIns="0" tIns="0" rIns="0" bIns="0" rtlCol="0" anchor="ctr"/>
-          <a:lstStyle/>
-          <a:p>
-            <a:pPr indent="0" marL="0">
-              <a:buNone/>
-            </a:pPr>
-            <a:r>
-              <a:rPr lang="en-US" sz="800" b="1" dirty="0">
-                <a:solidFill>
-                  <a:srgbClr val="444444"/>
-                </a:solidFill>
-                <a:latin typeface="Meiryo" pitchFamily="34" charset="0"/>
-                <a:ea typeface="Meiryo" pitchFamily="34" charset="-122"/>
-                <a:cs typeface="Meiryo" pitchFamily="34" charset="-120"/>
-              </a:rPr>
-              <a:t>ランク A</a:t>
-            </a:r>
-            <a:endParaRPr lang="en-US" sz="800" dirty="0"/>
-          </a:p>
-        </p:txBody>
-      </p:sp>
-      <p:sp>
-        <p:nvSpPr>
-          <p:cNvPr id="41" name="Shape 39"/>
-          <p:cNvSpPr/>
-          <p:nvPr/>
-        </p:nvSpPr>
-        <p:spPr>
-          <a:xfrm>
-            <a:off x="2830068" y="2482596"/>
-            <a:ext cx="155448" cy="155448"/>
-          </a:xfrm>
-          <a:prstGeom prst="ellipse">
-            <a:avLst/>
-          </a:prstGeom>
-          <a:solidFill>
-            <a:srgbClr val="2F8FE0"/>
-          </a:solidFill>
-          <a:ln w="9525">
-            <a:solidFill>
-              <a:srgbClr val="555555"/>
-            </a:solidFill>
-            <a:prstDash val="solid"/>
-          </a:ln>
-        </p:spPr>
-      </p:sp>
-      <p:sp>
-        <p:nvSpPr>
-          <p:cNvPr id="42" name="Text 40"/>
-          <p:cNvSpPr txBox="1"/>
-          <p:nvPr/>
-        </p:nvSpPr>
-        <p:spPr>
-          <a:xfrm>
-            <a:off x="3287268" y="2446020"/>
-            <a:ext cx="1097280" cy="228600"/>
-          </a:xfrm>
-          <a:prstGeom prst="rect">
-            <a:avLst/>
-          </a:prstGeom>
-          <a:noFill/>
-          <a:ln/>
-        </p:spPr>
-        <p:txBody>
-          <a:bodyPr wrap="none" lIns="0" tIns="0" rIns="0" bIns="0" rtlCol="0" anchor="ctr"/>
-          <a:lstStyle/>
-          <a:p>
-            <a:pPr indent="0" marL="0">
-              <a:buNone/>
-            </a:pPr>
-            <a:r>
-              <a:rPr lang="en-US" sz="1200" b="1" dirty="0">
-                <a:solidFill>
-                  <a:srgbClr val="222222"/>
-                </a:solidFill>
-                <a:latin typeface="Meiryo" pitchFamily="34" charset="0"/>
-                <a:ea typeface="Meiryo" pitchFamily="34" charset="-122"/>
-                <a:cs typeface="Meiryo" pitchFamily="34" charset="-120"/>
-              </a:rPr>
-              <a:t>みずしぶき</a:t>
-            </a:r>
-            <a:endParaRPr lang="en-US" sz="1200" dirty="0"/>
-          </a:p>
-        </p:txBody>
-      </p:sp>
-      <p:sp>
-        <p:nvSpPr>
-          <p:cNvPr id="43" name="Text 41"/>
-          <p:cNvSpPr txBox="1"/>
-          <p:nvPr/>
-        </p:nvSpPr>
-        <p:spPr>
-          <a:xfrm>
-            <a:off x="4247388" y="2446020"/>
-            <a:ext cx="502920" cy="228600"/>
-          </a:xfrm>
-          <a:prstGeom prst="rect">
-            <a:avLst/>
-          </a:prstGeom>
-          <a:noFill/>
-          <a:ln/>
-        </p:spPr>
-        <p:txBody>
-          <a:bodyPr wrap="square" lIns="0" tIns="0" rIns="0" bIns="0" rtlCol="0" anchor="ctr"/>
-          <a:lstStyle/>
-          <a:p>
-            <a:pPr algn="r" indent="0" marL="0">
-              <a:buNone/>
-            </a:pPr>
-            <a:r>
-              <a:rPr lang="en-US" sz="1400" b="1" dirty="0">
-                <a:solidFill>
-                  <a:srgbClr val="222222"/>
-                </a:solidFill>
-                <a:latin typeface="Meiryo" pitchFamily="34" charset="0"/>
-                <a:ea typeface="Meiryo" pitchFamily="34" charset="-122"/>
-                <a:cs typeface="Meiryo" pitchFamily="34" charset="-120"/>
-              </a:rPr>
-              <a:t>20</a:t>
-            </a:r>
-            <a:endParaRPr lang="en-US" sz="1400" dirty="0"/>
-          </a:p>
-        </p:txBody>
-      </p:sp>
-      <p:sp>
-        <p:nvSpPr>
-          <p:cNvPr id="44" name="Text 42"/>
-          <p:cNvSpPr txBox="1"/>
-          <p:nvPr/>
-        </p:nvSpPr>
-        <p:spPr>
-          <a:xfrm>
-            <a:off x="2830068" y="2692908"/>
-            <a:ext cx="1901952" cy="201168"/>
-          </a:xfrm>
-          <a:prstGeom prst="rect">
-            <a:avLst/>
-          </a:prstGeom>
-          <a:noFill/>
-          <a:ln/>
-        </p:spPr>
-        <p:txBody>
-          <a:bodyPr wrap="square" lIns="0" tIns="0" rIns="0" bIns="0" rtlCol="0" anchor="t"/>
-          <a:lstStyle/>
-          <a:p>
-            <a:pPr indent="0" marL="0">
-              <a:buNone/>
-            </a:pPr>
-            <a:r>
-              <a:rPr lang="en-US" sz="850" dirty="0">
-                <a:solidFill>
-                  <a:srgbClr val="444444"/>
-                </a:solidFill>
-                <a:latin typeface="Meiryo" pitchFamily="34" charset="0"/>
-                <a:ea typeface="Meiryo" pitchFamily="34" charset="-122"/>
-                <a:cs typeface="Meiryo" pitchFamily="34" charset="-120"/>
-              </a:rPr>
-              <a:t>せつめいをかく</a:t>
-            </a:r>
-            <a:endParaRPr lang="en-US" sz="850" dirty="0"/>
-          </a:p>
-        </p:txBody>
-      </p:sp>
-      <p:sp>
-        <p:nvSpPr>
-          <p:cNvPr id="45" name="Shape 43"/>
-          <p:cNvSpPr/>
-          <p:nvPr/>
-        </p:nvSpPr>
-        <p:spPr>
-          <a:xfrm>
-            <a:off x="2830068" y="2967228"/>
-            <a:ext cx="155448" cy="155448"/>
-          </a:xfrm>
-          <a:prstGeom prst="ellipse">
-            <a:avLst/>
-          </a:prstGeom>
-          <a:solidFill>
-            <a:srgbClr val="2F8FE0"/>
-          </a:solidFill>
-          <a:ln w="9525">
-            <a:solidFill>
-              <a:srgbClr val="555555"/>
-            </a:solidFill>
-            <a:prstDash val="solid"/>
-          </a:ln>
-        </p:spPr>
-      </p:sp>
-      <p:sp>
-        <p:nvSpPr>
-          <p:cNvPr id="46" name="Shape 44"/>
-          <p:cNvSpPr/>
-          <p:nvPr/>
-        </p:nvSpPr>
-        <p:spPr>
-          <a:xfrm>
-            <a:off x="3012948" y="2967228"/>
-            <a:ext cx="155448" cy="155448"/>
-          </a:xfrm>
-          <a:prstGeom prst="ellipse">
-            <a:avLst/>
-          </a:prstGeom>
-          <a:solidFill>
-            <a:srgbClr val="2F8FE0"/>
-          </a:solidFill>
-          <a:ln w="9525">
-            <a:solidFill>
-              <a:srgbClr val="555555"/>
-            </a:solidFill>
-            <a:prstDash val="solid"/>
-          </a:ln>
-        </p:spPr>
-      </p:sp>
-      <p:sp>
-        <p:nvSpPr>
-          <p:cNvPr id="47" name="Text 45"/>
-          <p:cNvSpPr txBox="1"/>
-          <p:nvPr/>
-        </p:nvSpPr>
-        <p:spPr>
-          <a:xfrm>
-            <a:off x="3287268" y="2930652"/>
-            <a:ext cx="1097280" cy="228600"/>
-          </a:xfrm>
-          <a:prstGeom prst="rect">
-            <a:avLst/>
-          </a:prstGeom>
-          <a:noFill/>
-          <a:ln/>
-        </p:spPr>
-        <p:txBody>
-          <a:bodyPr wrap="none" lIns="0" tIns="0" rIns="0" bIns="0" rtlCol="0" anchor="ctr"/>
-          <a:lstStyle/>
-          <a:p>
-            <a:pPr indent="0" marL="0">
-              <a:buNone/>
-            </a:pPr>
-            <a:r>
-              <a:rPr lang="en-US" sz="1200" b="1" dirty="0">
-                <a:solidFill>
-                  <a:srgbClr val="222222"/>
-                </a:solidFill>
-                <a:latin typeface="Meiryo" pitchFamily="34" charset="0"/>
-                <a:ea typeface="Meiryo" pitchFamily="34" charset="-122"/>
-                <a:cs typeface="Meiryo" pitchFamily="34" charset="-120"/>
-              </a:rPr>
-              <a:t>だいこうずい</a:t>
-            </a:r>
-            <a:endParaRPr lang="en-US" sz="1200" dirty="0"/>
-          </a:p>
-        </p:txBody>
-      </p:sp>
-      <p:sp>
-        <p:nvSpPr>
-          <p:cNvPr id="48" name="Text 46"/>
-          <p:cNvSpPr txBox="1"/>
-          <p:nvPr/>
-        </p:nvSpPr>
-        <p:spPr>
-          <a:xfrm>
-            <a:off x="4247388" y="2930652"/>
-            <a:ext cx="502920" cy="228600"/>
-          </a:xfrm>
-          <a:prstGeom prst="rect">
-            <a:avLst/>
-          </a:prstGeom>
-          <a:noFill/>
-          <a:ln/>
-        </p:spPr>
-        <p:txBody>
-          <a:bodyPr wrap="square" lIns="0" tIns="0" rIns="0" bIns="0" rtlCol="0" anchor="ctr"/>
-          <a:lstStyle/>
-          <a:p>
-            <a:pPr algn="r" indent="0" marL="0">
-              <a:buNone/>
-            </a:pPr>
-            <a:r>
-              <a:rPr lang="en-US" sz="1400" b="1" dirty="0">
-                <a:solidFill>
-                  <a:srgbClr val="222222"/>
-                </a:solidFill>
-                <a:latin typeface="Meiryo" pitchFamily="34" charset="0"/>
-                <a:ea typeface="Meiryo" pitchFamily="34" charset="-122"/>
-                <a:cs typeface="Meiryo" pitchFamily="34" charset="-120"/>
-              </a:rPr>
-              <a:t>60</a:t>
-            </a:r>
-            <a:endParaRPr lang="en-US" sz="1400" dirty="0"/>
-          </a:p>
-        </p:txBody>
-      </p:sp>
-      <p:sp>
-        <p:nvSpPr>
-          <p:cNvPr id="49" name="Text 47"/>
-          <p:cNvSpPr txBox="1"/>
-          <p:nvPr/>
-        </p:nvSpPr>
-        <p:spPr>
-          <a:xfrm>
-            <a:off x="2830068" y="3177540"/>
-            <a:ext cx="1901952" cy="201168"/>
-          </a:xfrm>
-          <a:prstGeom prst="rect">
-            <a:avLst/>
-          </a:prstGeom>
-          <a:noFill/>
-          <a:ln/>
-        </p:spPr>
-        <p:txBody>
-          <a:bodyPr wrap="square" lIns="0" tIns="0" rIns="0" bIns="0" rtlCol="0" anchor="t"/>
-          <a:lstStyle/>
-          <a:p>
-            <a:pPr indent="0" marL="0">
-              <a:buNone/>
-            </a:pPr>
-            <a:r>
-              <a:rPr lang="en-US" sz="850" dirty="0">
-                <a:solidFill>
-                  <a:srgbClr val="444444"/>
-                </a:solidFill>
-                <a:latin typeface="Meiryo" pitchFamily="34" charset="0"/>
-                <a:ea typeface="Meiryo" pitchFamily="34" charset="-122"/>
-                <a:cs typeface="Meiryo" pitchFamily="34" charset="-120"/>
-              </a:rPr>
-              <a:t>せつめいをかく</a:t>
-            </a:r>
-            <a:endParaRPr lang="en-US" sz="850" dirty="0"/>
-          </a:p>
-        </p:txBody>
-      </p:sp>
-      <p:sp>
-        <p:nvSpPr>
-          <p:cNvPr id="50" name="Shape 48"/>
-          <p:cNvSpPr/>
-          <p:nvPr/>
-        </p:nvSpPr>
-        <p:spPr>
-          <a:xfrm>
-            <a:off x="2738628" y="3415284"/>
-            <a:ext cx="2084832" cy="182880"/>
-          </a:xfrm>
-          <a:prstGeom prst="rect">
-            <a:avLst/>
-          </a:prstGeom>
-          <a:solidFill>
-            <a:srgbClr val="DADDE0"/>
-          </a:solidFill>
-          <a:ln w="6350">
-            <a:solidFill>
-              <a:srgbClr val="DADDE0"/>
-            </a:solidFill>
-            <a:prstDash val="solid"/>
-          </a:ln>
-        </p:spPr>
-      </p:sp>
-      <p:sp>
-        <p:nvSpPr>
-          <p:cNvPr id="51" name="Text 49"/>
-          <p:cNvSpPr txBox="1"/>
-          <p:nvPr/>
-        </p:nvSpPr>
-        <p:spPr>
-          <a:xfrm>
-            <a:off x="2775204" y="3415284"/>
-            <a:ext cx="274320" cy="182880"/>
-          </a:xfrm>
-          <a:prstGeom prst="rect">
-            <a:avLst/>
-          </a:prstGeom>
-          <a:noFill/>
-          <a:ln/>
-        </p:spPr>
-        <p:txBody>
-          <a:bodyPr wrap="square" lIns="0" tIns="0" rIns="0" bIns="0" rtlCol="0" anchor="ctr"/>
-          <a:lstStyle/>
-          <a:p>
-            <a:pPr indent="0" marL="0">
-              <a:buNone/>
-            </a:pPr>
-            <a:r>
-              <a:rPr lang="en-US" sz="700" b="1" dirty="0">
-                <a:solidFill>
-                  <a:srgbClr val="222222"/>
-                </a:solidFill>
-                <a:latin typeface="Meiryo" pitchFamily="34" charset="0"/>
-                <a:ea typeface="Meiryo" pitchFamily="34" charset="-122"/>
-                <a:cs typeface="Meiryo" pitchFamily="34" charset="-120"/>
-              </a:rPr>
-              <a:t>弱点</a:t>
-            </a:r>
-            <a:endParaRPr lang="en-US" sz="700" dirty="0"/>
-          </a:p>
-        </p:txBody>
-      </p:sp>
-      <p:sp>
-        <p:nvSpPr>
-          <p:cNvPr id="52" name="Shape 50"/>
-          <p:cNvSpPr/>
-          <p:nvPr/>
-        </p:nvSpPr>
-        <p:spPr>
-          <a:xfrm>
-            <a:off x="3049524" y="3438144"/>
-            <a:ext cx="137160" cy="137160"/>
-          </a:xfrm>
-          <a:prstGeom prst="ellipse">
-            <a:avLst/>
-          </a:prstGeom>
-          <a:solidFill>
-            <a:srgbClr val="3FA535"/>
-          </a:solidFill>
-          <a:ln w="9525">
-            <a:solidFill>
-              <a:srgbClr val="555555"/>
-            </a:solidFill>
-            <a:prstDash val="solid"/>
-          </a:ln>
-        </p:spPr>
-      </p:sp>
-      <p:sp>
-        <p:nvSpPr>
-          <p:cNvPr id="53" name="Text 51"/>
-          <p:cNvSpPr txBox="1"/>
-          <p:nvPr/>
-        </p:nvSpPr>
-        <p:spPr>
-          <a:xfrm>
-            <a:off x="3204972" y="3415284"/>
-            <a:ext cx="228600" cy="182880"/>
-          </a:xfrm>
-          <a:prstGeom prst="rect">
-            <a:avLst/>
-          </a:prstGeom>
-          <a:noFill/>
-          <a:ln/>
-        </p:spPr>
-        <p:txBody>
-          <a:bodyPr wrap="square" lIns="0" tIns="0" rIns="0" bIns="0" rtlCol="0" anchor="ctr"/>
-          <a:lstStyle/>
-          <a:p>
-            <a:pPr indent="0" marL="0">
-              <a:buNone/>
-            </a:pPr>
-            <a:r>
-              <a:rPr lang="en-US" sz="900" b="1" dirty="0">
-                <a:solidFill>
-                  <a:srgbClr val="222222"/>
-                </a:solidFill>
-                <a:latin typeface="Meiryo" pitchFamily="34" charset="0"/>
-                <a:ea typeface="Meiryo" pitchFamily="34" charset="-122"/>
-                <a:cs typeface="Meiryo" pitchFamily="34" charset="-120"/>
-              </a:rPr>
-              <a:t>×2</a:t>
-            </a:r>
-            <a:endParaRPr lang="en-US" sz="900" dirty="0"/>
-          </a:p>
-        </p:txBody>
-      </p:sp>
-      <p:sp>
-        <p:nvSpPr>
-          <p:cNvPr id="54" name="Text 52"/>
-          <p:cNvSpPr txBox="1"/>
-          <p:nvPr/>
-        </p:nvSpPr>
-        <p:spPr>
-          <a:xfrm>
-            <a:off x="3451860" y="3415284"/>
-            <a:ext cx="365760" cy="182880"/>
-          </a:xfrm>
-          <a:prstGeom prst="rect">
-            <a:avLst/>
-          </a:prstGeom>
-          <a:noFill/>
-          <a:ln/>
-        </p:spPr>
-        <p:txBody>
-          <a:bodyPr wrap="square" lIns="0" tIns="0" rIns="0" bIns="0" rtlCol="0" anchor="ctr"/>
-          <a:lstStyle/>
-          <a:p>
-            <a:pPr indent="0" marL="0">
-              <a:buNone/>
-            </a:pPr>
-            <a:r>
-              <a:rPr lang="en-US" sz="700" b="1" dirty="0">
-                <a:solidFill>
-                  <a:srgbClr val="222222"/>
-                </a:solidFill>
-                <a:latin typeface="Meiryo" pitchFamily="34" charset="0"/>
-                <a:ea typeface="Meiryo" pitchFamily="34" charset="-122"/>
-                <a:cs typeface="Meiryo" pitchFamily="34" charset="-120"/>
-              </a:rPr>
-              <a:t>抵抗力</a:t>
-            </a:r>
-            <a:endParaRPr lang="en-US" sz="700" dirty="0"/>
-          </a:p>
-        </p:txBody>
-      </p:sp>
-      <p:sp>
-        <p:nvSpPr>
-          <p:cNvPr id="55" name="Text 53"/>
-          <p:cNvSpPr txBox="1"/>
-          <p:nvPr/>
-        </p:nvSpPr>
-        <p:spPr>
-          <a:xfrm>
-            <a:off x="3799332" y="3415284"/>
-            <a:ext cx="274320" cy="182880"/>
-          </a:xfrm>
-          <a:prstGeom prst="rect">
-            <a:avLst/>
-          </a:prstGeom>
-          <a:noFill/>
-          <a:ln/>
-        </p:spPr>
-        <p:txBody>
-          <a:bodyPr wrap="square" lIns="0" tIns="0" rIns="0" bIns="0" rtlCol="0" anchor="ctr"/>
-          <a:lstStyle/>
-          <a:p>
-            <a:pPr indent="0" marL="0">
-              <a:buNone/>
-            </a:pPr>
-            <a:r>
-              <a:rPr lang="en-US" sz="800" b="1" dirty="0">
-                <a:solidFill>
-                  <a:srgbClr val="222222"/>
-                </a:solidFill>
-                <a:latin typeface="Meiryo" pitchFamily="34" charset="0"/>
-                <a:ea typeface="Meiryo" pitchFamily="34" charset="-122"/>
-                <a:cs typeface="Meiryo" pitchFamily="34" charset="-120"/>
-              </a:rPr>
-              <a:t>－20</a:t>
-            </a:r>
-            <a:endParaRPr lang="en-US" sz="800" dirty="0"/>
-          </a:p>
-        </p:txBody>
-      </p:sp>
-      <p:sp>
-        <p:nvSpPr>
-          <p:cNvPr id="56" name="Text 54"/>
-          <p:cNvSpPr txBox="1"/>
-          <p:nvPr/>
-        </p:nvSpPr>
-        <p:spPr>
-          <a:xfrm>
-            <a:off x="4219956" y="3415284"/>
-            <a:ext cx="320040" cy="182880"/>
-          </a:xfrm>
-          <a:prstGeom prst="rect">
-            <a:avLst/>
-          </a:prstGeom>
-          <a:noFill/>
-          <a:ln/>
-        </p:spPr>
-        <p:txBody>
-          <a:bodyPr wrap="square" lIns="0" tIns="0" rIns="0" bIns="0" rtlCol="0" anchor="ctr"/>
-          <a:lstStyle/>
-          <a:p>
-            <a:pPr indent="0" marL="0">
-              <a:buNone/>
-            </a:pPr>
-            <a:r>
-              <a:rPr lang="en-US" sz="700" b="1" dirty="0">
-                <a:solidFill>
-                  <a:srgbClr val="222222"/>
-                </a:solidFill>
-                <a:latin typeface="Meiryo" pitchFamily="34" charset="0"/>
-                <a:ea typeface="Meiryo" pitchFamily="34" charset="-122"/>
-                <a:cs typeface="Meiryo" pitchFamily="34" charset="-120"/>
-              </a:rPr>
-              <a:t>にげる</a:t>
-            </a:r>
-            <a:endParaRPr lang="en-US" sz="700" dirty="0"/>
-          </a:p>
-        </p:txBody>
-      </p:sp>
-      <p:sp>
-        <p:nvSpPr>
-          <p:cNvPr id="57" name="Shape 55"/>
-          <p:cNvSpPr/>
-          <p:nvPr/>
-        </p:nvSpPr>
-        <p:spPr>
-          <a:xfrm>
-            <a:off x="4549140" y="3438144"/>
-            <a:ext cx="137160" cy="137160"/>
-          </a:xfrm>
-          <a:prstGeom prst="ellipse">
-            <a:avLst/>
-          </a:prstGeom>
-          <a:solidFill>
-            <a:srgbClr val="F2F2F2"/>
-          </a:solidFill>
-          <a:ln w="9525">
-            <a:solidFill>
-              <a:srgbClr val="555555"/>
-            </a:solidFill>
-            <a:prstDash val="solid"/>
-          </a:ln>
-        </p:spPr>
-      </p:sp>
-      <p:sp>
-        <p:nvSpPr>
-          <p:cNvPr id="58" name="Shape 56"/>
-          <p:cNvSpPr/>
-          <p:nvPr/>
-        </p:nvSpPr>
-        <p:spPr>
-          <a:xfrm>
-            <a:off x="4914900" y="598932"/>
-            <a:ext cx="2267712" cy="3163824"/>
-          </a:xfrm>
-          <a:prstGeom prst="rect">
-            <a:avLst/>
-          </a:prstGeom>
-          <a:solidFill>
-            <a:srgbClr val="FFFFFF"/>
-          </a:solidFill>
-          <a:ln w="6350">
-            <a:solidFill>
-              <a:srgbClr val="999999"/>
-            </a:solidFill>
-            <a:prstDash val="dash"/>
-          </a:ln>
-        </p:spPr>
-      </p:sp>
-      <p:sp>
-        <p:nvSpPr>
-          <p:cNvPr id="59" name="Shape 57"/>
-          <p:cNvSpPr/>
-          <p:nvPr/>
-        </p:nvSpPr>
-        <p:spPr>
-          <a:xfrm>
-            <a:off x="4942332" y="626364"/>
-            <a:ext cx="2212848" cy="3108960"/>
-          </a:xfrm>
-          <a:prstGeom prst="roundRect">
-            <a:avLst>
-              <a:gd name="adj" fmla="val 4132"/>
-            </a:avLst>
-          </a:prstGeom>
-          <a:solidFill>
-            <a:srgbClr val="C9CCD0"/>
-          </a:solidFill>
-          <a:ln w="6350">
-            <a:solidFill>
-              <a:srgbClr val="C9CCD0"/>
-            </a:solidFill>
-            <a:prstDash val="solid"/>
-          </a:ln>
-        </p:spPr>
-      </p:sp>
-      <p:sp>
-        <p:nvSpPr>
-          <p:cNvPr id="60" name="Shape 58"/>
-          <p:cNvSpPr/>
-          <p:nvPr/>
-        </p:nvSpPr>
-        <p:spPr>
-          <a:xfrm>
-            <a:off x="5006340" y="690372"/>
-            <a:ext cx="2084832" cy="2980944"/>
-          </a:xfrm>
-          <a:prstGeom prst="rect">
-            <a:avLst/>
-          </a:prstGeom>
-          <a:solidFill>
-            <a:srgbClr val="BFE35A"/>
-          </a:solidFill>
-          <a:ln w="6350">
-            <a:solidFill>
-              <a:srgbClr val="BFE35A"/>
-            </a:solidFill>
-            <a:prstDash val="solid"/>
-          </a:ln>
-        </p:spPr>
-      </p:sp>
-      <p:sp>
-        <p:nvSpPr>
-          <p:cNvPr id="61" name="Shape 59"/>
-          <p:cNvSpPr/>
-          <p:nvPr/>
-        </p:nvSpPr>
-        <p:spPr>
-          <a:xfrm>
-            <a:off x="5006340" y="690372"/>
-            <a:ext cx="384048" cy="155448"/>
-          </a:xfrm>
-          <a:prstGeom prst="roundRect">
-            <a:avLst>
-              <a:gd name="adj" fmla="val 29412"/>
-            </a:avLst>
-          </a:prstGeom>
-          <a:solidFill>
-            <a:srgbClr val="C9CCD0"/>
-          </a:solidFill>
-          <a:ln w="6350">
-            <a:solidFill>
-              <a:srgbClr val="C9CCD0"/>
-            </a:solidFill>
-            <a:prstDash val="solid"/>
-          </a:ln>
-        </p:spPr>
-      </p:sp>
-      <p:sp>
-        <p:nvSpPr>
-          <p:cNvPr id="62" name="Text 60"/>
-          <p:cNvSpPr txBox="1"/>
-          <p:nvPr/>
-        </p:nvSpPr>
-        <p:spPr>
-          <a:xfrm>
-            <a:off x="5006340" y="690372"/>
-            <a:ext cx="384048" cy="155448"/>
-          </a:xfrm>
-          <a:prstGeom prst="rect">
-            <a:avLst/>
-          </a:prstGeom>
-          <a:noFill/>
-          <a:ln/>
-        </p:spPr>
-        <p:txBody>
-          <a:bodyPr wrap="square" lIns="0" tIns="0" rIns="0" bIns="0" rtlCol="0" anchor="ctr"/>
-          <a:lstStyle/>
-          <a:p>
-            <a:pPr algn="ctr" indent="0" marL="0">
-              <a:buNone/>
-            </a:pPr>
-            <a:r>
-              <a:rPr lang="en-US" sz="800" b="1" i="1" dirty="0">
-                <a:solidFill>
-                  <a:srgbClr val="222222"/>
-                </a:solidFill>
-                <a:latin typeface="Meiryo" pitchFamily="34" charset="0"/>
-                <a:ea typeface="Meiryo" pitchFamily="34" charset="-122"/>
-                <a:cs typeface="Meiryo" pitchFamily="34" charset="-120"/>
-              </a:rPr>
-              <a:t>たね</a:t>
-            </a:r>
-            <a:endParaRPr lang="en-US" sz="800" dirty="0"/>
-          </a:p>
-        </p:txBody>
-      </p:sp>
-      <p:sp>
-        <p:nvSpPr>
-          <p:cNvPr id="63" name="Text 61"/>
-          <p:cNvSpPr txBox="1"/>
-          <p:nvPr/>
-        </p:nvSpPr>
-        <p:spPr>
-          <a:xfrm>
-            <a:off x="5436108" y="708660"/>
-            <a:ext cx="914400" cy="274320"/>
-          </a:xfrm>
-          <a:prstGeom prst="rect">
-            <a:avLst/>
-          </a:prstGeom>
-          <a:noFill/>
-          <a:ln/>
-        </p:spPr>
-        <p:txBody>
-          <a:bodyPr wrap="none" lIns="0" tIns="0" rIns="0" bIns="0" rtlCol="0" anchor="ctr"/>
-          <a:lstStyle/>
-          <a:p>
-            <a:pPr indent="0" marL="0">
-              <a:buNone/>
-            </a:pPr>
-            <a:r>
-              <a:rPr lang="en-US" sz="1100" b="1" dirty="0">
-                <a:solidFill>
-                  <a:srgbClr val="222222"/>
-                </a:solidFill>
-                <a:latin typeface="Meiryo" pitchFamily="34" charset="0"/>
-                <a:ea typeface="Meiryo" pitchFamily="34" charset="-122"/>
-                <a:cs typeface="Meiryo" pitchFamily="34" charset="-120"/>
-              </a:rPr>
-              <a:t>はっぱウサギ</a:t>
-            </a:r>
-            <a:endParaRPr lang="en-US" sz="1100" dirty="0"/>
-          </a:p>
-        </p:txBody>
-      </p:sp>
-      <p:sp>
-        <p:nvSpPr>
-          <p:cNvPr id="64" name="Text 62"/>
-          <p:cNvSpPr txBox="1"/>
-          <p:nvPr/>
-        </p:nvSpPr>
-        <p:spPr>
-          <a:xfrm>
-            <a:off x="6286500" y="708660"/>
-            <a:ext cx="566928" cy="274320"/>
-          </a:xfrm>
-          <a:prstGeom prst="rect">
-            <a:avLst/>
-          </a:prstGeom>
-          <a:noFill/>
-          <a:ln/>
-        </p:spPr>
-        <p:txBody>
-          <a:bodyPr wrap="square" lIns="0" tIns="0" rIns="0" bIns="0" rtlCol="0" anchor="ctr"/>
-          <a:lstStyle/>
-          <a:p>
-            <a:pPr algn="r" indent="0" marL="0">
-              <a:buNone/>
-            </a:pPr>
-            <a:r>
-              <a:rPr lang="en-US" sz="1200" b="1" dirty="0">
-                <a:solidFill>
-                  <a:srgbClr val="222222"/>
-                </a:solidFill>
-                <a:latin typeface="Meiryo" pitchFamily="34" charset="0"/>
-                <a:ea typeface="Meiryo" pitchFamily="34" charset="-122"/>
-                <a:cs typeface="Meiryo" pitchFamily="34" charset="-120"/>
-              </a:rPr>
-              <a:t>HP 60</a:t>
-            </a:r>
-            <a:endParaRPr lang="en-US" sz="1200" dirty="0"/>
-          </a:p>
-        </p:txBody>
-      </p:sp>
-      <p:sp>
-        <p:nvSpPr>
-          <p:cNvPr id="65" name="Shape 63"/>
-          <p:cNvSpPr/>
-          <p:nvPr/>
-        </p:nvSpPr>
-        <p:spPr>
-          <a:xfrm>
-            <a:off x="6880860" y="754380"/>
-            <a:ext cx="173736" cy="173736"/>
-          </a:xfrm>
-          <a:prstGeom prst="ellipse">
-            <a:avLst/>
-          </a:prstGeom>
-          <a:solidFill>
-            <a:srgbClr val="3FA535"/>
-          </a:solidFill>
-          <a:ln w="9525">
-            <a:solidFill>
-              <a:srgbClr val="555555"/>
-            </a:solidFill>
-            <a:prstDash val="solid"/>
-          </a:ln>
-        </p:spPr>
-      </p:sp>
-      <p:sp>
-        <p:nvSpPr>
-          <p:cNvPr id="66" name="Shape 64"/>
-          <p:cNvSpPr/>
-          <p:nvPr/>
-        </p:nvSpPr>
-        <p:spPr>
-          <a:xfrm>
-            <a:off x="5088636" y="1010412"/>
-            <a:ext cx="1920240" cy="1225296"/>
-          </a:xfrm>
-          <a:prstGeom prst="rect">
-            <a:avLst/>
-          </a:prstGeom>
-          <a:solidFill>
-            <a:srgbClr val="FFFFFF"/>
-          </a:solidFill>
-          <a:ln w="31750">
-            <a:solidFill>
-              <a:srgbClr val="C9CCD0"/>
-            </a:solidFill>
-            <a:prstDash val="solid"/>
-          </a:ln>
-        </p:spPr>
-      </p:sp>
       <p:pic>
         <p:nvPicPr>
-          <p:cNvPr id="67" name="Image 0" descr="c3.jpg">    </p:cNvPr>
+          <p:cNvPr id="11" name="Image 0" descr="e10.jpg">    </p:cNvPr>
           <p:cNvPicPr>
             <a:picLocks noChangeAspect="1"/>
           </p:cNvPicPr>
@@ -11525,7 +9635,7 @@
         </p:blipFill>
         <p:spPr>
           <a:xfrm>
-            <a:off x="5102352" y="1024128"/>
+            <a:off x="566928" y="1024128"/>
             <a:ext cx="1892808" cy="1197864"/>
           </a:xfrm>
           <a:prstGeom prst="rect">
@@ -11535,13 +9645,13 @@
       </p:pic>
       <p:sp>
         <p:nvSpPr>
-          <p:cNvPr id="68" name="Text 65"/>
-          <p:cNvSpPr txBox="1"/>
-          <p:nvPr/>
-        </p:nvSpPr>
-        <p:spPr>
-          <a:xfrm>
-            <a:off x="5088636" y="2244852"/>
+          <p:cNvPr id="12" name="Text 9"/>
+          <p:cNvSpPr txBox="1"/>
+          <p:nvPr/>
+        </p:nvSpPr>
+        <p:spPr>
+          <a:xfrm>
+            <a:off x="553212" y="2244852"/>
             <a:ext cx="822960" cy="146304"/>
           </a:xfrm>
           <a:prstGeom prst="rect">
@@ -11566,7 +9676,7 @@
                 <a:ea typeface="Meiryo" pitchFamily="34" charset="-122"/>
                 <a:cs typeface="Meiryo" pitchFamily="34" charset="-120"/>
               </a:rPr>
-              <a:t>ランク B</a:t>
+              <a:t>ランク A</a:t>
             </a:r>
             <a:endParaRPr lang="en-US" sz="800" dirty="0"/>
           </a:p>
@@ -11574,20 +9684,20 @@
       </p:sp>
       <p:sp>
         <p:nvSpPr>
-          <p:cNvPr id="69" name="Shape 66"/>
-          <p:cNvSpPr/>
-          <p:nvPr/>
-        </p:nvSpPr>
-        <p:spPr>
-          <a:xfrm>
-            <a:off x="5097780" y="2482596"/>
+          <p:cNvPr id="13" name="Shape 10"/>
+          <p:cNvSpPr/>
+          <p:nvPr/>
+        </p:nvSpPr>
+        <p:spPr>
+          <a:xfrm>
+            <a:off x="562356" y="2482596"/>
             <a:ext cx="155448" cy="155448"/>
           </a:xfrm>
           <a:prstGeom prst="ellipse">
             <a:avLst/>
           </a:prstGeom>
           <a:solidFill>
-            <a:srgbClr val="3FA535"/>
+            <a:srgbClr val="E8452E"/>
           </a:solidFill>
           <a:ln w="9525">
             <a:solidFill>
@@ -11599,13 +9709,13 @@
       </p:sp>
       <p:sp>
         <p:nvSpPr>
-          <p:cNvPr id="70" name="Text 67"/>
-          <p:cNvSpPr txBox="1"/>
-          <p:nvPr/>
-        </p:nvSpPr>
-        <p:spPr>
-          <a:xfrm>
-            <a:off x="5554980" y="2446020"/>
+          <p:cNvPr id="14" name="Text 11"/>
+          <p:cNvSpPr txBox="1"/>
+          <p:nvPr/>
+        </p:nvSpPr>
+        <p:spPr>
+          <a:xfrm>
+            <a:off x="1019556" y="2446020"/>
             <a:ext cx="1097280" cy="228600"/>
           </a:xfrm>
           <a:prstGeom prst="rect">
@@ -11630,7 +9740,7 @@
                 <a:ea typeface="Meiryo" pitchFamily="34" charset="-122"/>
                 <a:cs typeface="Meiryo" pitchFamily="34" charset="-120"/>
               </a:rPr>
-              <a:t>はっぱカッター</a:t>
+              <a:t>ひのたま</a:t>
             </a:r>
             <a:endParaRPr lang="en-US" sz="1200" dirty="0"/>
           </a:p>
@@ -11638,13 +9748,13 @@
       </p:sp>
       <p:sp>
         <p:nvSpPr>
-          <p:cNvPr id="71" name="Text 68"/>
-          <p:cNvSpPr txBox="1"/>
-          <p:nvPr/>
-        </p:nvSpPr>
-        <p:spPr>
-          <a:xfrm>
-            <a:off x="6515100" y="2446020"/>
+          <p:cNvPr id="15" name="Text 12"/>
+          <p:cNvSpPr txBox="1"/>
+          <p:nvPr/>
+        </p:nvSpPr>
+        <p:spPr>
+          <a:xfrm>
+            <a:off x="1979676" y="2446020"/>
             <a:ext cx="502920" cy="228600"/>
           </a:xfrm>
           <a:prstGeom prst="rect">
@@ -11669,7 +9779,7 @@
                 <a:ea typeface="Meiryo" pitchFamily="34" charset="-122"/>
                 <a:cs typeface="Meiryo" pitchFamily="34" charset="-120"/>
               </a:rPr>
-              <a:t>20</a:t>
+              <a:t>30</a:t>
             </a:r>
             <a:endParaRPr lang="en-US" sz="1400" dirty="0"/>
           </a:p>
@@ -11677,13 +9787,13 @@
       </p:sp>
       <p:sp>
         <p:nvSpPr>
-          <p:cNvPr id="72" name="Text 69"/>
-          <p:cNvSpPr txBox="1"/>
-          <p:nvPr/>
-        </p:nvSpPr>
-        <p:spPr>
-          <a:xfrm>
-            <a:off x="5097780" y="2692908"/>
+          <p:cNvPr id="16" name="Text 13"/>
+          <p:cNvSpPr txBox="1"/>
+          <p:nvPr/>
+        </p:nvSpPr>
+        <p:spPr>
+          <a:xfrm>
+            <a:off x="562356" y="2692908"/>
             <a:ext cx="1901952" cy="201168"/>
           </a:xfrm>
           <a:prstGeom prst="rect">
@@ -11716,20 +9826,20 @@
       </p:sp>
       <p:sp>
         <p:nvSpPr>
-          <p:cNvPr id="73" name="Shape 70"/>
-          <p:cNvSpPr/>
-          <p:nvPr/>
-        </p:nvSpPr>
-        <p:spPr>
-          <a:xfrm>
-            <a:off x="5097780" y="2967228"/>
+          <p:cNvPr id="17" name="Shape 14"/>
+          <p:cNvSpPr/>
+          <p:nvPr/>
+        </p:nvSpPr>
+        <p:spPr>
+          <a:xfrm>
+            <a:off x="562356" y="2967228"/>
             <a:ext cx="155448" cy="155448"/>
           </a:xfrm>
           <a:prstGeom prst="ellipse">
             <a:avLst/>
           </a:prstGeom>
           <a:solidFill>
-            <a:srgbClr val="3FA535"/>
+            <a:srgbClr val="E8452E"/>
           </a:solidFill>
           <a:ln w="9525">
             <a:solidFill>
@@ -11741,20 +9851,20 @@
       </p:sp>
       <p:sp>
         <p:nvSpPr>
-          <p:cNvPr id="74" name="Shape 71"/>
-          <p:cNvSpPr/>
-          <p:nvPr/>
-        </p:nvSpPr>
-        <p:spPr>
-          <a:xfrm>
-            <a:off x="5280660" y="2967228"/>
+          <p:cNvPr id="18" name="Shape 15"/>
+          <p:cNvSpPr/>
+          <p:nvPr/>
+        </p:nvSpPr>
+        <p:spPr>
+          <a:xfrm>
+            <a:off x="745236" y="2967228"/>
             <a:ext cx="155448" cy="155448"/>
           </a:xfrm>
           <a:prstGeom prst="ellipse">
             <a:avLst/>
           </a:prstGeom>
           <a:solidFill>
-            <a:srgbClr val="3FA535"/>
+            <a:srgbClr val="E8452E"/>
           </a:solidFill>
           <a:ln w="9525">
             <a:solidFill>
@@ -11766,13 +9876,13 @@
       </p:sp>
       <p:sp>
         <p:nvSpPr>
-          <p:cNvPr id="75" name="Text 72"/>
-          <p:cNvSpPr txBox="1"/>
-          <p:nvPr/>
-        </p:nvSpPr>
-        <p:spPr>
-          <a:xfrm>
-            <a:off x="5554980" y="2930652"/>
+          <p:cNvPr id="19" name="Text 16"/>
+          <p:cNvSpPr txBox="1"/>
+          <p:nvPr/>
+        </p:nvSpPr>
+        <p:spPr>
+          <a:xfrm>
+            <a:off x="1019556" y="2930652"/>
             <a:ext cx="1097280" cy="228600"/>
           </a:xfrm>
           <a:prstGeom prst="rect">
@@ -11797,7 +9907,7 @@
                 <a:ea typeface="Meiryo" pitchFamily="34" charset="-122"/>
                 <a:cs typeface="Meiryo" pitchFamily="34" charset="-120"/>
               </a:rPr>
-              <a:t>ふわタックル</a:t>
+              <a:t>だいもんじ</a:t>
             </a:r>
             <a:endParaRPr lang="en-US" sz="1200" dirty="0"/>
           </a:p>
@@ -11805,13 +9915,13 @@
       </p:sp>
       <p:sp>
         <p:nvSpPr>
-          <p:cNvPr id="76" name="Text 73"/>
-          <p:cNvSpPr txBox="1"/>
-          <p:nvPr/>
-        </p:nvSpPr>
-        <p:spPr>
-          <a:xfrm>
-            <a:off x="6515100" y="2930652"/>
+          <p:cNvPr id="20" name="Text 17"/>
+          <p:cNvSpPr txBox="1"/>
+          <p:nvPr/>
+        </p:nvSpPr>
+        <p:spPr>
+          <a:xfrm>
+            <a:off x="1979676" y="2930652"/>
             <a:ext cx="502920" cy="228600"/>
           </a:xfrm>
           <a:prstGeom prst="rect">
@@ -11836,7 +9946,7 @@
                 <a:ea typeface="Meiryo" pitchFamily="34" charset="-122"/>
                 <a:cs typeface="Meiryo" pitchFamily="34" charset="-120"/>
               </a:rPr>
-              <a:t>50</a:t>
+              <a:t>60</a:t>
             </a:r>
             <a:endParaRPr lang="en-US" sz="1400" dirty="0"/>
           </a:p>
@@ -11844,13 +9954,13 @@
       </p:sp>
       <p:sp>
         <p:nvSpPr>
-          <p:cNvPr id="77" name="Text 74"/>
-          <p:cNvSpPr txBox="1"/>
-          <p:nvPr/>
-        </p:nvSpPr>
-        <p:spPr>
-          <a:xfrm>
-            <a:off x="5097780" y="3177540"/>
+          <p:cNvPr id="21" name="Text 18"/>
+          <p:cNvSpPr txBox="1"/>
+          <p:nvPr/>
+        </p:nvSpPr>
+        <p:spPr>
+          <a:xfrm>
+            <a:off x="562356" y="3177540"/>
             <a:ext cx="1901952" cy="201168"/>
           </a:xfrm>
           <a:prstGeom prst="rect">
@@ -11883,13 +9993,13 @@
       </p:sp>
       <p:sp>
         <p:nvSpPr>
-          <p:cNvPr id="78" name="Shape 75"/>
-          <p:cNvSpPr/>
-          <p:nvPr/>
-        </p:nvSpPr>
-        <p:spPr>
-          <a:xfrm>
-            <a:off x="5006340" y="3415284"/>
+          <p:cNvPr id="22" name="Shape 19"/>
+          <p:cNvSpPr/>
+          <p:nvPr/>
+        </p:nvSpPr>
+        <p:spPr>
+          <a:xfrm>
+            <a:off x="470916" y="3415284"/>
             <a:ext cx="2084832" cy="182880"/>
           </a:xfrm>
           <a:prstGeom prst="rect">
@@ -11908,13 +10018,13 @@
       </p:sp>
       <p:sp>
         <p:nvSpPr>
-          <p:cNvPr id="79" name="Text 76"/>
-          <p:cNvSpPr txBox="1"/>
-          <p:nvPr/>
-        </p:nvSpPr>
-        <p:spPr>
-          <a:xfrm>
-            <a:off x="5042916" y="3415284"/>
+          <p:cNvPr id="23" name="Text 20"/>
+          <p:cNvSpPr txBox="1"/>
+          <p:nvPr/>
+        </p:nvSpPr>
+        <p:spPr>
+          <a:xfrm>
+            <a:off x="507492" y="3415284"/>
             <a:ext cx="274320" cy="182880"/>
           </a:xfrm>
           <a:prstGeom prst="rect">
@@ -11947,20 +10057,20 @@
       </p:sp>
       <p:sp>
         <p:nvSpPr>
-          <p:cNvPr id="80" name="Shape 77"/>
-          <p:cNvSpPr/>
-          <p:nvPr/>
-        </p:nvSpPr>
-        <p:spPr>
-          <a:xfrm>
-            <a:off x="5317236" y="3438144"/>
+          <p:cNvPr id="24" name="Shape 21"/>
+          <p:cNvSpPr/>
+          <p:nvPr/>
+        </p:nvSpPr>
+        <p:spPr>
+          <a:xfrm>
+            <a:off x="781812" y="3438144"/>
             <a:ext cx="137160" cy="137160"/>
           </a:xfrm>
           <a:prstGeom prst="ellipse">
             <a:avLst/>
           </a:prstGeom>
           <a:solidFill>
-            <a:srgbClr val="E8452E"/>
+            <a:srgbClr val="2F8FE0"/>
           </a:solidFill>
           <a:ln w="9525">
             <a:solidFill>
@@ -11972,13 +10082,13 @@
       </p:sp>
       <p:sp>
         <p:nvSpPr>
-          <p:cNvPr id="81" name="Text 78"/>
-          <p:cNvSpPr txBox="1"/>
-          <p:nvPr/>
-        </p:nvSpPr>
-        <p:spPr>
-          <a:xfrm>
-            <a:off x="5472684" y="3415284"/>
+          <p:cNvPr id="25" name="Text 22"/>
+          <p:cNvSpPr txBox="1"/>
+          <p:nvPr/>
+        </p:nvSpPr>
+        <p:spPr>
+          <a:xfrm>
+            <a:off x="937260" y="3415284"/>
             <a:ext cx="228600" cy="182880"/>
           </a:xfrm>
           <a:prstGeom prst="rect">
@@ -12011,13 +10121,13 @@
       </p:sp>
       <p:sp>
         <p:nvSpPr>
-          <p:cNvPr id="82" name="Text 79"/>
-          <p:cNvSpPr txBox="1"/>
-          <p:nvPr/>
-        </p:nvSpPr>
-        <p:spPr>
-          <a:xfrm>
-            <a:off x="5719572" y="3415284"/>
+          <p:cNvPr id="26" name="Text 23"/>
+          <p:cNvSpPr txBox="1"/>
+          <p:nvPr/>
+        </p:nvSpPr>
+        <p:spPr>
+          <a:xfrm>
+            <a:off x="1184148" y="3415284"/>
             <a:ext cx="365760" cy="182880"/>
           </a:xfrm>
           <a:prstGeom prst="rect">
@@ -12050,13 +10160,13 @@
       </p:sp>
       <p:sp>
         <p:nvSpPr>
-          <p:cNvPr id="83" name="Text 80"/>
-          <p:cNvSpPr txBox="1"/>
-          <p:nvPr/>
-        </p:nvSpPr>
-        <p:spPr>
-          <a:xfrm>
-            <a:off x="6067044" y="3415284"/>
+          <p:cNvPr id="27" name="Text 24"/>
+          <p:cNvSpPr txBox="1"/>
+          <p:nvPr/>
+        </p:nvSpPr>
+        <p:spPr>
+          <a:xfrm>
+            <a:off x="1531620" y="3415284"/>
             <a:ext cx="274320" cy="182880"/>
           </a:xfrm>
           <a:prstGeom prst="rect">
@@ -12089,13 +10199,13 @@
       </p:sp>
       <p:sp>
         <p:nvSpPr>
-          <p:cNvPr id="84" name="Text 81"/>
-          <p:cNvSpPr txBox="1"/>
-          <p:nvPr/>
-        </p:nvSpPr>
-        <p:spPr>
-          <a:xfrm>
-            <a:off x="6487668" y="3415284"/>
+          <p:cNvPr id="28" name="Text 25"/>
+          <p:cNvSpPr txBox="1"/>
+          <p:nvPr/>
+        </p:nvSpPr>
+        <p:spPr>
+          <a:xfrm>
+            <a:off x="1952244" y="3415284"/>
             <a:ext cx="320040" cy="182880"/>
           </a:xfrm>
           <a:prstGeom prst="rect">
@@ -12128,13 +10238,13 @@
       </p:sp>
       <p:sp>
         <p:nvSpPr>
-          <p:cNvPr id="85" name="Shape 82"/>
-          <p:cNvSpPr/>
-          <p:nvPr/>
-        </p:nvSpPr>
-        <p:spPr>
-          <a:xfrm>
-            <a:off x="6816852" y="3438144"/>
+          <p:cNvPr id="29" name="Shape 26"/>
+          <p:cNvSpPr/>
+          <p:nvPr/>
+        </p:nvSpPr>
+        <p:spPr>
+          <a:xfrm>
+            <a:off x="2281428" y="3438144"/>
             <a:ext cx="137160" cy="137160"/>
           </a:xfrm>
           <a:prstGeom prst="ellipse">
@@ -12153,13 +10263,13 @@
       </p:sp>
       <p:sp>
         <p:nvSpPr>
-          <p:cNvPr id="86" name="Shape 83"/>
-          <p:cNvSpPr/>
-          <p:nvPr/>
-        </p:nvSpPr>
-        <p:spPr>
-          <a:xfrm>
-            <a:off x="379476" y="3762756"/>
+          <p:cNvPr id="30" name="Shape 27"/>
+          <p:cNvSpPr/>
+          <p:nvPr/>
+        </p:nvSpPr>
+        <p:spPr>
+          <a:xfrm>
+            <a:off x="2647188" y="598932"/>
             <a:ext cx="2267712" cy="3163824"/>
           </a:xfrm>
           <a:prstGeom prst="rect">
@@ -12178,13 +10288,13 @@
       </p:sp>
       <p:sp>
         <p:nvSpPr>
-          <p:cNvPr id="87" name="Shape 84"/>
-          <p:cNvSpPr/>
-          <p:nvPr/>
-        </p:nvSpPr>
-        <p:spPr>
-          <a:xfrm>
-            <a:off x="406908" y="3790188"/>
+          <p:cNvPr id="31" name="Shape 28"/>
+          <p:cNvSpPr/>
+          <p:nvPr/>
+        </p:nvSpPr>
+        <p:spPr>
+          <a:xfrm>
+            <a:off x="2674620" y="626364"/>
             <a:ext cx="2212848" cy="3108960"/>
           </a:xfrm>
           <a:prstGeom prst="roundRect">
@@ -12205,38 +10315,38 @@
       </p:sp>
       <p:sp>
         <p:nvSpPr>
-          <p:cNvPr id="88" name="Shape 85"/>
-          <p:cNvSpPr/>
-          <p:nvPr/>
-        </p:nvSpPr>
-        <p:spPr>
-          <a:xfrm>
-            <a:off x="470916" y="3854196"/>
+          <p:cNvPr id="32" name="Shape 29"/>
+          <p:cNvSpPr/>
+          <p:nvPr/>
+        </p:nvSpPr>
+        <p:spPr>
+          <a:xfrm>
+            <a:off x="2738628" y="690372"/>
             <a:ext cx="2084832" cy="2980944"/>
           </a:xfrm>
           <a:prstGeom prst="rect">
             <a:avLst/>
           </a:prstGeom>
           <a:solidFill>
-            <a:srgbClr val="F6B58A"/>
+            <a:srgbClr val="A9D6F5"/>
           </a:solidFill>
           <a:ln w="6350">
             <a:solidFill>
-              <a:srgbClr val="F6B58A"/>
-            </a:solidFill>
-            <a:prstDash val="solid"/>
-          </a:ln>
-        </p:spPr>
-      </p:sp>
-      <p:sp>
-        <p:nvSpPr>
-          <p:cNvPr id="89" name="Shape 86"/>
-          <p:cNvSpPr/>
-          <p:nvPr/>
-        </p:nvSpPr>
-        <p:spPr>
-          <a:xfrm>
-            <a:off x="470916" y="3854196"/>
+              <a:srgbClr val="A9D6F5"/>
+            </a:solidFill>
+            <a:prstDash val="solid"/>
+          </a:ln>
+        </p:spPr>
+      </p:sp>
+      <p:sp>
+        <p:nvSpPr>
+          <p:cNvPr id="33" name="Shape 30"/>
+          <p:cNvSpPr/>
+          <p:nvPr/>
+        </p:nvSpPr>
+        <p:spPr>
+          <a:xfrm>
+            <a:off x="2738628" y="690372"/>
             <a:ext cx="384048" cy="155448"/>
           </a:xfrm>
           <a:prstGeom prst="roundRect">
@@ -12257,13 +10367,13 @@
       </p:sp>
       <p:sp>
         <p:nvSpPr>
-          <p:cNvPr id="90" name="Text 87"/>
-          <p:cNvSpPr txBox="1"/>
-          <p:nvPr/>
-        </p:nvSpPr>
-        <p:spPr>
-          <a:xfrm>
-            <a:off x="470916" y="3854196"/>
+          <p:cNvPr id="34" name="Text 31"/>
+          <p:cNvSpPr txBox="1"/>
+          <p:nvPr/>
+        </p:nvSpPr>
+        <p:spPr>
+          <a:xfrm>
+            <a:off x="2738628" y="690372"/>
             <a:ext cx="384048" cy="155448"/>
           </a:xfrm>
           <a:prstGeom prst="rect">
@@ -12296,13 +10406,13 @@
       </p:sp>
       <p:sp>
         <p:nvSpPr>
-          <p:cNvPr id="91" name="Text 88"/>
-          <p:cNvSpPr txBox="1"/>
-          <p:nvPr/>
-        </p:nvSpPr>
-        <p:spPr>
-          <a:xfrm>
-            <a:off x="900684" y="3872484"/>
+          <p:cNvPr id="35" name="Text 32"/>
+          <p:cNvSpPr txBox="1"/>
+          <p:nvPr/>
+        </p:nvSpPr>
+        <p:spPr>
+          <a:xfrm>
+            <a:off x="3168396" y="708660"/>
             <a:ext cx="914400" cy="274320"/>
           </a:xfrm>
           <a:prstGeom prst="rect">
@@ -12327,7 +10437,7 @@
                 <a:ea typeface="Meiryo" pitchFamily="34" charset="-122"/>
                 <a:cs typeface="Meiryo" pitchFamily="34" charset="-120"/>
               </a:rPr>
-              <a:t>ひふきトカゲ</a:t>
+              <a:t>あらしクジラ</a:t>
             </a:r>
             <a:endParaRPr lang="en-US" sz="1100" dirty="0"/>
           </a:p>
@@ -12335,13 +10445,13 @@
       </p:sp>
       <p:sp>
         <p:nvSpPr>
-          <p:cNvPr id="92" name="Text 89"/>
-          <p:cNvSpPr txBox="1"/>
-          <p:nvPr/>
-        </p:nvSpPr>
-        <p:spPr>
-          <a:xfrm>
-            <a:off x="1751076" y="3872484"/>
+          <p:cNvPr id="36" name="Text 33"/>
+          <p:cNvSpPr txBox="1"/>
+          <p:nvPr/>
+        </p:nvSpPr>
+        <p:spPr>
+          <a:xfrm>
+            <a:off x="4018788" y="708660"/>
             <a:ext cx="566928" cy="274320"/>
           </a:xfrm>
           <a:prstGeom prst="rect">
@@ -12366,7 +10476,7 @@
                 <a:ea typeface="Meiryo" pitchFamily="34" charset="-122"/>
                 <a:cs typeface="Meiryo" pitchFamily="34" charset="-120"/>
               </a:rPr>
-              <a:t>HP 60</a:t>
+              <a:t>HP 100</a:t>
             </a:r>
             <a:endParaRPr lang="en-US" sz="1200" dirty="0"/>
           </a:p>
@@ -12374,20 +10484,20 @@
       </p:sp>
       <p:sp>
         <p:nvSpPr>
-          <p:cNvPr id="93" name="Shape 90"/>
-          <p:cNvSpPr/>
-          <p:nvPr/>
-        </p:nvSpPr>
-        <p:spPr>
-          <a:xfrm>
-            <a:off x="2345436" y="3918204"/>
+          <p:cNvPr id="37" name="Shape 34"/>
+          <p:cNvSpPr/>
+          <p:nvPr/>
+        </p:nvSpPr>
+        <p:spPr>
+          <a:xfrm>
+            <a:off x="4613148" y="754380"/>
             <a:ext cx="173736" cy="173736"/>
           </a:xfrm>
           <a:prstGeom prst="ellipse">
             <a:avLst/>
           </a:prstGeom>
           <a:solidFill>
-            <a:srgbClr val="E8452E"/>
+            <a:srgbClr val="2F8FE0"/>
           </a:solidFill>
           <a:ln w="9525">
             <a:solidFill>
@@ -12399,13 +10509,13 @@
       </p:sp>
       <p:sp>
         <p:nvSpPr>
-          <p:cNvPr id="94" name="Shape 91"/>
-          <p:cNvSpPr/>
-          <p:nvPr/>
-        </p:nvSpPr>
-        <p:spPr>
-          <a:xfrm>
-            <a:off x="553212" y="4174236"/>
+          <p:cNvPr id="38" name="Shape 35"/>
+          <p:cNvSpPr/>
+          <p:nvPr/>
+        </p:nvSpPr>
+        <p:spPr>
+          <a:xfrm>
+            <a:off x="2820924" y="1010412"/>
             <a:ext cx="1920240" cy="1225296"/>
           </a:xfrm>
           <a:prstGeom prst="rect">
@@ -12424,7 +10534,7 @@
       </p:sp>
       <p:pic>
         <p:nvPicPr>
-          <p:cNvPr id="95" name="Image 1" descr="c1.jpg">    </p:cNvPr>
+          <p:cNvPr id="39" name="Image 1" descr="e11.jpg">    </p:cNvPr>
           <p:cNvPicPr>
             <a:picLocks noChangeAspect="1"/>
           </p:cNvPicPr>
@@ -12438,7 +10548,7 @@
         </p:blipFill>
         <p:spPr>
           <a:xfrm>
-            <a:off x="566928" y="4187952"/>
+            <a:off x="2834640" y="1024128"/>
             <a:ext cx="1892808" cy="1197864"/>
           </a:xfrm>
           <a:prstGeom prst="rect">
@@ -12448,13 +10558,13 @@
       </p:pic>
       <p:sp>
         <p:nvSpPr>
-          <p:cNvPr id="96" name="Text 92"/>
-          <p:cNvSpPr txBox="1"/>
-          <p:nvPr/>
-        </p:nvSpPr>
-        <p:spPr>
-          <a:xfrm>
-            <a:off x="553212" y="5408676"/>
+          <p:cNvPr id="40" name="Text 36"/>
+          <p:cNvSpPr txBox="1"/>
+          <p:nvPr/>
+        </p:nvSpPr>
+        <p:spPr>
+          <a:xfrm>
+            <a:off x="2820924" y="2244852"/>
             <a:ext cx="822960" cy="146304"/>
           </a:xfrm>
           <a:prstGeom prst="rect">
@@ -12479,7 +10589,7 @@
                 <a:ea typeface="Meiryo" pitchFamily="34" charset="-122"/>
                 <a:cs typeface="Meiryo" pitchFamily="34" charset="-120"/>
               </a:rPr>
-              <a:t>ランク B</a:t>
+              <a:t>ランク A</a:t>
             </a:r>
             <a:endParaRPr lang="en-US" sz="800" dirty="0"/>
           </a:p>
@@ -12487,20 +10597,20 @@
       </p:sp>
       <p:sp>
         <p:nvSpPr>
-          <p:cNvPr id="97" name="Shape 93"/>
-          <p:cNvSpPr/>
-          <p:nvPr/>
-        </p:nvSpPr>
-        <p:spPr>
-          <a:xfrm>
-            <a:off x="562356" y="5646420"/>
+          <p:cNvPr id="41" name="Shape 37"/>
+          <p:cNvSpPr/>
+          <p:nvPr/>
+        </p:nvSpPr>
+        <p:spPr>
+          <a:xfrm>
+            <a:off x="2830068" y="2482596"/>
             <a:ext cx="155448" cy="155448"/>
           </a:xfrm>
           <a:prstGeom prst="ellipse">
             <a:avLst/>
           </a:prstGeom>
           <a:solidFill>
-            <a:srgbClr val="E8452E"/>
+            <a:srgbClr val="2F8FE0"/>
           </a:solidFill>
           <a:ln w="9525">
             <a:solidFill>
@@ -12512,13 +10622,13 @@
       </p:sp>
       <p:sp>
         <p:nvSpPr>
-          <p:cNvPr id="98" name="Text 94"/>
-          <p:cNvSpPr txBox="1"/>
-          <p:nvPr/>
-        </p:nvSpPr>
-        <p:spPr>
-          <a:xfrm>
-            <a:off x="1019556" y="5609844"/>
+          <p:cNvPr id="42" name="Text 38"/>
+          <p:cNvSpPr txBox="1"/>
+          <p:nvPr/>
+        </p:nvSpPr>
+        <p:spPr>
+          <a:xfrm>
+            <a:off x="3287268" y="2446020"/>
             <a:ext cx="1097280" cy="228600"/>
           </a:xfrm>
           <a:prstGeom prst="rect">
@@ -12543,7 +10653,7 @@
                 <a:ea typeface="Meiryo" pitchFamily="34" charset="-122"/>
                 <a:cs typeface="Meiryo" pitchFamily="34" charset="-120"/>
               </a:rPr>
-              <a:t>ひのこ</a:t>
+              <a:t>みずしぶき</a:t>
             </a:r>
             <a:endParaRPr lang="en-US" sz="1200" dirty="0"/>
           </a:p>
@@ -12551,13 +10661,13 @@
       </p:sp>
       <p:sp>
         <p:nvSpPr>
-          <p:cNvPr id="99" name="Text 95"/>
-          <p:cNvSpPr txBox="1"/>
-          <p:nvPr/>
-        </p:nvSpPr>
-        <p:spPr>
-          <a:xfrm>
-            <a:off x="1979676" y="5609844"/>
+          <p:cNvPr id="43" name="Text 39"/>
+          <p:cNvSpPr txBox="1"/>
+          <p:nvPr/>
+        </p:nvSpPr>
+        <p:spPr>
+          <a:xfrm>
+            <a:off x="4247388" y="2446020"/>
             <a:ext cx="502920" cy="228600"/>
           </a:xfrm>
           <a:prstGeom prst="rect">
@@ -12590,13 +10700,13 @@
       </p:sp>
       <p:sp>
         <p:nvSpPr>
-          <p:cNvPr id="100" name="Text 96"/>
-          <p:cNvSpPr txBox="1"/>
-          <p:nvPr/>
-        </p:nvSpPr>
-        <p:spPr>
-          <a:xfrm>
-            <a:off x="562356" y="5856732"/>
+          <p:cNvPr id="44" name="Text 40"/>
+          <p:cNvSpPr txBox="1"/>
+          <p:nvPr/>
+        </p:nvSpPr>
+        <p:spPr>
+          <a:xfrm>
+            <a:off x="2830068" y="2692908"/>
             <a:ext cx="1901952" cy="201168"/>
           </a:xfrm>
           <a:prstGeom prst="rect">
@@ -12629,20 +10739,20 @@
       </p:sp>
       <p:sp>
         <p:nvSpPr>
-          <p:cNvPr id="101" name="Shape 97"/>
-          <p:cNvSpPr/>
-          <p:nvPr/>
-        </p:nvSpPr>
-        <p:spPr>
-          <a:xfrm>
-            <a:off x="562356" y="6131052"/>
+          <p:cNvPr id="45" name="Shape 41"/>
+          <p:cNvSpPr/>
+          <p:nvPr/>
+        </p:nvSpPr>
+        <p:spPr>
+          <a:xfrm>
+            <a:off x="2830068" y="2967228"/>
             <a:ext cx="155448" cy="155448"/>
           </a:xfrm>
           <a:prstGeom prst="ellipse">
             <a:avLst/>
           </a:prstGeom>
           <a:solidFill>
-            <a:srgbClr val="E8452E"/>
+            <a:srgbClr val="2F8FE0"/>
           </a:solidFill>
           <a:ln w="9525">
             <a:solidFill>
@@ -12654,20 +10764,20 @@
       </p:sp>
       <p:sp>
         <p:nvSpPr>
-          <p:cNvPr id="102" name="Shape 98"/>
-          <p:cNvSpPr/>
-          <p:nvPr/>
-        </p:nvSpPr>
-        <p:spPr>
-          <a:xfrm>
-            <a:off x="745236" y="6131052"/>
+          <p:cNvPr id="46" name="Shape 42"/>
+          <p:cNvSpPr/>
+          <p:nvPr/>
+        </p:nvSpPr>
+        <p:spPr>
+          <a:xfrm>
+            <a:off x="3012948" y="2967228"/>
             <a:ext cx="155448" cy="155448"/>
           </a:xfrm>
           <a:prstGeom prst="ellipse">
             <a:avLst/>
           </a:prstGeom>
           <a:solidFill>
-            <a:srgbClr val="E8452E"/>
+            <a:srgbClr val="2F8FE0"/>
           </a:solidFill>
           <a:ln w="9525">
             <a:solidFill>
@@ -12679,13 +10789,13 @@
       </p:sp>
       <p:sp>
         <p:nvSpPr>
-          <p:cNvPr id="103" name="Text 99"/>
-          <p:cNvSpPr txBox="1"/>
-          <p:nvPr/>
-        </p:nvSpPr>
-        <p:spPr>
-          <a:xfrm>
-            <a:off x="1019556" y="6094476"/>
+          <p:cNvPr id="47" name="Text 43"/>
+          <p:cNvSpPr txBox="1"/>
+          <p:nvPr/>
+        </p:nvSpPr>
+        <p:spPr>
+          <a:xfrm>
+            <a:off x="3287268" y="2930652"/>
             <a:ext cx="1097280" cy="228600"/>
           </a:xfrm>
           <a:prstGeom prst="rect">
@@ -12710,7 +10820,7 @@
                 <a:ea typeface="Meiryo" pitchFamily="34" charset="-122"/>
                 <a:cs typeface="Meiryo" pitchFamily="34" charset="-120"/>
               </a:rPr>
-              <a:t>ほのおのしっぽ</a:t>
+              <a:t>だいこうずい</a:t>
             </a:r>
             <a:endParaRPr lang="en-US" sz="1200" dirty="0"/>
           </a:p>
@@ -12718,13 +10828,13 @@
       </p:sp>
       <p:sp>
         <p:nvSpPr>
-          <p:cNvPr id="104" name="Text 100"/>
-          <p:cNvSpPr txBox="1"/>
-          <p:nvPr/>
-        </p:nvSpPr>
-        <p:spPr>
-          <a:xfrm>
-            <a:off x="1979676" y="6094476"/>
+          <p:cNvPr id="48" name="Text 44"/>
+          <p:cNvSpPr txBox="1"/>
+          <p:nvPr/>
+        </p:nvSpPr>
+        <p:spPr>
+          <a:xfrm>
+            <a:off x="4247388" y="2930652"/>
             <a:ext cx="502920" cy="228600"/>
           </a:xfrm>
           <a:prstGeom prst="rect">
@@ -12749,7 +10859,7 @@
                 <a:ea typeface="Meiryo" pitchFamily="34" charset="-122"/>
                 <a:cs typeface="Meiryo" pitchFamily="34" charset="-120"/>
               </a:rPr>
-              <a:t>50</a:t>
+              <a:t>60</a:t>
             </a:r>
             <a:endParaRPr lang="en-US" sz="1400" dirty="0"/>
           </a:p>
@@ -12757,13 +10867,13 @@
       </p:sp>
       <p:sp>
         <p:nvSpPr>
-          <p:cNvPr id="105" name="Text 101"/>
-          <p:cNvSpPr txBox="1"/>
-          <p:nvPr/>
-        </p:nvSpPr>
-        <p:spPr>
-          <a:xfrm>
-            <a:off x="562356" y="6341364"/>
+          <p:cNvPr id="49" name="Text 45"/>
+          <p:cNvSpPr txBox="1"/>
+          <p:nvPr/>
+        </p:nvSpPr>
+        <p:spPr>
+          <a:xfrm>
+            <a:off x="2830068" y="3177540"/>
             <a:ext cx="1901952" cy="201168"/>
           </a:xfrm>
           <a:prstGeom prst="rect">
@@ -12796,13 +10906,13 @@
       </p:sp>
       <p:sp>
         <p:nvSpPr>
-          <p:cNvPr id="106" name="Shape 102"/>
-          <p:cNvSpPr/>
-          <p:nvPr/>
-        </p:nvSpPr>
-        <p:spPr>
-          <a:xfrm>
-            <a:off x="470916" y="6579108"/>
+          <p:cNvPr id="50" name="Shape 46"/>
+          <p:cNvSpPr/>
+          <p:nvPr/>
+        </p:nvSpPr>
+        <p:spPr>
+          <a:xfrm>
+            <a:off x="2738628" y="3415284"/>
             <a:ext cx="2084832" cy="182880"/>
           </a:xfrm>
           <a:prstGeom prst="rect">
@@ -12821,13 +10931,13 @@
       </p:sp>
       <p:sp>
         <p:nvSpPr>
-          <p:cNvPr id="107" name="Text 103"/>
-          <p:cNvSpPr txBox="1"/>
-          <p:nvPr/>
-        </p:nvSpPr>
-        <p:spPr>
-          <a:xfrm>
-            <a:off x="507492" y="6579108"/>
+          <p:cNvPr id="51" name="Text 47"/>
+          <p:cNvSpPr txBox="1"/>
+          <p:nvPr/>
+        </p:nvSpPr>
+        <p:spPr>
+          <a:xfrm>
+            <a:off x="2775204" y="3415284"/>
             <a:ext cx="274320" cy="182880"/>
           </a:xfrm>
           <a:prstGeom prst="rect">
@@ -12860,20 +10970,20 @@
       </p:sp>
       <p:sp>
         <p:nvSpPr>
-          <p:cNvPr id="108" name="Shape 104"/>
-          <p:cNvSpPr/>
-          <p:nvPr/>
-        </p:nvSpPr>
-        <p:spPr>
-          <a:xfrm>
-            <a:off x="781812" y="6601968"/>
+          <p:cNvPr id="52" name="Shape 48"/>
+          <p:cNvSpPr/>
+          <p:nvPr/>
+        </p:nvSpPr>
+        <p:spPr>
+          <a:xfrm>
+            <a:off x="3049524" y="3438144"/>
             <a:ext cx="137160" cy="137160"/>
           </a:xfrm>
           <a:prstGeom prst="ellipse">
             <a:avLst/>
           </a:prstGeom>
           <a:solidFill>
-            <a:srgbClr val="2F8FE0"/>
+            <a:srgbClr val="3FA535"/>
           </a:solidFill>
           <a:ln w="9525">
             <a:solidFill>
@@ -12885,13 +10995,13 @@
       </p:sp>
       <p:sp>
         <p:nvSpPr>
-          <p:cNvPr id="109" name="Text 105"/>
-          <p:cNvSpPr txBox="1"/>
-          <p:nvPr/>
-        </p:nvSpPr>
-        <p:spPr>
-          <a:xfrm>
-            <a:off x="937260" y="6579108"/>
+          <p:cNvPr id="53" name="Text 49"/>
+          <p:cNvSpPr txBox="1"/>
+          <p:nvPr/>
+        </p:nvSpPr>
+        <p:spPr>
+          <a:xfrm>
+            <a:off x="3204972" y="3415284"/>
             <a:ext cx="228600" cy="182880"/>
           </a:xfrm>
           <a:prstGeom prst="rect">
@@ -12924,13 +11034,13 @@
       </p:sp>
       <p:sp>
         <p:nvSpPr>
-          <p:cNvPr id="110" name="Text 106"/>
-          <p:cNvSpPr txBox="1"/>
-          <p:nvPr/>
-        </p:nvSpPr>
-        <p:spPr>
-          <a:xfrm>
-            <a:off x="1184148" y="6579108"/>
+          <p:cNvPr id="54" name="Text 50"/>
+          <p:cNvSpPr txBox="1"/>
+          <p:nvPr/>
+        </p:nvSpPr>
+        <p:spPr>
+          <a:xfrm>
+            <a:off x="3451860" y="3415284"/>
             <a:ext cx="365760" cy="182880"/>
           </a:xfrm>
           <a:prstGeom prst="rect">
@@ -12963,13 +11073,13 @@
       </p:sp>
       <p:sp>
         <p:nvSpPr>
-          <p:cNvPr id="111" name="Text 107"/>
-          <p:cNvSpPr txBox="1"/>
-          <p:nvPr/>
-        </p:nvSpPr>
-        <p:spPr>
-          <a:xfrm>
-            <a:off x="1531620" y="6579108"/>
+          <p:cNvPr id="55" name="Text 51"/>
+          <p:cNvSpPr txBox="1"/>
+          <p:nvPr/>
+        </p:nvSpPr>
+        <p:spPr>
+          <a:xfrm>
+            <a:off x="3799332" y="3415284"/>
             <a:ext cx="274320" cy="182880"/>
           </a:xfrm>
           <a:prstGeom prst="rect">
@@ -13002,13 +11112,13 @@
       </p:sp>
       <p:sp>
         <p:nvSpPr>
-          <p:cNvPr id="112" name="Text 108"/>
-          <p:cNvSpPr txBox="1"/>
-          <p:nvPr/>
-        </p:nvSpPr>
-        <p:spPr>
-          <a:xfrm>
-            <a:off x="1952244" y="6579108"/>
+          <p:cNvPr id="56" name="Text 52"/>
+          <p:cNvSpPr txBox="1"/>
+          <p:nvPr/>
+        </p:nvSpPr>
+        <p:spPr>
+          <a:xfrm>
+            <a:off x="4219956" y="3415284"/>
             <a:ext cx="320040" cy="182880"/>
           </a:xfrm>
           <a:prstGeom prst="rect">
@@ -13041,13 +11151,13 @@
       </p:sp>
       <p:sp>
         <p:nvSpPr>
-          <p:cNvPr id="113" name="Shape 109"/>
-          <p:cNvSpPr/>
-          <p:nvPr/>
-        </p:nvSpPr>
-        <p:spPr>
-          <a:xfrm>
-            <a:off x="2281428" y="6601968"/>
+          <p:cNvPr id="57" name="Shape 53"/>
+          <p:cNvSpPr/>
+          <p:nvPr/>
+        </p:nvSpPr>
+        <p:spPr>
+          <a:xfrm>
+            <a:off x="4549140" y="3438144"/>
             <a:ext cx="137160" cy="137160"/>
           </a:xfrm>
           <a:prstGeom prst="ellipse">
@@ -13066,13 +11176,13 @@
       </p:sp>
       <p:sp>
         <p:nvSpPr>
-          <p:cNvPr id="114" name="Shape 110"/>
-          <p:cNvSpPr/>
-          <p:nvPr/>
-        </p:nvSpPr>
-        <p:spPr>
-          <a:xfrm>
-            <a:off x="2647188" y="3762756"/>
+          <p:cNvPr id="58" name="Shape 54"/>
+          <p:cNvSpPr/>
+          <p:nvPr/>
+        </p:nvSpPr>
+        <p:spPr>
+          <a:xfrm>
+            <a:off x="4914900" y="598932"/>
             <a:ext cx="2267712" cy="3163824"/>
           </a:xfrm>
           <a:prstGeom prst="rect">
@@ -13091,13 +11201,13 @@
       </p:sp>
       <p:sp>
         <p:nvSpPr>
-          <p:cNvPr id="115" name="Shape 111"/>
-          <p:cNvSpPr/>
-          <p:nvPr/>
-        </p:nvSpPr>
-        <p:spPr>
-          <a:xfrm>
-            <a:off x="2674620" y="3790188"/>
+          <p:cNvPr id="59" name="Shape 55"/>
+          <p:cNvSpPr/>
+          <p:nvPr/>
+        </p:nvSpPr>
+        <p:spPr>
+          <a:xfrm>
+            <a:off x="4942332" y="626364"/>
             <a:ext cx="2212848" cy="3108960"/>
           </a:xfrm>
           <a:prstGeom prst="roundRect">
@@ -13118,38 +11228,38 @@
       </p:sp>
       <p:sp>
         <p:nvSpPr>
-          <p:cNvPr id="116" name="Shape 112"/>
-          <p:cNvSpPr/>
-          <p:nvPr/>
-        </p:nvSpPr>
-        <p:spPr>
-          <a:xfrm>
-            <a:off x="2738628" y="3854196"/>
+          <p:cNvPr id="60" name="Shape 56"/>
+          <p:cNvSpPr/>
+          <p:nvPr/>
+        </p:nvSpPr>
+        <p:spPr>
+          <a:xfrm>
+            <a:off x="5006340" y="690372"/>
             <a:ext cx="2084832" cy="2980944"/>
           </a:xfrm>
           <a:prstGeom prst="rect">
             <a:avLst/>
           </a:prstGeom>
           <a:solidFill>
-            <a:srgbClr val="A9D6F5"/>
+            <a:srgbClr val="BFE35A"/>
           </a:solidFill>
           <a:ln w="6350">
             <a:solidFill>
-              <a:srgbClr val="A9D6F5"/>
-            </a:solidFill>
-            <a:prstDash val="solid"/>
-          </a:ln>
-        </p:spPr>
-      </p:sp>
-      <p:sp>
-        <p:nvSpPr>
-          <p:cNvPr id="117" name="Shape 113"/>
-          <p:cNvSpPr/>
-          <p:nvPr/>
-        </p:nvSpPr>
-        <p:spPr>
-          <a:xfrm>
-            <a:off x="2738628" y="3854196"/>
+              <a:srgbClr val="BFE35A"/>
+            </a:solidFill>
+            <a:prstDash val="solid"/>
+          </a:ln>
+        </p:spPr>
+      </p:sp>
+      <p:sp>
+        <p:nvSpPr>
+          <p:cNvPr id="61" name="Shape 57"/>
+          <p:cNvSpPr/>
+          <p:nvPr/>
+        </p:nvSpPr>
+        <p:spPr>
+          <a:xfrm>
+            <a:off x="5006340" y="690372"/>
             <a:ext cx="384048" cy="155448"/>
           </a:xfrm>
           <a:prstGeom prst="roundRect">
@@ -13170,13 +11280,13 @@
       </p:sp>
       <p:sp>
         <p:nvSpPr>
-          <p:cNvPr id="118" name="Text 114"/>
-          <p:cNvSpPr txBox="1"/>
-          <p:nvPr/>
-        </p:nvSpPr>
-        <p:spPr>
-          <a:xfrm>
-            <a:off x="2738628" y="3854196"/>
+          <p:cNvPr id="62" name="Text 58"/>
+          <p:cNvSpPr txBox="1"/>
+          <p:nvPr/>
+        </p:nvSpPr>
+        <p:spPr>
+          <a:xfrm>
+            <a:off x="5006340" y="690372"/>
             <a:ext cx="384048" cy="155448"/>
           </a:xfrm>
           <a:prstGeom prst="rect">
@@ -13209,13 +11319,13 @@
       </p:sp>
       <p:sp>
         <p:nvSpPr>
-          <p:cNvPr id="119" name="Text 115"/>
-          <p:cNvSpPr txBox="1"/>
-          <p:nvPr/>
-        </p:nvSpPr>
-        <p:spPr>
-          <a:xfrm>
-            <a:off x="3168396" y="3872484"/>
+          <p:cNvPr id="63" name="Text 59"/>
+          <p:cNvSpPr txBox="1"/>
+          <p:nvPr/>
+        </p:nvSpPr>
+        <p:spPr>
+          <a:xfrm>
+            <a:off x="5436108" y="708660"/>
             <a:ext cx="914400" cy="274320"/>
           </a:xfrm>
           <a:prstGeom prst="rect">
@@ -13232,29 +11342,29 @@
               <a:buNone/>
             </a:pPr>
             <a:r>
-              <a:rPr lang="en-US" sz="1000" b="1" dirty="0">
-                <a:solidFill>
-                  <a:srgbClr val="222222"/>
-                </a:solidFill>
-                <a:latin typeface="Meiryo" pitchFamily="34" charset="0"/>
-                <a:ea typeface="Meiryo" pitchFamily="34" charset="-122"/>
-                <a:cs typeface="Meiryo" pitchFamily="34" charset="-120"/>
-              </a:rPr>
-              <a:t>あめふりガエル</a:t>
-            </a:r>
-            <a:endParaRPr lang="en-US" sz="1000" dirty="0"/>
-          </a:p>
-        </p:txBody>
-      </p:sp>
-      <p:sp>
-        <p:nvSpPr>
-          <p:cNvPr id="120" name="Text 116"/>
-          <p:cNvSpPr txBox="1"/>
-          <p:nvPr/>
-        </p:nvSpPr>
-        <p:spPr>
-          <a:xfrm>
-            <a:off x="4018788" y="3872484"/>
+              <a:rPr lang="en-US" sz="1100" b="1" dirty="0">
+                <a:solidFill>
+                  <a:srgbClr val="222222"/>
+                </a:solidFill>
+                <a:latin typeface="Meiryo" pitchFamily="34" charset="0"/>
+                <a:ea typeface="Meiryo" pitchFamily="34" charset="-122"/>
+                <a:cs typeface="Meiryo" pitchFamily="34" charset="-120"/>
+              </a:rPr>
+              <a:t>はっぱウサギ</a:t>
+            </a:r>
+            <a:endParaRPr lang="en-US" sz="1100" dirty="0"/>
+          </a:p>
+        </p:txBody>
+      </p:sp>
+      <p:sp>
+        <p:nvSpPr>
+          <p:cNvPr id="64" name="Text 60"/>
+          <p:cNvSpPr txBox="1"/>
+          <p:nvPr/>
+        </p:nvSpPr>
+        <p:spPr>
+          <a:xfrm>
+            <a:off x="6286500" y="708660"/>
             <a:ext cx="566928" cy="274320"/>
           </a:xfrm>
           <a:prstGeom prst="rect">
@@ -13279,7 +11389,7 @@
                 <a:ea typeface="Meiryo" pitchFamily="34" charset="-122"/>
                 <a:cs typeface="Meiryo" pitchFamily="34" charset="-120"/>
               </a:rPr>
-              <a:t>HP 70</a:t>
+              <a:t>HP 60</a:t>
             </a:r>
             <a:endParaRPr lang="en-US" sz="1200" dirty="0"/>
           </a:p>
@@ -13287,20 +11397,20 @@
       </p:sp>
       <p:sp>
         <p:nvSpPr>
-          <p:cNvPr id="121" name="Shape 117"/>
-          <p:cNvSpPr/>
-          <p:nvPr/>
-        </p:nvSpPr>
-        <p:spPr>
-          <a:xfrm>
-            <a:off x="4613148" y="3918204"/>
+          <p:cNvPr id="65" name="Shape 61"/>
+          <p:cNvSpPr/>
+          <p:nvPr/>
+        </p:nvSpPr>
+        <p:spPr>
+          <a:xfrm>
+            <a:off x="6880860" y="754380"/>
             <a:ext cx="173736" cy="173736"/>
           </a:xfrm>
           <a:prstGeom prst="ellipse">
             <a:avLst/>
           </a:prstGeom>
           <a:solidFill>
-            <a:srgbClr val="2F8FE0"/>
+            <a:srgbClr val="3FA535"/>
           </a:solidFill>
           <a:ln w="9525">
             <a:solidFill>
@@ -13312,13 +11422,13 @@
       </p:sp>
       <p:sp>
         <p:nvSpPr>
-          <p:cNvPr id="122" name="Shape 118"/>
-          <p:cNvSpPr/>
-          <p:nvPr/>
-        </p:nvSpPr>
-        <p:spPr>
-          <a:xfrm>
-            <a:off x="2820924" y="4174236"/>
+          <p:cNvPr id="66" name="Shape 62"/>
+          <p:cNvSpPr/>
+          <p:nvPr/>
+        </p:nvSpPr>
+        <p:spPr>
+          <a:xfrm>
+            <a:off x="5088636" y="1010412"/>
             <a:ext cx="1920240" cy="1225296"/>
           </a:xfrm>
           <a:prstGeom prst="rect">
@@ -13337,7 +11447,7 @@
       </p:sp>
       <p:pic>
         <p:nvPicPr>
-          <p:cNvPr id="123" name="Image 2" descr="c2.jpg">    </p:cNvPr>
+          <p:cNvPr id="67" name="Image 2" descr="c3.jpg">    </p:cNvPr>
           <p:cNvPicPr>
             <a:picLocks noChangeAspect="1"/>
           </p:cNvPicPr>
@@ -13351,7 +11461,7 @@
         </p:blipFill>
         <p:spPr>
           <a:xfrm>
-            <a:off x="2834640" y="4187952"/>
+            <a:off x="5102352" y="1024128"/>
             <a:ext cx="1892808" cy="1197864"/>
           </a:xfrm>
           <a:prstGeom prst="rect">
@@ -13361,13 +11471,13 @@
       </p:pic>
       <p:sp>
         <p:nvSpPr>
-          <p:cNvPr id="124" name="Text 119"/>
-          <p:cNvSpPr txBox="1"/>
-          <p:nvPr/>
-        </p:nvSpPr>
-        <p:spPr>
-          <a:xfrm>
-            <a:off x="2820924" y="5408676"/>
+          <p:cNvPr id="68" name="Text 63"/>
+          <p:cNvSpPr txBox="1"/>
+          <p:nvPr/>
+        </p:nvSpPr>
+        <p:spPr>
+          <a:xfrm>
+            <a:off x="5088636" y="2244852"/>
             <a:ext cx="822960" cy="146304"/>
           </a:xfrm>
           <a:prstGeom prst="rect">
@@ -13400,20 +11510,20 @@
       </p:sp>
       <p:sp>
         <p:nvSpPr>
-          <p:cNvPr id="125" name="Shape 120"/>
-          <p:cNvSpPr/>
-          <p:nvPr/>
-        </p:nvSpPr>
-        <p:spPr>
-          <a:xfrm>
-            <a:off x="2830068" y="5646420"/>
+          <p:cNvPr id="69" name="Shape 64"/>
+          <p:cNvSpPr/>
+          <p:nvPr/>
+        </p:nvSpPr>
+        <p:spPr>
+          <a:xfrm>
+            <a:off x="5097780" y="2482596"/>
             <a:ext cx="155448" cy="155448"/>
           </a:xfrm>
           <a:prstGeom prst="ellipse">
             <a:avLst/>
           </a:prstGeom>
           <a:solidFill>
-            <a:srgbClr val="2F8FE0"/>
+            <a:srgbClr val="3FA535"/>
           </a:solidFill>
           <a:ln w="9525">
             <a:solidFill>
@@ -13425,13 +11535,13 @@
       </p:sp>
       <p:sp>
         <p:nvSpPr>
-          <p:cNvPr id="126" name="Text 121"/>
-          <p:cNvSpPr txBox="1"/>
-          <p:nvPr/>
-        </p:nvSpPr>
-        <p:spPr>
-          <a:xfrm>
-            <a:off x="3287268" y="5609844"/>
+          <p:cNvPr id="70" name="Text 65"/>
+          <p:cNvSpPr txBox="1"/>
+          <p:nvPr/>
+        </p:nvSpPr>
+        <p:spPr>
+          <a:xfrm>
+            <a:off x="5554980" y="2446020"/>
             <a:ext cx="1097280" cy="228600"/>
           </a:xfrm>
           <a:prstGeom prst="rect">
@@ -13456,7 +11566,7 @@
                 <a:ea typeface="Meiryo" pitchFamily="34" charset="-122"/>
                 <a:cs typeface="Meiryo" pitchFamily="34" charset="-120"/>
               </a:rPr>
-              <a:t>みずでっぽう</a:t>
+              <a:t>はっぱカッター</a:t>
             </a:r>
             <a:endParaRPr lang="en-US" sz="1200" dirty="0"/>
           </a:p>
@@ -13464,13 +11574,13 @@
       </p:sp>
       <p:sp>
         <p:nvSpPr>
-          <p:cNvPr id="127" name="Text 122"/>
-          <p:cNvSpPr txBox="1"/>
-          <p:nvPr/>
-        </p:nvSpPr>
-        <p:spPr>
-          <a:xfrm>
-            <a:off x="4247388" y="5609844"/>
+          <p:cNvPr id="71" name="Text 66"/>
+          <p:cNvSpPr txBox="1"/>
+          <p:nvPr/>
+        </p:nvSpPr>
+        <p:spPr>
+          <a:xfrm>
+            <a:off x="6515100" y="2446020"/>
             <a:ext cx="502920" cy="228600"/>
           </a:xfrm>
           <a:prstGeom prst="rect">
@@ -13503,13 +11613,13 @@
       </p:sp>
       <p:sp>
         <p:nvSpPr>
-          <p:cNvPr id="128" name="Text 123"/>
-          <p:cNvSpPr txBox="1"/>
-          <p:nvPr/>
-        </p:nvSpPr>
-        <p:spPr>
-          <a:xfrm>
-            <a:off x="2830068" y="5856732"/>
+          <p:cNvPr id="72" name="Text 67"/>
+          <p:cNvSpPr txBox="1"/>
+          <p:nvPr/>
+        </p:nvSpPr>
+        <p:spPr>
+          <a:xfrm>
+            <a:off x="5097780" y="2692908"/>
             <a:ext cx="1901952" cy="201168"/>
           </a:xfrm>
           <a:prstGeom prst="rect">
@@ -13542,20 +11652,20 @@
       </p:sp>
       <p:sp>
         <p:nvSpPr>
-          <p:cNvPr id="129" name="Shape 124"/>
-          <p:cNvSpPr/>
-          <p:nvPr/>
-        </p:nvSpPr>
-        <p:spPr>
-          <a:xfrm>
-            <a:off x="2830068" y="6131052"/>
+          <p:cNvPr id="73" name="Shape 68"/>
+          <p:cNvSpPr/>
+          <p:nvPr/>
+        </p:nvSpPr>
+        <p:spPr>
+          <a:xfrm>
+            <a:off x="5097780" y="2967228"/>
             <a:ext cx="155448" cy="155448"/>
           </a:xfrm>
           <a:prstGeom prst="ellipse">
             <a:avLst/>
           </a:prstGeom>
           <a:solidFill>
-            <a:srgbClr val="2F8FE0"/>
+            <a:srgbClr val="3FA535"/>
           </a:solidFill>
           <a:ln w="9525">
             <a:solidFill>
@@ -13567,20 +11677,20 @@
       </p:sp>
       <p:sp>
         <p:nvSpPr>
-          <p:cNvPr id="130" name="Shape 125"/>
-          <p:cNvSpPr/>
-          <p:nvPr/>
-        </p:nvSpPr>
-        <p:spPr>
-          <a:xfrm>
-            <a:off x="3012948" y="6131052"/>
+          <p:cNvPr id="74" name="Shape 69"/>
+          <p:cNvSpPr/>
+          <p:nvPr/>
+        </p:nvSpPr>
+        <p:spPr>
+          <a:xfrm>
+            <a:off x="5280660" y="2967228"/>
             <a:ext cx="155448" cy="155448"/>
           </a:xfrm>
           <a:prstGeom prst="ellipse">
             <a:avLst/>
           </a:prstGeom>
           <a:solidFill>
-            <a:srgbClr val="2F8FE0"/>
+            <a:srgbClr val="3FA535"/>
           </a:solidFill>
           <a:ln w="9525">
             <a:solidFill>
@@ -13592,13 +11702,13 @@
       </p:sp>
       <p:sp>
         <p:nvSpPr>
-          <p:cNvPr id="131" name="Text 126"/>
-          <p:cNvSpPr txBox="1"/>
-          <p:nvPr/>
-        </p:nvSpPr>
-        <p:spPr>
-          <a:xfrm>
-            <a:off x="3287268" y="6094476"/>
+          <p:cNvPr id="75" name="Text 70"/>
+          <p:cNvSpPr txBox="1"/>
+          <p:nvPr/>
+        </p:nvSpPr>
+        <p:spPr>
+          <a:xfrm>
+            <a:off x="5554980" y="2930652"/>
             <a:ext cx="1097280" cy="228600"/>
           </a:xfrm>
           <a:prstGeom prst="rect">
@@ -13623,7 +11733,7 @@
                 <a:ea typeface="Meiryo" pitchFamily="34" charset="-122"/>
                 <a:cs typeface="Meiryo" pitchFamily="34" charset="-120"/>
               </a:rPr>
-              <a:t>ずぶぬれ</a:t>
+              <a:t>ふわタックル</a:t>
             </a:r>
             <a:endParaRPr lang="en-US" sz="1200" dirty="0"/>
           </a:p>
@@ -13631,13 +11741,13 @@
       </p:sp>
       <p:sp>
         <p:nvSpPr>
-          <p:cNvPr id="132" name="Text 127"/>
-          <p:cNvSpPr txBox="1"/>
-          <p:nvPr/>
-        </p:nvSpPr>
-        <p:spPr>
-          <a:xfrm>
-            <a:off x="4247388" y="6094476"/>
+          <p:cNvPr id="76" name="Text 71"/>
+          <p:cNvSpPr txBox="1"/>
+          <p:nvPr/>
+        </p:nvSpPr>
+        <p:spPr>
+          <a:xfrm>
+            <a:off x="6515100" y="2930652"/>
             <a:ext cx="502920" cy="228600"/>
           </a:xfrm>
           <a:prstGeom prst="rect">
@@ -13670,13 +11780,13 @@
       </p:sp>
       <p:sp>
         <p:nvSpPr>
-          <p:cNvPr id="133" name="Text 128"/>
-          <p:cNvSpPr txBox="1"/>
-          <p:nvPr/>
-        </p:nvSpPr>
-        <p:spPr>
-          <a:xfrm>
-            <a:off x="2830068" y="6341364"/>
+          <p:cNvPr id="77" name="Text 72"/>
+          <p:cNvSpPr txBox="1"/>
+          <p:nvPr/>
+        </p:nvSpPr>
+        <p:spPr>
+          <a:xfrm>
+            <a:off x="5097780" y="3177540"/>
             <a:ext cx="1901952" cy="201168"/>
           </a:xfrm>
           <a:prstGeom prst="rect">
@@ -13709,13 +11819,13 @@
       </p:sp>
       <p:sp>
         <p:nvSpPr>
-          <p:cNvPr id="134" name="Shape 129"/>
-          <p:cNvSpPr/>
-          <p:nvPr/>
-        </p:nvSpPr>
-        <p:spPr>
-          <a:xfrm>
-            <a:off x="2738628" y="6579108"/>
+          <p:cNvPr id="78" name="Shape 73"/>
+          <p:cNvSpPr/>
+          <p:nvPr/>
+        </p:nvSpPr>
+        <p:spPr>
+          <a:xfrm>
+            <a:off x="5006340" y="3415284"/>
             <a:ext cx="2084832" cy="182880"/>
           </a:xfrm>
           <a:prstGeom prst="rect">
@@ -13734,13 +11844,13 @@
       </p:sp>
       <p:sp>
         <p:nvSpPr>
-          <p:cNvPr id="135" name="Text 130"/>
-          <p:cNvSpPr txBox="1"/>
-          <p:nvPr/>
-        </p:nvSpPr>
-        <p:spPr>
-          <a:xfrm>
-            <a:off x="2775204" y="6579108"/>
+          <p:cNvPr id="79" name="Text 74"/>
+          <p:cNvSpPr txBox="1"/>
+          <p:nvPr/>
+        </p:nvSpPr>
+        <p:spPr>
+          <a:xfrm>
+            <a:off x="5042916" y="3415284"/>
             <a:ext cx="274320" cy="182880"/>
           </a:xfrm>
           <a:prstGeom prst="rect">
@@ -13773,20 +11883,20 @@
       </p:sp>
       <p:sp>
         <p:nvSpPr>
-          <p:cNvPr id="136" name="Shape 131"/>
-          <p:cNvSpPr/>
-          <p:nvPr/>
-        </p:nvSpPr>
-        <p:spPr>
-          <a:xfrm>
-            <a:off x="3049524" y="6601968"/>
+          <p:cNvPr id="80" name="Shape 75"/>
+          <p:cNvSpPr/>
+          <p:nvPr/>
+        </p:nvSpPr>
+        <p:spPr>
+          <a:xfrm>
+            <a:off x="5317236" y="3438144"/>
             <a:ext cx="137160" cy="137160"/>
           </a:xfrm>
           <a:prstGeom prst="ellipse">
             <a:avLst/>
           </a:prstGeom>
           <a:solidFill>
-            <a:srgbClr val="3FA535"/>
+            <a:srgbClr val="E8452E"/>
           </a:solidFill>
           <a:ln w="9525">
             <a:solidFill>
@@ -13798,13 +11908,13 @@
       </p:sp>
       <p:sp>
         <p:nvSpPr>
-          <p:cNvPr id="137" name="Text 132"/>
-          <p:cNvSpPr txBox="1"/>
-          <p:nvPr/>
-        </p:nvSpPr>
-        <p:spPr>
-          <a:xfrm>
-            <a:off x="3204972" y="6579108"/>
+          <p:cNvPr id="81" name="Text 76"/>
+          <p:cNvSpPr txBox="1"/>
+          <p:nvPr/>
+        </p:nvSpPr>
+        <p:spPr>
+          <a:xfrm>
+            <a:off x="5472684" y="3415284"/>
             <a:ext cx="228600" cy="182880"/>
           </a:xfrm>
           <a:prstGeom prst="rect">
@@ -13837,13 +11947,13 @@
       </p:sp>
       <p:sp>
         <p:nvSpPr>
-          <p:cNvPr id="138" name="Text 133"/>
-          <p:cNvSpPr txBox="1"/>
-          <p:nvPr/>
-        </p:nvSpPr>
-        <p:spPr>
-          <a:xfrm>
-            <a:off x="3451860" y="6579108"/>
+          <p:cNvPr id="82" name="Text 77"/>
+          <p:cNvSpPr txBox="1"/>
+          <p:nvPr/>
+        </p:nvSpPr>
+        <p:spPr>
+          <a:xfrm>
+            <a:off x="5719572" y="3415284"/>
             <a:ext cx="365760" cy="182880"/>
           </a:xfrm>
           <a:prstGeom prst="rect">
@@ -13876,13 +11986,13 @@
       </p:sp>
       <p:sp>
         <p:nvSpPr>
-          <p:cNvPr id="139" name="Text 134"/>
-          <p:cNvSpPr txBox="1"/>
-          <p:nvPr/>
-        </p:nvSpPr>
-        <p:spPr>
-          <a:xfrm>
-            <a:off x="3799332" y="6579108"/>
+          <p:cNvPr id="83" name="Text 78"/>
+          <p:cNvSpPr txBox="1"/>
+          <p:nvPr/>
+        </p:nvSpPr>
+        <p:spPr>
+          <a:xfrm>
+            <a:off x="6067044" y="3415284"/>
             <a:ext cx="274320" cy="182880"/>
           </a:xfrm>
           <a:prstGeom prst="rect">
@@ -13915,13 +12025,13 @@
       </p:sp>
       <p:sp>
         <p:nvSpPr>
-          <p:cNvPr id="140" name="Text 135"/>
-          <p:cNvSpPr txBox="1"/>
-          <p:nvPr/>
-        </p:nvSpPr>
-        <p:spPr>
-          <a:xfrm>
-            <a:off x="4219956" y="6579108"/>
+          <p:cNvPr id="84" name="Text 79"/>
+          <p:cNvSpPr txBox="1"/>
+          <p:nvPr/>
+        </p:nvSpPr>
+        <p:spPr>
+          <a:xfrm>
+            <a:off x="6487668" y="3415284"/>
             <a:ext cx="320040" cy="182880"/>
           </a:xfrm>
           <a:prstGeom prst="rect">
@@ -13954,13 +12064,13 @@
       </p:sp>
       <p:sp>
         <p:nvSpPr>
-          <p:cNvPr id="141" name="Shape 136"/>
-          <p:cNvSpPr/>
-          <p:nvPr/>
-        </p:nvSpPr>
-        <p:spPr>
-          <a:xfrm>
-            <a:off x="4549140" y="6601968"/>
+          <p:cNvPr id="85" name="Shape 80"/>
+          <p:cNvSpPr/>
+          <p:nvPr/>
+        </p:nvSpPr>
+        <p:spPr>
+          <a:xfrm>
+            <a:off x="6816852" y="3438144"/>
             <a:ext cx="137160" cy="137160"/>
           </a:xfrm>
           <a:prstGeom prst="ellipse">
@@ -13979,13 +12089,13 @@
       </p:sp>
       <p:sp>
         <p:nvSpPr>
-          <p:cNvPr id="142" name="Shape 137"/>
-          <p:cNvSpPr/>
-          <p:nvPr/>
-        </p:nvSpPr>
-        <p:spPr>
-          <a:xfrm>
-            <a:off x="4914900" y="3762756"/>
+          <p:cNvPr id="86" name="Shape 81"/>
+          <p:cNvSpPr/>
+          <p:nvPr/>
+        </p:nvSpPr>
+        <p:spPr>
+          <a:xfrm>
+            <a:off x="379476" y="3762756"/>
             <a:ext cx="2267712" cy="3163824"/>
           </a:xfrm>
           <a:prstGeom prst="rect">
@@ -14004,13 +12114,13 @@
       </p:sp>
       <p:sp>
         <p:nvSpPr>
-          <p:cNvPr id="143" name="Shape 138"/>
-          <p:cNvSpPr/>
-          <p:nvPr/>
-        </p:nvSpPr>
-        <p:spPr>
-          <a:xfrm>
-            <a:off x="4942332" y="3790188"/>
+          <p:cNvPr id="87" name="Shape 82"/>
+          <p:cNvSpPr/>
+          <p:nvPr/>
+        </p:nvSpPr>
+        <p:spPr>
+          <a:xfrm>
+            <a:off x="406908" y="3790188"/>
             <a:ext cx="2212848" cy="3108960"/>
           </a:xfrm>
           <a:prstGeom prst="roundRect">
@@ -14031,38 +12141,38 @@
       </p:sp>
       <p:sp>
         <p:nvSpPr>
-          <p:cNvPr id="144" name="Shape 139"/>
-          <p:cNvSpPr/>
-          <p:nvPr/>
-        </p:nvSpPr>
-        <p:spPr>
-          <a:xfrm>
-            <a:off x="5006340" y="3854196"/>
+          <p:cNvPr id="88" name="Shape 83"/>
+          <p:cNvSpPr/>
+          <p:nvPr/>
+        </p:nvSpPr>
+        <p:spPr>
+          <a:xfrm>
+            <a:off x="470916" y="3854196"/>
             <a:ext cx="2084832" cy="2980944"/>
           </a:xfrm>
           <a:prstGeom prst="rect">
             <a:avLst/>
           </a:prstGeom>
           <a:solidFill>
-            <a:srgbClr val="BFE35A"/>
+            <a:srgbClr val="F6B58A"/>
           </a:solidFill>
           <a:ln w="6350">
             <a:solidFill>
-              <a:srgbClr val="BFE35A"/>
-            </a:solidFill>
-            <a:prstDash val="solid"/>
-          </a:ln>
-        </p:spPr>
-      </p:sp>
-      <p:sp>
-        <p:nvSpPr>
-          <p:cNvPr id="145" name="Shape 140"/>
-          <p:cNvSpPr/>
-          <p:nvPr/>
-        </p:nvSpPr>
-        <p:spPr>
-          <a:xfrm>
-            <a:off x="5006340" y="3854196"/>
+              <a:srgbClr val="F6B58A"/>
+            </a:solidFill>
+            <a:prstDash val="solid"/>
+          </a:ln>
+        </p:spPr>
+      </p:sp>
+      <p:sp>
+        <p:nvSpPr>
+          <p:cNvPr id="89" name="Shape 84"/>
+          <p:cNvSpPr/>
+          <p:nvPr/>
+        </p:nvSpPr>
+        <p:spPr>
+          <a:xfrm>
+            <a:off x="470916" y="3854196"/>
             <a:ext cx="384048" cy="155448"/>
           </a:xfrm>
           <a:prstGeom prst="roundRect">
@@ -14083,13 +12193,13 @@
       </p:sp>
       <p:sp>
         <p:nvSpPr>
-          <p:cNvPr id="146" name="Text 141"/>
-          <p:cNvSpPr txBox="1"/>
-          <p:nvPr/>
-        </p:nvSpPr>
-        <p:spPr>
-          <a:xfrm>
-            <a:off x="5006340" y="3854196"/>
+          <p:cNvPr id="90" name="Text 85"/>
+          <p:cNvSpPr txBox="1"/>
+          <p:nvPr/>
+        </p:nvSpPr>
+        <p:spPr>
+          <a:xfrm>
+            <a:off x="470916" y="3854196"/>
             <a:ext cx="384048" cy="155448"/>
           </a:xfrm>
           <a:prstGeom prst="rect">
@@ -14122,13 +12232,13 @@
       </p:sp>
       <p:sp>
         <p:nvSpPr>
-          <p:cNvPr id="147" name="Text 142"/>
-          <p:cNvSpPr txBox="1"/>
-          <p:nvPr/>
-        </p:nvSpPr>
-        <p:spPr>
-          <a:xfrm>
-            <a:off x="5436108" y="3872484"/>
+          <p:cNvPr id="91" name="Text 86"/>
+          <p:cNvSpPr txBox="1"/>
+          <p:nvPr/>
+        </p:nvSpPr>
+        <p:spPr>
+          <a:xfrm>
+            <a:off x="900684" y="3872484"/>
             <a:ext cx="914400" cy="274320"/>
           </a:xfrm>
           <a:prstGeom prst="rect">
@@ -14153,7 +12263,7 @@
                 <a:ea typeface="Meiryo" pitchFamily="34" charset="-122"/>
                 <a:cs typeface="Meiryo" pitchFamily="34" charset="-120"/>
               </a:rPr>
-              <a:t>きのこぼうず</a:t>
+              <a:t>ひふきトカゲ</a:t>
             </a:r>
             <a:endParaRPr lang="en-US" sz="1100" dirty="0"/>
           </a:p>
@@ -14161,13 +12271,13 @@
       </p:sp>
       <p:sp>
         <p:nvSpPr>
-          <p:cNvPr id="148" name="Text 143"/>
-          <p:cNvSpPr txBox="1"/>
-          <p:nvPr/>
-        </p:nvSpPr>
-        <p:spPr>
-          <a:xfrm>
-            <a:off x="6286500" y="3872484"/>
+          <p:cNvPr id="92" name="Text 87"/>
+          <p:cNvSpPr txBox="1"/>
+          <p:nvPr/>
+        </p:nvSpPr>
+        <p:spPr>
+          <a:xfrm>
+            <a:off x="1751076" y="3872484"/>
             <a:ext cx="566928" cy="274320"/>
           </a:xfrm>
           <a:prstGeom prst="rect">
@@ -14192,7 +12302,7 @@
                 <a:ea typeface="Meiryo" pitchFamily="34" charset="-122"/>
                 <a:cs typeface="Meiryo" pitchFamily="34" charset="-120"/>
               </a:rPr>
-              <a:t>HP 50</a:t>
+              <a:t>HP 60</a:t>
             </a:r>
             <a:endParaRPr lang="en-US" sz="1200" dirty="0"/>
           </a:p>
@@ -14200,20 +12310,20 @@
       </p:sp>
       <p:sp>
         <p:nvSpPr>
-          <p:cNvPr id="149" name="Shape 144"/>
-          <p:cNvSpPr/>
-          <p:nvPr/>
-        </p:nvSpPr>
-        <p:spPr>
-          <a:xfrm>
-            <a:off x="6880860" y="3918204"/>
+          <p:cNvPr id="93" name="Shape 88"/>
+          <p:cNvSpPr/>
+          <p:nvPr/>
+        </p:nvSpPr>
+        <p:spPr>
+          <a:xfrm>
+            <a:off x="2345436" y="3918204"/>
             <a:ext cx="173736" cy="173736"/>
           </a:xfrm>
           <a:prstGeom prst="ellipse">
             <a:avLst/>
           </a:prstGeom>
           <a:solidFill>
-            <a:srgbClr val="3FA535"/>
+            <a:srgbClr val="E8452E"/>
           </a:solidFill>
           <a:ln w="9525">
             <a:solidFill>
@@ -14225,13 +12335,13 @@
       </p:sp>
       <p:sp>
         <p:nvSpPr>
-          <p:cNvPr id="150" name="Shape 145"/>
-          <p:cNvSpPr/>
-          <p:nvPr/>
-        </p:nvSpPr>
-        <p:spPr>
-          <a:xfrm>
-            <a:off x="5088636" y="4174236"/>
+          <p:cNvPr id="94" name="Shape 89"/>
+          <p:cNvSpPr/>
+          <p:nvPr/>
+        </p:nvSpPr>
+        <p:spPr>
+          <a:xfrm>
+            <a:off x="553212" y="4174236"/>
             <a:ext cx="1920240" cy="1225296"/>
           </a:xfrm>
           <a:prstGeom prst="rect">
@@ -14248,71 +12358,39 @@
           </a:ln>
         </p:spPr>
       </p:sp>
-      <p:sp>
-        <p:nvSpPr>
-          <p:cNvPr id="151" name="Text 146"/>
-          <p:cNvSpPr txBox="1"/>
-          <p:nvPr/>
-        </p:nvSpPr>
-        <p:spPr>
-          <a:xfrm>
-            <a:off x="5189220" y="4174236"/>
-            <a:ext cx="1719072" cy="1225296"/>
-          </a:xfrm>
-          <a:prstGeom prst="rect">
-            <a:avLst/>
-          </a:prstGeom>
-          <a:noFill/>
-          <a:ln/>
-        </p:spPr>
-        <p:txBody>
-          <a:bodyPr wrap="square" lIns="0" tIns="0" rIns="0" bIns="0" rtlCol="0" anchor="ctr"/>
-          <a:lstStyle/>
-          <a:p>
-            <a:pPr algn="ctr" indent="0" marL="0">
-              <a:buNone/>
-            </a:pPr>
-            <a:r>
-              <a:rPr lang="en-US" sz="950" dirty="0">
-                <a:solidFill>
-                  <a:srgbClr val="AAAAAA"/>
-                </a:solidFill>
-                <a:latin typeface="Meiryo" pitchFamily="34" charset="0"/>
-                <a:ea typeface="Meiryo" pitchFamily="34" charset="-122"/>
-                <a:cs typeface="Meiryo" pitchFamily="34" charset="-120"/>
-              </a:rPr>
-              <a:t>ここに絵をはる</a:t>
-            </a:r>
-            <a:endParaRPr lang="en-US" sz="950" dirty="0"/>
-          </a:p>
-          <a:p>
-            <a:pPr algn="ctr" indent="0" marL="0">
-              <a:buNone/>
-            </a:pPr>
-            <a:r>
-              <a:rPr lang="en-US" sz="950" dirty="0">
-                <a:solidFill>
-                  <a:srgbClr val="AAAAAA"/>
-                </a:solidFill>
-                <a:latin typeface="Meiryo" pitchFamily="34" charset="0"/>
-                <a:ea typeface="Meiryo" pitchFamily="34" charset="-122"/>
-                <a:cs typeface="Meiryo" pitchFamily="34" charset="-120"/>
-              </a:rPr>
-              <a:t>（かさに水玉もようの、ちいさなきのこ）</a:t>
-            </a:r>
-            <a:endParaRPr lang="en-US" sz="950" dirty="0"/>
-          </a:p>
-        </p:txBody>
-      </p:sp>
-      <p:sp>
-        <p:nvSpPr>
-          <p:cNvPr id="152" name="Text 147"/>
-          <p:cNvSpPr txBox="1"/>
-          <p:nvPr/>
-        </p:nvSpPr>
-        <p:spPr>
-          <a:xfrm>
-            <a:off x="5088636" y="5408676"/>
+      <p:pic>
+        <p:nvPicPr>
+          <p:cNvPr id="95" name="Image 3" descr="c1.jpg">    </p:cNvPr>
+          <p:cNvPicPr>
+            <a:picLocks noChangeAspect="1"/>
+          </p:cNvPicPr>
+          <p:nvPr/>
+        </p:nvPicPr>
+        <p:blipFill>
+          <a:blip r:embed="rId4"/>
+          <a:stretch>
+            <a:fillRect/>
+          </a:stretch>
+        </p:blipFill>
+        <p:spPr>
+          <a:xfrm>
+            <a:off x="566928" y="4187952"/>
+            <a:ext cx="1892808" cy="1197864"/>
+          </a:xfrm>
+          <a:prstGeom prst="rect">
+            <a:avLst/>
+          </a:prstGeom>
+        </p:spPr>
+      </p:pic>
+      <p:sp>
+        <p:nvSpPr>
+          <p:cNvPr id="96" name="Text 90"/>
+          <p:cNvSpPr txBox="1"/>
+          <p:nvPr/>
+        </p:nvSpPr>
+        <p:spPr>
+          <a:xfrm>
+            <a:off x="553212" y="5408676"/>
             <a:ext cx="822960" cy="146304"/>
           </a:xfrm>
           <a:prstGeom prst="rect">
@@ -14337,7 +12415,7 @@
                 <a:ea typeface="Meiryo" pitchFamily="34" charset="-122"/>
                 <a:cs typeface="Meiryo" pitchFamily="34" charset="-120"/>
               </a:rPr>
-              <a:t>ランク C</a:t>
+              <a:t>ランク B</a:t>
             </a:r>
             <a:endParaRPr lang="en-US" sz="800" dirty="0"/>
           </a:p>
@@ -14345,20 +12423,20 @@
       </p:sp>
       <p:sp>
         <p:nvSpPr>
-          <p:cNvPr id="153" name="Shape 148"/>
-          <p:cNvSpPr/>
-          <p:nvPr/>
-        </p:nvSpPr>
-        <p:spPr>
-          <a:xfrm>
-            <a:off x="5097780" y="5646420"/>
+          <p:cNvPr id="97" name="Shape 91"/>
+          <p:cNvSpPr/>
+          <p:nvPr/>
+        </p:nvSpPr>
+        <p:spPr>
+          <a:xfrm>
+            <a:off x="562356" y="5646420"/>
             <a:ext cx="155448" cy="155448"/>
           </a:xfrm>
           <a:prstGeom prst="ellipse">
             <a:avLst/>
           </a:prstGeom>
           <a:solidFill>
-            <a:srgbClr val="3FA535"/>
+            <a:srgbClr val="E8452E"/>
           </a:solidFill>
           <a:ln w="9525">
             <a:solidFill>
@@ -14370,13 +12448,13 @@
       </p:sp>
       <p:sp>
         <p:nvSpPr>
-          <p:cNvPr id="154" name="Text 149"/>
-          <p:cNvSpPr txBox="1"/>
-          <p:nvPr/>
-        </p:nvSpPr>
-        <p:spPr>
-          <a:xfrm>
-            <a:off x="5554980" y="5609844"/>
+          <p:cNvPr id="98" name="Text 92"/>
+          <p:cNvSpPr txBox="1"/>
+          <p:nvPr/>
+        </p:nvSpPr>
+        <p:spPr>
+          <a:xfrm>
+            <a:off x="1019556" y="5609844"/>
             <a:ext cx="1097280" cy="228600"/>
           </a:xfrm>
           <a:prstGeom prst="rect">
@@ -14401,7 +12479,7 @@
                 <a:ea typeface="Meiryo" pitchFamily="34" charset="-122"/>
                 <a:cs typeface="Meiryo" pitchFamily="34" charset="-120"/>
               </a:rPr>
-              <a:t>ぽふぽふ</a:t>
+              <a:t>ひのこ</a:t>
             </a:r>
             <a:endParaRPr lang="en-US" sz="1200" dirty="0"/>
           </a:p>
@@ -14409,13 +12487,13 @@
       </p:sp>
       <p:sp>
         <p:nvSpPr>
-          <p:cNvPr id="155" name="Text 150"/>
-          <p:cNvSpPr txBox="1"/>
-          <p:nvPr/>
-        </p:nvSpPr>
-        <p:spPr>
-          <a:xfrm>
-            <a:off x="6515100" y="5609844"/>
+          <p:cNvPr id="99" name="Text 93"/>
+          <p:cNvSpPr txBox="1"/>
+          <p:nvPr/>
+        </p:nvSpPr>
+        <p:spPr>
+          <a:xfrm>
+            <a:off x="1979676" y="5609844"/>
             <a:ext cx="502920" cy="228600"/>
           </a:xfrm>
           <a:prstGeom prst="rect">
@@ -14440,7 +12518,7 @@
                 <a:ea typeface="Meiryo" pitchFamily="34" charset="-122"/>
                 <a:cs typeface="Meiryo" pitchFamily="34" charset="-120"/>
               </a:rPr>
-              <a:t>10</a:t>
+              <a:t>20</a:t>
             </a:r>
             <a:endParaRPr lang="en-US" sz="1400" dirty="0"/>
           </a:p>
@@ -14448,13 +12526,13 @@
       </p:sp>
       <p:sp>
         <p:nvSpPr>
-          <p:cNvPr id="156" name="Text 151"/>
-          <p:cNvSpPr txBox="1"/>
-          <p:nvPr/>
-        </p:nvSpPr>
-        <p:spPr>
-          <a:xfrm>
-            <a:off x="5097780" y="5856732"/>
+          <p:cNvPr id="100" name="Text 94"/>
+          <p:cNvSpPr txBox="1"/>
+          <p:nvPr/>
+        </p:nvSpPr>
+        <p:spPr>
+          <a:xfrm>
+            <a:off x="562356" y="5856732"/>
             <a:ext cx="1901952" cy="201168"/>
           </a:xfrm>
           <a:prstGeom prst="rect">
@@ -14487,20 +12565,20 @@
       </p:sp>
       <p:sp>
         <p:nvSpPr>
-          <p:cNvPr id="157" name="Shape 152"/>
-          <p:cNvSpPr/>
-          <p:nvPr/>
-        </p:nvSpPr>
-        <p:spPr>
-          <a:xfrm>
-            <a:off x="5097780" y="6131052"/>
+          <p:cNvPr id="101" name="Shape 95"/>
+          <p:cNvSpPr/>
+          <p:nvPr/>
+        </p:nvSpPr>
+        <p:spPr>
+          <a:xfrm>
+            <a:off x="562356" y="6131052"/>
             <a:ext cx="155448" cy="155448"/>
           </a:xfrm>
           <a:prstGeom prst="ellipse">
             <a:avLst/>
           </a:prstGeom>
           <a:solidFill>
-            <a:srgbClr val="3FA535"/>
+            <a:srgbClr val="E8452E"/>
           </a:solidFill>
           <a:ln w="9525">
             <a:solidFill>
@@ -14512,20 +12590,20 @@
       </p:sp>
       <p:sp>
         <p:nvSpPr>
-          <p:cNvPr id="158" name="Shape 153"/>
-          <p:cNvSpPr/>
-          <p:nvPr/>
-        </p:nvSpPr>
-        <p:spPr>
-          <a:xfrm>
-            <a:off x="5280660" y="6131052"/>
+          <p:cNvPr id="102" name="Shape 96"/>
+          <p:cNvSpPr/>
+          <p:nvPr/>
+        </p:nvSpPr>
+        <p:spPr>
+          <a:xfrm>
+            <a:off x="745236" y="6131052"/>
             <a:ext cx="155448" cy="155448"/>
           </a:xfrm>
           <a:prstGeom prst="ellipse">
             <a:avLst/>
           </a:prstGeom>
           <a:solidFill>
-            <a:srgbClr val="3FA535"/>
+            <a:srgbClr val="E8452E"/>
           </a:solidFill>
           <a:ln w="9525">
             <a:solidFill>
@@ -14537,13 +12615,13 @@
       </p:sp>
       <p:sp>
         <p:nvSpPr>
-          <p:cNvPr id="159" name="Text 154"/>
-          <p:cNvSpPr txBox="1"/>
-          <p:nvPr/>
-        </p:nvSpPr>
-        <p:spPr>
-          <a:xfrm>
-            <a:off x="5554980" y="6094476"/>
+          <p:cNvPr id="103" name="Text 97"/>
+          <p:cNvSpPr txBox="1"/>
+          <p:nvPr/>
+        </p:nvSpPr>
+        <p:spPr>
+          <a:xfrm>
+            <a:off x="1019556" y="6094476"/>
             <a:ext cx="1097280" cy="228600"/>
           </a:xfrm>
           <a:prstGeom prst="rect">
@@ -14568,7 +12646,7 @@
                 <a:ea typeface="Meiryo" pitchFamily="34" charset="-122"/>
                 <a:cs typeface="Meiryo" pitchFamily="34" charset="-120"/>
               </a:rPr>
-              <a:t>ほうしこうげき</a:t>
+              <a:t>ほのおのしっぽ</a:t>
             </a:r>
             <a:endParaRPr lang="en-US" sz="1200" dirty="0"/>
           </a:p>
@@ -14576,13 +12654,13 @@
       </p:sp>
       <p:sp>
         <p:nvSpPr>
-          <p:cNvPr id="160" name="Text 155"/>
-          <p:cNvSpPr txBox="1"/>
-          <p:nvPr/>
-        </p:nvSpPr>
-        <p:spPr>
-          <a:xfrm>
-            <a:off x="6515100" y="6094476"/>
+          <p:cNvPr id="104" name="Text 98"/>
+          <p:cNvSpPr txBox="1"/>
+          <p:nvPr/>
+        </p:nvSpPr>
+        <p:spPr>
+          <a:xfrm>
+            <a:off x="1979676" y="6094476"/>
             <a:ext cx="502920" cy="228600"/>
           </a:xfrm>
           <a:prstGeom prst="rect">
@@ -14607,7 +12685,7 @@
                 <a:ea typeface="Meiryo" pitchFamily="34" charset="-122"/>
                 <a:cs typeface="Meiryo" pitchFamily="34" charset="-120"/>
               </a:rPr>
-              <a:t>30</a:t>
+              <a:t>50</a:t>
             </a:r>
             <a:endParaRPr lang="en-US" sz="1400" dirty="0"/>
           </a:p>
@@ -14615,13 +12693,13 @@
       </p:sp>
       <p:sp>
         <p:nvSpPr>
-          <p:cNvPr id="161" name="Text 156"/>
-          <p:cNvSpPr txBox="1"/>
-          <p:nvPr/>
-        </p:nvSpPr>
-        <p:spPr>
-          <a:xfrm>
-            <a:off x="5097780" y="6341364"/>
+          <p:cNvPr id="105" name="Text 99"/>
+          <p:cNvSpPr txBox="1"/>
+          <p:nvPr/>
+        </p:nvSpPr>
+        <p:spPr>
+          <a:xfrm>
+            <a:off x="562356" y="6341364"/>
             <a:ext cx="1901952" cy="201168"/>
           </a:xfrm>
           <a:prstGeom prst="rect">
@@ -14654,13 +12732,13 @@
       </p:sp>
       <p:sp>
         <p:nvSpPr>
-          <p:cNvPr id="162" name="Shape 157"/>
-          <p:cNvSpPr/>
-          <p:nvPr/>
-        </p:nvSpPr>
-        <p:spPr>
-          <a:xfrm>
-            <a:off x="5006340" y="6579108"/>
+          <p:cNvPr id="106" name="Shape 100"/>
+          <p:cNvSpPr/>
+          <p:nvPr/>
+        </p:nvSpPr>
+        <p:spPr>
+          <a:xfrm>
+            <a:off x="470916" y="6579108"/>
             <a:ext cx="2084832" cy="182880"/>
           </a:xfrm>
           <a:prstGeom prst="rect">
@@ -14679,13 +12757,13 @@
       </p:sp>
       <p:sp>
         <p:nvSpPr>
-          <p:cNvPr id="163" name="Text 158"/>
-          <p:cNvSpPr txBox="1"/>
-          <p:nvPr/>
-        </p:nvSpPr>
-        <p:spPr>
-          <a:xfrm>
-            <a:off x="5042916" y="6579108"/>
+          <p:cNvPr id="107" name="Text 101"/>
+          <p:cNvSpPr txBox="1"/>
+          <p:nvPr/>
+        </p:nvSpPr>
+        <p:spPr>
+          <a:xfrm>
+            <a:off x="507492" y="6579108"/>
             <a:ext cx="274320" cy="182880"/>
           </a:xfrm>
           <a:prstGeom prst="rect">
@@ -14718,20 +12796,20 @@
       </p:sp>
       <p:sp>
         <p:nvSpPr>
-          <p:cNvPr id="164" name="Shape 159"/>
-          <p:cNvSpPr/>
-          <p:nvPr/>
-        </p:nvSpPr>
-        <p:spPr>
-          <a:xfrm>
-            <a:off x="5317236" y="6601968"/>
+          <p:cNvPr id="108" name="Shape 102"/>
+          <p:cNvSpPr/>
+          <p:nvPr/>
+        </p:nvSpPr>
+        <p:spPr>
+          <a:xfrm>
+            <a:off x="781812" y="6601968"/>
             <a:ext cx="137160" cy="137160"/>
           </a:xfrm>
           <a:prstGeom prst="ellipse">
             <a:avLst/>
           </a:prstGeom>
           <a:solidFill>
-            <a:srgbClr val="E8452E"/>
+            <a:srgbClr val="2F8FE0"/>
           </a:solidFill>
           <a:ln w="9525">
             <a:solidFill>
@@ -14743,13 +12821,13 @@
       </p:sp>
       <p:sp>
         <p:nvSpPr>
-          <p:cNvPr id="165" name="Text 160"/>
-          <p:cNvSpPr txBox="1"/>
-          <p:nvPr/>
-        </p:nvSpPr>
-        <p:spPr>
-          <a:xfrm>
-            <a:off x="5472684" y="6579108"/>
+          <p:cNvPr id="109" name="Text 103"/>
+          <p:cNvSpPr txBox="1"/>
+          <p:nvPr/>
+        </p:nvSpPr>
+        <p:spPr>
+          <a:xfrm>
+            <a:off x="937260" y="6579108"/>
             <a:ext cx="228600" cy="182880"/>
           </a:xfrm>
           <a:prstGeom prst="rect">
@@ -14782,13 +12860,13 @@
       </p:sp>
       <p:sp>
         <p:nvSpPr>
-          <p:cNvPr id="166" name="Text 161"/>
-          <p:cNvSpPr txBox="1"/>
-          <p:nvPr/>
-        </p:nvSpPr>
-        <p:spPr>
-          <a:xfrm>
-            <a:off x="5719572" y="6579108"/>
+          <p:cNvPr id="110" name="Text 104"/>
+          <p:cNvSpPr txBox="1"/>
+          <p:nvPr/>
+        </p:nvSpPr>
+        <p:spPr>
+          <a:xfrm>
+            <a:off x="1184148" y="6579108"/>
             <a:ext cx="365760" cy="182880"/>
           </a:xfrm>
           <a:prstGeom prst="rect">
@@ -14821,13 +12899,13 @@
       </p:sp>
       <p:sp>
         <p:nvSpPr>
-          <p:cNvPr id="167" name="Text 162"/>
-          <p:cNvSpPr txBox="1"/>
-          <p:nvPr/>
-        </p:nvSpPr>
-        <p:spPr>
-          <a:xfrm>
-            <a:off x="6067044" y="6579108"/>
+          <p:cNvPr id="111" name="Text 105"/>
+          <p:cNvSpPr txBox="1"/>
+          <p:nvPr/>
+        </p:nvSpPr>
+        <p:spPr>
+          <a:xfrm>
+            <a:off x="1531620" y="6579108"/>
             <a:ext cx="274320" cy="182880"/>
           </a:xfrm>
           <a:prstGeom prst="rect">
@@ -14860,13 +12938,13 @@
       </p:sp>
       <p:sp>
         <p:nvSpPr>
-          <p:cNvPr id="168" name="Text 163"/>
-          <p:cNvSpPr txBox="1"/>
-          <p:nvPr/>
-        </p:nvSpPr>
-        <p:spPr>
-          <a:xfrm>
-            <a:off x="6487668" y="6579108"/>
+          <p:cNvPr id="112" name="Text 106"/>
+          <p:cNvSpPr txBox="1"/>
+          <p:nvPr/>
+        </p:nvSpPr>
+        <p:spPr>
+          <a:xfrm>
+            <a:off x="1952244" y="6579108"/>
             <a:ext cx="320040" cy="182880"/>
           </a:xfrm>
           <a:prstGeom prst="rect">
@@ -14899,13 +12977,13 @@
       </p:sp>
       <p:sp>
         <p:nvSpPr>
-          <p:cNvPr id="169" name="Shape 164"/>
-          <p:cNvSpPr/>
-          <p:nvPr/>
-        </p:nvSpPr>
-        <p:spPr>
-          <a:xfrm>
-            <a:off x="6816852" y="6601968"/>
+          <p:cNvPr id="113" name="Shape 107"/>
+          <p:cNvSpPr/>
+          <p:nvPr/>
+        </p:nvSpPr>
+        <p:spPr>
+          <a:xfrm>
+            <a:off x="2281428" y="6601968"/>
             <a:ext cx="137160" cy="137160"/>
           </a:xfrm>
           <a:prstGeom prst="ellipse">
@@ -14924,13 +13002,13 @@
       </p:sp>
       <p:sp>
         <p:nvSpPr>
-          <p:cNvPr id="170" name="Shape 165"/>
-          <p:cNvSpPr/>
-          <p:nvPr/>
-        </p:nvSpPr>
-        <p:spPr>
-          <a:xfrm>
-            <a:off x="379476" y="6926580"/>
+          <p:cNvPr id="114" name="Shape 108"/>
+          <p:cNvSpPr/>
+          <p:nvPr/>
+        </p:nvSpPr>
+        <p:spPr>
+          <a:xfrm>
+            <a:off x="2647188" y="3762756"/>
             <a:ext cx="2267712" cy="3163824"/>
           </a:xfrm>
           <a:prstGeom prst="rect">
@@ -14949,13 +13027,13 @@
       </p:sp>
       <p:sp>
         <p:nvSpPr>
-          <p:cNvPr id="171" name="Shape 166"/>
-          <p:cNvSpPr/>
-          <p:nvPr/>
-        </p:nvSpPr>
-        <p:spPr>
-          <a:xfrm>
-            <a:off x="406908" y="6954012"/>
+          <p:cNvPr id="115" name="Shape 109"/>
+          <p:cNvSpPr/>
+          <p:nvPr/>
+        </p:nvSpPr>
+        <p:spPr>
+          <a:xfrm>
+            <a:off x="2674620" y="3790188"/>
             <a:ext cx="2212848" cy="3108960"/>
           </a:xfrm>
           <a:prstGeom prst="roundRect">
@@ -14976,38 +13054,38 @@
       </p:sp>
       <p:sp>
         <p:nvSpPr>
-          <p:cNvPr id="172" name="Shape 167"/>
-          <p:cNvSpPr/>
-          <p:nvPr/>
-        </p:nvSpPr>
-        <p:spPr>
-          <a:xfrm>
-            <a:off x="470916" y="7018020"/>
+          <p:cNvPr id="116" name="Shape 110"/>
+          <p:cNvSpPr/>
+          <p:nvPr/>
+        </p:nvSpPr>
+        <p:spPr>
+          <a:xfrm>
+            <a:off x="2738628" y="3854196"/>
             <a:ext cx="2084832" cy="2980944"/>
           </a:xfrm>
           <a:prstGeom prst="rect">
             <a:avLst/>
           </a:prstGeom>
           <a:solidFill>
-            <a:srgbClr val="F6B58A"/>
+            <a:srgbClr val="A9D6F5"/>
           </a:solidFill>
           <a:ln w="6350">
             <a:solidFill>
-              <a:srgbClr val="F6B58A"/>
-            </a:solidFill>
-            <a:prstDash val="solid"/>
-          </a:ln>
-        </p:spPr>
-      </p:sp>
-      <p:sp>
-        <p:nvSpPr>
-          <p:cNvPr id="173" name="Shape 168"/>
-          <p:cNvSpPr/>
-          <p:nvPr/>
-        </p:nvSpPr>
-        <p:spPr>
-          <a:xfrm>
-            <a:off x="470916" y="7018020"/>
+              <a:srgbClr val="A9D6F5"/>
+            </a:solidFill>
+            <a:prstDash val="solid"/>
+          </a:ln>
+        </p:spPr>
+      </p:sp>
+      <p:sp>
+        <p:nvSpPr>
+          <p:cNvPr id="117" name="Shape 111"/>
+          <p:cNvSpPr/>
+          <p:nvPr/>
+        </p:nvSpPr>
+        <p:spPr>
+          <a:xfrm>
+            <a:off x="2738628" y="3854196"/>
             <a:ext cx="384048" cy="155448"/>
           </a:xfrm>
           <a:prstGeom prst="roundRect">
@@ -15028,13 +13106,13 @@
       </p:sp>
       <p:sp>
         <p:nvSpPr>
-          <p:cNvPr id="174" name="Text 169"/>
-          <p:cNvSpPr txBox="1"/>
-          <p:nvPr/>
-        </p:nvSpPr>
-        <p:spPr>
-          <a:xfrm>
-            <a:off x="470916" y="7018020"/>
+          <p:cNvPr id="118" name="Text 112"/>
+          <p:cNvSpPr txBox="1"/>
+          <p:nvPr/>
+        </p:nvSpPr>
+        <p:spPr>
+          <a:xfrm>
+            <a:off x="2738628" y="3854196"/>
             <a:ext cx="384048" cy="155448"/>
           </a:xfrm>
           <a:prstGeom prst="rect">
@@ -15067,13 +13145,13 @@
       </p:sp>
       <p:sp>
         <p:nvSpPr>
-          <p:cNvPr id="175" name="Text 170"/>
-          <p:cNvSpPr txBox="1"/>
-          <p:nvPr/>
-        </p:nvSpPr>
-        <p:spPr>
-          <a:xfrm>
-            <a:off x="900684" y="7036308"/>
+          <p:cNvPr id="119" name="Text 113"/>
+          <p:cNvSpPr txBox="1"/>
+          <p:nvPr/>
+        </p:nvSpPr>
+        <p:spPr>
+          <a:xfrm>
+            <a:off x="3168396" y="3872484"/>
             <a:ext cx="914400" cy="274320"/>
           </a:xfrm>
           <a:prstGeom prst="rect">
@@ -15090,29 +13168,29 @@
               <a:buNone/>
             </a:pPr>
             <a:r>
-              <a:rPr lang="en-US" sz="1300" b="1" dirty="0">
-                <a:solidFill>
-                  <a:srgbClr val="222222"/>
-                </a:solidFill>
-                <a:latin typeface="Meiryo" pitchFamily="34" charset="0"/>
-                <a:ea typeface="Meiryo" pitchFamily="34" charset="-122"/>
-                <a:cs typeface="Meiryo" pitchFamily="34" charset="-120"/>
-              </a:rPr>
-              <a:t>ちびキツネ</a:t>
-            </a:r>
-            <a:endParaRPr lang="en-US" sz="1300" dirty="0"/>
-          </a:p>
-        </p:txBody>
-      </p:sp>
-      <p:sp>
-        <p:nvSpPr>
-          <p:cNvPr id="176" name="Text 171"/>
-          <p:cNvSpPr txBox="1"/>
-          <p:nvPr/>
-        </p:nvSpPr>
-        <p:spPr>
-          <a:xfrm>
-            <a:off x="1751076" y="7036308"/>
+              <a:rPr lang="en-US" sz="1000" b="1" dirty="0">
+                <a:solidFill>
+                  <a:srgbClr val="222222"/>
+                </a:solidFill>
+                <a:latin typeface="Meiryo" pitchFamily="34" charset="0"/>
+                <a:ea typeface="Meiryo" pitchFamily="34" charset="-122"/>
+                <a:cs typeface="Meiryo" pitchFamily="34" charset="-120"/>
+              </a:rPr>
+              <a:t>あめふりガエル</a:t>
+            </a:r>
+            <a:endParaRPr lang="en-US" sz="1000" dirty="0"/>
+          </a:p>
+        </p:txBody>
+      </p:sp>
+      <p:sp>
+        <p:nvSpPr>
+          <p:cNvPr id="120" name="Text 114"/>
+          <p:cNvSpPr txBox="1"/>
+          <p:nvPr/>
+        </p:nvSpPr>
+        <p:spPr>
+          <a:xfrm>
+            <a:off x="4018788" y="3872484"/>
             <a:ext cx="566928" cy="274320"/>
           </a:xfrm>
           <a:prstGeom prst="rect">
@@ -15137,7 +13215,7 @@
                 <a:ea typeface="Meiryo" pitchFamily="34" charset="-122"/>
                 <a:cs typeface="Meiryo" pitchFamily="34" charset="-120"/>
               </a:rPr>
-              <a:t>HP 50</a:t>
+              <a:t>HP 70</a:t>
             </a:r>
             <a:endParaRPr lang="en-US" sz="1200" dirty="0"/>
           </a:p>
@@ -15145,20 +13223,20 @@
       </p:sp>
       <p:sp>
         <p:nvSpPr>
-          <p:cNvPr id="177" name="Shape 172"/>
-          <p:cNvSpPr/>
-          <p:nvPr/>
-        </p:nvSpPr>
-        <p:spPr>
-          <a:xfrm>
-            <a:off x="2345436" y="7082028"/>
+          <p:cNvPr id="121" name="Shape 115"/>
+          <p:cNvSpPr/>
+          <p:nvPr/>
+        </p:nvSpPr>
+        <p:spPr>
+          <a:xfrm>
+            <a:off x="4613148" y="3918204"/>
             <a:ext cx="173736" cy="173736"/>
           </a:xfrm>
           <a:prstGeom prst="ellipse">
             <a:avLst/>
           </a:prstGeom>
           <a:solidFill>
-            <a:srgbClr val="E8452E"/>
+            <a:srgbClr val="2F8FE0"/>
           </a:solidFill>
           <a:ln w="9525">
             <a:solidFill>
@@ -15170,13 +13248,13 @@
       </p:sp>
       <p:sp>
         <p:nvSpPr>
-          <p:cNvPr id="178" name="Shape 173"/>
-          <p:cNvSpPr/>
-          <p:nvPr/>
-        </p:nvSpPr>
-        <p:spPr>
-          <a:xfrm>
-            <a:off x="553212" y="7338060"/>
+          <p:cNvPr id="122" name="Shape 116"/>
+          <p:cNvSpPr/>
+          <p:nvPr/>
+        </p:nvSpPr>
+        <p:spPr>
+          <a:xfrm>
+            <a:off x="2820924" y="4174236"/>
             <a:ext cx="1920240" cy="1225296"/>
           </a:xfrm>
           <a:prstGeom prst="rect">
@@ -15193,71 +13271,39 @@
           </a:ln>
         </p:spPr>
       </p:sp>
-      <p:sp>
-        <p:nvSpPr>
-          <p:cNvPr id="179" name="Text 174"/>
-          <p:cNvSpPr txBox="1"/>
-          <p:nvPr/>
-        </p:nvSpPr>
-        <p:spPr>
-          <a:xfrm>
-            <a:off x="653796" y="7338060"/>
-            <a:ext cx="1719072" cy="1225296"/>
-          </a:xfrm>
-          <a:prstGeom prst="rect">
-            <a:avLst/>
-          </a:prstGeom>
-          <a:noFill/>
-          <a:ln/>
-        </p:spPr>
-        <p:txBody>
-          <a:bodyPr wrap="square" lIns="0" tIns="0" rIns="0" bIns="0" rtlCol="0" anchor="ctr"/>
-          <a:lstStyle/>
-          <a:p>
-            <a:pPr algn="ctr" indent="0" marL="0">
-              <a:buNone/>
-            </a:pPr>
-            <a:r>
-              <a:rPr lang="en-US" sz="950" dirty="0">
-                <a:solidFill>
-                  <a:srgbClr val="AAAAAA"/>
-                </a:solidFill>
-                <a:latin typeface="Meiryo" pitchFamily="34" charset="0"/>
-                <a:ea typeface="Meiryo" pitchFamily="34" charset="-122"/>
-                <a:cs typeface="Meiryo" pitchFamily="34" charset="-120"/>
-              </a:rPr>
-              <a:t>ここに絵をはる</a:t>
-            </a:r>
-            <a:endParaRPr lang="en-US" sz="950" dirty="0"/>
-          </a:p>
-          <a:p>
-            <a:pPr algn="ctr" indent="0" marL="0">
-              <a:buNone/>
-            </a:pPr>
-            <a:r>
-              <a:rPr lang="en-US" sz="950" dirty="0">
-                <a:solidFill>
-                  <a:srgbClr val="AAAAAA"/>
-                </a:solidFill>
-                <a:latin typeface="Meiryo" pitchFamily="34" charset="0"/>
-                <a:ea typeface="Meiryo" pitchFamily="34" charset="-122"/>
-                <a:cs typeface="Meiryo" pitchFamily="34" charset="-120"/>
-              </a:rPr>
-              <a:t>（しっぽに小さな火がついた子ぎつね）</a:t>
-            </a:r>
-            <a:endParaRPr lang="en-US" sz="950" dirty="0"/>
-          </a:p>
-        </p:txBody>
-      </p:sp>
-      <p:sp>
-        <p:nvSpPr>
-          <p:cNvPr id="180" name="Text 175"/>
-          <p:cNvSpPr txBox="1"/>
-          <p:nvPr/>
-        </p:nvSpPr>
-        <p:spPr>
-          <a:xfrm>
-            <a:off x="553212" y="8572500"/>
+      <p:pic>
+        <p:nvPicPr>
+          <p:cNvPr id="123" name="Image 4" descr="c2.jpg">    </p:cNvPr>
+          <p:cNvPicPr>
+            <a:picLocks noChangeAspect="1"/>
+          </p:cNvPicPr>
+          <p:nvPr/>
+        </p:nvPicPr>
+        <p:blipFill>
+          <a:blip r:embed="rId5"/>
+          <a:stretch>
+            <a:fillRect/>
+          </a:stretch>
+        </p:blipFill>
+        <p:spPr>
+          <a:xfrm>
+            <a:off x="2834640" y="4187952"/>
+            <a:ext cx="1892808" cy="1197864"/>
+          </a:xfrm>
+          <a:prstGeom prst="rect">
+            <a:avLst/>
+          </a:prstGeom>
+        </p:spPr>
+      </p:pic>
+      <p:sp>
+        <p:nvSpPr>
+          <p:cNvPr id="124" name="Text 117"/>
+          <p:cNvSpPr txBox="1"/>
+          <p:nvPr/>
+        </p:nvSpPr>
+        <p:spPr>
+          <a:xfrm>
+            <a:off x="2820924" y="5408676"/>
             <a:ext cx="822960" cy="146304"/>
           </a:xfrm>
           <a:prstGeom prst="rect">
@@ -15282,7 +13328,7 @@
                 <a:ea typeface="Meiryo" pitchFamily="34" charset="-122"/>
                 <a:cs typeface="Meiryo" pitchFamily="34" charset="-120"/>
               </a:rPr>
-              <a:t>ランク C</a:t>
+              <a:t>ランク B</a:t>
             </a:r>
             <a:endParaRPr lang="en-US" sz="800" dirty="0"/>
           </a:p>
@@ -15290,20 +13336,20 @@
       </p:sp>
       <p:sp>
         <p:nvSpPr>
-          <p:cNvPr id="181" name="Shape 176"/>
-          <p:cNvSpPr/>
-          <p:nvPr/>
-        </p:nvSpPr>
-        <p:spPr>
-          <a:xfrm>
-            <a:off x="562356" y="8810244"/>
+          <p:cNvPr id="125" name="Shape 118"/>
+          <p:cNvSpPr/>
+          <p:nvPr/>
+        </p:nvSpPr>
+        <p:spPr>
+          <a:xfrm>
+            <a:off x="2830068" y="5646420"/>
             <a:ext cx="155448" cy="155448"/>
           </a:xfrm>
           <a:prstGeom prst="ellipse">
             <a:avLst/>
           </a:prstGeom>
           <a:solidFill>
-            <a:srgbClr val="E8452E"/>
+            <a:srgbClr val="2F8FE0"/>
           </a:solidFill>
           <a:ln w="9525">
             <a:solidFill>
@@ -15315,13 +13361,13 @@
       </p:sp>
       <p:sp>
         <p:nvSpPr>
-          <p:cNvPr id="182" name="Text 177"/>
-          <p:cNvSpPr txBox="1"/>
-          <p:nvPr/>
-        </p:nvSpPr>
-        <p:spPr>
-          <a:xfrm>
-            <a:off x="1019556" y="8773668"/>
+          <p:cNvPr id="126" name="Text 119"/>
+          <p:cNvSpPr txBox="1"/>
+          <p:nvPr/>
+        </p:nvSpPr>
+        <p:spPr>
+          <a:xfrm>
+            <a:off x="3287268" y="5609844"/>
             <a:ext cx="1097280" cy="228600"/>
           </a:xfrm>
           <a:prstGeom prst="rect">
@@ -15346,7 +13392,7 @@
                 <a:ea typeface="Meiryo" pitchFamily="34" charset="-122"/>
                 <a:cs typeface="Meiryo" pitchFamily="34" charset="-120"/>
               </a:rPr>
-              <a:t>ぽっぽひ</a:t>
+              <a:t>みずでっぽう</a:t>
             </a:r>
             <a:endParaRPr lang="en-US" sz="1200" dirty="0"/>
           </a:p>
@@ -15354,13 +13400,13 @@
       </p:sp>
       <p:sp>
         <p:nvSpPr>
-          <p:cNvPr id="183" name="Text 178"/>
-          <p:cNvSpPr txBox="1"/>
-          <p:nvPr/>
-        </p:nvSpPr>
-        <p:spPr>
-          <a:xfrm>
-            <a:off x="1979676" y="8773668"/>
+          <p:cNvPr id="127" name="Text 120"/>
+          <p:cNvSpPr txBox="1"/>
+          <p:nvPr/>
+        </p:nvSpPr>
+        <p:spPr>
+          <a:xfrm>
+            <a:off x="4247388" y="5609844"/>
             <a:ext cx="502920" cy="228600"/>
           </a:xfrm>
           <a:prstGeom prst="rect">
@@ -15385,7 +13431,7 @@
                 <a:ea typeface="Meiryo" pitchFamily="34" charset="-122"/>
                 <a:cs typeface="Meiryo" pitchFamily="34" charset="-120"/>
               </a:rPr>
-              <a:t>10</a:t>
+              <a:t>20</a:t>
             </a:r>
             <a:endParaRPr lang="en-US" sz="1400" dirty="0"/>
           </a:p>
@@ -15393,13 +13439,13 @@
       </p:sp>
       <p:sp>
         <p:nvSpPr>
-          <p:cNvPr id="184" name="Text 179"/>
-          <p:cNvSpPr txBox="1"/>
-          <p:nvPr/>
-        </p:nvSpPr>
-        <p:spPr>
-          <a:xfrm>
-            <a:off x="562356" y="9020556"/>
+          <p:cNvPr id="128" name="Text 121"/>
+          <p:cNvSpPr txBox="1"/>
+          <p:nvPr/>
+        </p:nvSpPr>
+        <p:spPr>
+          <a:xfrm>
+            <a:off x="2830068" y="5856732"/>
             <a:ext cx="1901952" cy="201168"/>
           </a:xfrm>
           <a:prstGeom prst="rect">
@@ -15432,20 +13478,20 @@
       </p:sp>
       <p:sp>
         <p:nvSpPr>
-          <p:cNvPr id="185" name="Shape 180"/>
-          <p:cNvSpPr/>
-          <p:nvPr/>
-        </p:nvSpPr>
-        <p:spPr>
-          <a:xfrm>
-            <a:off x="562356" y="9294876"/>
+          <p:cNvPr id="129" name="Shape 122"/>
+          <p:cNvSpPr/>
+          <p:nvPr/>
+        </p:nvSpPr>
+        <p:spPr>
+          <a:xfrm>
+            <a:off x="2830068" y="6131052"/>
             <a:ext cx="155448" cy="155448"/>
           </a:xfrm>
           <a:prstGeom prst="ellipse">
             <a:avLst/>
           </a:prstGeom>
           <a:solidFill>
-            <a:srgbClr val="E8452E"/>
+            <a:srgbClr val="2F8FE0"/>
           </a:solidFill>
           <a:ln w="9525">
             <a:solidFill>
@@ -15457,20 +13503,20 @@
       </p:sp>
       <p:sp>
         <p:nvSpPr>
-          <p:cNvPr id="186" name="Shape 181"/>
-          <p:cNvSpPr/>
-          <p:nvPr/>
-        </p:nvSpPr>
-        <p:spPr>
-          <a:xfrm>
-            <a:off x="745236" y="9294876"/>
+          <p:cNvPr id="130" name="Shape 123"/>
+          <p:cNvSpPr/>
+          <p:nvPr/>
+        </p:nvSpPr>
+        <p:spPr>
+          <a:xfrm>
+            <a:off x="3012948" y="6131052"/>
             <a:ext cx="155448" cy="155448"/>
           </a:xfrm>
           <a:prstGeom prst="ellipse">
             <a:avLst/>
           </a:prstGeom>
           <a:solidFill>
-            <a:srgbClr val="E8452E"/>
+            <a:srgbClr val="2F8FE0"/>
           </a:solidFill>
           <a:ln w="9525">
             <a:solidFill>
@@ -15482,13 +13528,13 @@
       </p:sp>
       <p:sp>
         <p:nvSpPr>
-          <p:cNvPr id="187" name="Text 182"/>
-          <p:cNvSpPr txBox="1"/>
-          <p:nvPr/>
-        </p:nvSpPr>
-        <p:spPr>
-          <a:xfrm>
-            <a:off x="1019556" y="9258300"/>
+          <p:cNvPr id="131" name="Text 124"/>
+          <p:cNvSpPr txBox="1"/>
+          <p:nvPr/>
+        </p:nvSpPr>
+        <p:spPr>
+          <a:xfrm>
+            <a:off x="3287268" y="6094476"/>
             <a:ext cx="1097280" cy="228600"/>
           </a:xfrm>
           <a:prstGeom prst="rect">
@@ -15513,7 +13559,7 @@
                 <a:ea typeface="Meiryo" pitchFamily="34" charset="-122"/>
                 <a:cs typeface="Meiryo" pitchFamily="34" charset="-120"/>
               </a:rPr>
-              <a:t>ほのおダッシュ</a:t>
+              <a:t>ずぶぬれ</a:t>
             </a:r>
             <a:endParaRPr lang="en-US" sz="1200" dirty="0"/>
           </a:p>
@@ -15521,13 +13567,13 @@
       </p:sp>
       <p:sp>
         <p:nvSpPr>
-          <p:cNvPr id="188" name="Text 183"/>
-          <p:cNvSpPr txBox="1"/>
-          <p:nvPr/>
-        </p:nvSpPr>
-        <p:spPr>
-          <a:xfrm>
-            <a:off x="1979676" y="9258300"/>
+          <p:cNvPr id="132" name="Text 125"/>
+          <p:cNvSpPr txBox="1"/>
+          <p:nvPr/>
+        </p:nvSpPr>
+        <p:spPr>
+          <a:xfrm>
+            <a:off x="4247388" y="6094476"/>
             <a:ext cx="502920" cy="228600"/>
           </a:xfrm>
           <a:prstGeom prst="rect">
@@ -15552,7 +13598,7 @@
                 <a:ea typeface="Meiryo" pitchFamily="34" charset="-122"/>
                 <a:cs typeface="Meiryo" pitchFamily="34" charset="-120"/>
               </a:rPr>
-              <a:t>30</a:t>
+              <a:t>50</a:t>
             </a:r>
             <a:endParaRPr lang="en-US" sz="1400" dirty="0"/>
           </a:p>
@@ -15560,13 +13606,13 @@
       </p:sp>
       <p:sp>
         <p:nvSpPr>
-          <p:cNvPr id="189" name="Text 184"/>
-          <p:cNvSpPr txBox="1"/>
-          <p:nvPr/>
-        </p:nvSpPr>
-        <p:spPr>
-          <a:xfrm>
-            <a:off x="562356" y="9505188"/>
+          <p:cNvPr id="133" name="Text 126"/>
+          <p:cNvSpPr txBox="1"/>
+          <p:nvPr/>
+        </p:nvSpPr>
+        <p:spPr>
+          <a:xfrm>
+            <a:off x="2830068" y="6341364"/>
             <a:ext cx="1901952" cy="201168"/>
           </a:xfrm>
           <a:prstGeom prst="rect">
@@ -15599,13 +13645,13 @@
       </p:sp>
       <p:sp>
         <p:nvSpPr>
-          <p:cNvPr id="190" name="Shape 185"/>
-          <p:cNvSpPr/>
-          <p:nvPr/>
-        </p:nvSpPr>
-        <p:spPr>
-          <a:xfrm>
-            <a:off x="470916" y="9742932"/>
+          <p:cNvPr id="134" name="Shape 127"/>
+          <p:cNvSpPr/>
+          <p:nvPr/>
+        </p:nvSpPr>
+        <p:spPr>
+          <a:xfrm>
+            <a:off x="2738628" y="6579108"/>
             <a:ext cx="2084832" cy="182880"/>
           </a:xfrm>
           <a:prstGeom prst="rect">
@@ -15624,13 +13670,13 @@
       </p:sp>
       <p:sp>
         <p:nvSpPr>
-          <p:cNvPr id="191" name="Text 186"/>
-          <p:cNvSpPr txBox="1"/>
-          <p:nvPr/>
-        </p:nvSpPr>
-        <p:spPr>
-          <a:xfrm>
-            <a:off x="507492" y="9742932"/>
+          <p:cNvPr id="135" name="Text 128"/>
+          <p:cNvSpPr txBox="1"/>
+          <p:nvPr/>
+        </p:nvSpPr>
+        <p:spPr>
+          <a:xfrm>
+            <a:off x="2775204" y="6579108"/>
             <a:ext cx="274320" cy="182880"/>
           </a:xfrm>
           <a:prstGeom prst="rect">
@@ -15663,20 +13709,20 @@
       </p:sp>
       <p:sp>
         <p:nvSpPr>
-          <p:cNvPr id="192" name="Shape 187"/>
-          <p:cNvSpPr/>
-          <p:nvPr/>
-        </p:nvSpPr>
-        <p:spPr>
-          <a:xfrm>
-            <a:off x="781812" y="9765792"/>
+          <p:cNvPr id="136" name="Shape 129"/>
+          <p:cNvSpPr/>
+          <p:nvPr/>
+        </p:nvSpPr>
+        <p:spPr>
+          <a:xfrm>
+            <a:off x="3049524" y="6601968"/>
             <a:ext cx="137160" cy="137160"/>
           </a:xfrm>
           <a:prstGeom prst="ellipse">
             <a:avLst/>
           </a:prstGeom>
           <a:solidFill>
-            <a:srgbClr val="2F8FE0"/>
+            <a:srgbClr val="3FA535"/>
           </a:solidFill>
           <a:ln w="9525">
             <a:solidFill>
@@ -15688,13 +13734,13 @@
       </p:sp>
       <p:sp>
         <p:nvSpPr>
-          <p:cNvPr id="193" name="Text 188"/>
-          <p:cNvSpPr txBox="1"/>
-          <p:nvPr/>
-        </p:nvSpPr>
-        <p:spPr>
-          <a:xfrm>
-            <a:off x="937260" y="9742932"/>
+          <p:cNvPr id="137" name="Text 130"/>
+          <p:cNvSpPr txBox="1"/>
+          <p:nvPr/>
+        </p:nvSpPr>
+        <p:spPr>
+          <a:xfrm>
+            <a:off x="3204972" y="6579108"/>
             <a:ext cx="228600" cy="182880"/>
           </a:xfrm>
           <a:prstGeom prst="rect">
@@ -15727,13 +13773,13 @@
       </p:sp>
       <p:sp>
         <p:nvSpPr>
-          <p:cNvPr id="194" name="Text 189"/>
-          <p:cNvSpPr txBox="1"/>
-          <p:nvPr/>
-        </p:nvSpPr>
-        <p:spPr>
-          <a:xfrm>
-            <a:off x="1184148" y="9742932"/>
+          <p:cNvPr id="138" name="Text 131"/>
+          <p:cNvSpPr txBox="1"/>
+          <p:nvPr/>
+        </p:nvSpPr>
+        <p:spPr>
+          <a:xfrm>
+            <a:off x="3451860" y="6579108"/>
             <a:ext cx="365760" cy="182880"/>
           </a:xfrm>
           <a:prstGeom prst="rect">
@@ -15766,13 +13812,13 @@
       </p:sp>
       <p:sp>
         <p:nvSpPr>
-          <p:cNvPr id="195" name="Text 190"/>
-          <p:cNvSpPr txBox="1"/>
-          <p:nvPr/>
-        </p:nvSpPr>
-        <p:spPr>
-          <a:xfrm>
-            <a:off x="1531620" y="9742932"/>
+          <p:cNvPr id="139" name="Text 132"/>
+          <p:cNvSpPr txBox="1"/>
+          <p:nvPr/>
+        </p:nvSpPr>
+        <p:spPr>
+          <a:xfrm>
+            <a:off x="3799332" y="6579108"/>
             <a:ext cx="274320" cy="182880"/>
           </a:xfrm>
           <a:prstGeom prst="rect">
@@ -15805,13 +13851,13 @@
       </p:sp>
       <p:sp>
         <p:nvSpPr>
-          <p:cNvPr id="196" name="Text 191"/>
-          <p:cNvSpPr txBox="1"/>
-          <p:nvPr/>
-        </p:nvSpPr>
-        <p:spPr>
-          <a:xfrm>
-            <a:off x="1952244" y="9742932"/>
+          <p:cNvPr id="140" name="Text 133"/>
+          <p:cNvSpPr txBox="1"/>
+          <p:nvPr/>
+        </p:nvSpPr>
+        <p:spPr>
+          <a:xfrm>
+            <a:off x="4219956" y="6579108"/>
             <a:ext cx="320040" cy="182880"/>
           </a:xfrm>
           <a:prstGeom prst="rect">
@@ -15844,13 +13890,13 @@
       </p:sp>
       <p:sp>
         <p:nvSpPr>
-          <p:cNvPr id="197" name="Shape 192"/>
-          <p:cNvSpPr/>
-          <p:nvPr/>
-        </p:nvSpPr>
-        <p:spPr>
-          <a:xfrm>
-            <a:off x="2281428" y="9765792"/>
+          <p:cNvPr id="141" name="Shape 134"/>
+          <p:cNvSpPr/>
+          <p:nvPr/>
+        </p:nvSpPr>
+        <p:spPr>
+          <a:xfrm>
+            <a:off x="4549140" y="6601968"/>
             <a:ext cx="137160" cy="137160"/>
           </a:xfrm>
           <a:prstGeom prst="ellipse">
@@ -15869,13 +13915,13 @@
       </p:sp>
       <p:sp>
         <p:nvSpPr>
-          <p:cNvPr id="198" name="Shape 193"/>
-          <p:cNvSpPr/>
-          <p:nvPr/>
-        </p:nvSpPr>
-        <p:spPr>
-          <a:xfrm>
-            <a:off x="2647188" y="6926580"/>
+          <p:cNvPr id="142" name="Shape 135"/>
+          <p:cNvSpPr/>
+          <p:nvPr/>
+        </p:nvSpPr>
+        <p:spPr>
+          <a:xfrm>
+            <a:off x="4914900" y="3762756"/>
             <a:ext cx="2267712" cy="3163824"/>
           </a:xfrm>
           <a:prstGeom prst="rect">
@@ -15894,13 +13940,13 @@
       </p:sp>
       <p:sp>
         <p:nvSpPr>
-          <p:cNvPr id="199" name="Shape 194"/>
-          <p:cNvSpPr/>
-          <p:nvPr/>
-        </p:nvSpPr>
-        <p:spPr>
-          <a:xfrm>
-            <a:off x="2674620" y="6954012"/>
+          <p:cNvPr id="143" name="Shape 136"/>
+          <p:cNvSpPr/>
+          <p:nvPr/>
+        </p:nvSpPr>
+        <p:spPr>
+          <a:xfrm>
+            <a:off x="4942332" y="3790188"/>
             <a:ext cx="2212848" cy="3108960"/>
           </a:xfrm>
           <a:prstGeom prst="roundRect">
@@ -15921,38 +13967,38 @@
       </p:sp>
       <p:sp>
         <p:nvSpPr>
-          <p:cNvPr id="200" name="Shape 195"/>
-          <p:cNvSpPr/>
-          <p:nvPr/>
-        </p:nvSpPr>
-        <p:spPr>
-          <a:xfrm>
-            <a:off x="2738628" y="7018020"/>
+          <p:cNvPr id="144" name="Shape 137"/>
+          <p:cNvSpPr/>
+          <p:nvPr/>
+        </p:nvSpPr>
+        <p:spPr>
+          <a:xfrm>
+            <a:off x="5006340" y="3854196"/>
             <a:ext cx="2084832" cy="2980944"/>
           </a:xfrm>
           <a:prstGeom prst="rect">
             <a:avLst/>
           </a:prstGeom>
           <a:solidFill>
-            <a:srgbClr val="A9D6F5"/>
+            <a:srgbClr val="BFE35A"/>
           </a:solidFill>
           <a:ln w="6350">
             <a:solidFill>
-              <a:srgbClr val="A9D6F5"/>
-            </a:solidFill>
-            <a:prstDash val="solid"/>
-          </a:ln>
-        </p:spPr>
-      </p:sp>
-      <p:sp>
-        <p:nvSpPr>
-          <p:cNvPr id="201" name="Shape 196"/>
-          <p:cNvSpPr/>
-          <p:nvPr/>
-        </p:nvSpPr>
-        <p:spPr>
-          <a:xfrm>
-            <a:off x="2738628" y="7018020"/>
+              <a:srgbClr val="BFE35A"/>
+            </a:solidFill>
+            <a:prstDash val="solid"/>
+          </a:ln>
+        </p:spPr>
+      </p:sp>
+      <p:sp>
+        <p:nvSpPr>
+          <p:cNvPr id="145" name="Shape 138"/>
+          <p:cNvSpPr/>
+          <p:nvPr/>
+        </p:nvSpPr>
+        <p:spPr>
+          <a:xfrm>
+            <a:off x="5006340" y="3854196"/>
             <a:ext cx="384048" cy="155448"/>
           </a:xfrm>
           <a:prstGeom prst="roundRect">
@@ -15973,13 +14019,13 @@
       </p:sp>
       <p:sp>
         <p:nvSpPr>
-          <p:cNvPr id="202" name="Text 197"/>
-          <p:cNvSpPr txBox="1"/>
-          <p:nvPr/>
-        </p:nvSpPr>
-        <p:spPr>
-          <a:xfrm>
-            <a:off x="2738628" y="7018020"/>
+          <p:cNvPr id="146" name="Text 139"/>
+          <p:cNvSpPr txBox="1"/>
+          <p:nvPr/>
+        </p:nvSpPr>
+        <p:spPr>
+          <a:xfrm>
+            <a:off x="5006340" y="3854196"/>
             <a:ext cx="384048" cy="155448"/>
           </a:xfrm>
           <a:prstGeom prst="rect">
@@ -16012,13 +14058,13 @@
       </p:sp>
       <p:sp>
         <p:nvSpPr>
-          <p:cNvPr id="203" name="Text 198"/>
-          <p:cNvSpPr txBox="1"/>
-          <p:nvPr/>
-        </p:nvSpPr>
-        <p:spPr>
-          <a:xfrm>
-            <a:off x="3168396" y="7036308"/>
+          <p:cNvPr id="147" name="Text 140"/>
+          <p:cNvSpPr txBox="1"/>
+          <p:nvPr/>
+        </p:nvSpPr>
+        <p:spPr>
+          <a:xfrm>
+            <a:off x="5436108" y="3872484"/>
             <a:ext cx="914400" cy="274320"/>
           </a:xfrm>
           <a:prstGeom prst="rect">
@@ -16035,29 +14081,29 @@
               <a:buNone/>
             </a:pPr>
             <a:r>
-              <a:rPr lang="en-US" sz="1500" b="1" dirty="0">
-                <a:solidFill>
-                  <a:srgbClr val="222222"/>
-                </a:solidFill>
-                <a:latin typeface="Meiryo" pitchFamily="34" charset="0"/>
-                <a:ea typeface="Meiryo" pitchFamily="34" charset="-122"/>
-                <a:cs typeface="Meiryo" pitchFamily="34" charset="-120"/>
-              </a:rPr>
-              <a:t>ちびカメ</a:t>
-            </a:r>
-            <a:endParaRPr lang="en-US" sz="1500" dirty="0"/>
-          </a:p>
-        </p:txBody>
-      </p:sp>
-      <p:sp>
-        <p:nvSpPr>
-          <p:cNvPr id="204" name="Text 199"/>
-          <p:cNvSpPr txBox="1"/>
-          <p:nvPr/>
-        </p:nvSpPr>
-        <p:spPr>
-          <a:xfrm>
-            <a:off x="4018788" y="7036308"/>
+              <a:rPr lang="en-US" sz="1100" b="1" dirty="0">
+                <a:solidFill>
+                  <a:srgbClr val="222222"/>
+                </a:solidFill>
+                <a:latin typeface="Meiryo" pitchFamily="34" charset="0"/>
+                <a:ea typeface="Meiryo" pitchFamily="34" charset="-122"/>
+                <a:cs typeface="Meiryo" pitchFamily="34" charset="-120"/>
+              </a:rPr>
+              <a:t>きのこぼうず</a:t>
+            </a:r>
+            <a:endParaRPr lang="en-US" sz="1100" dirty="0"/>
+          </a:p>
+        </p:txBody>
+      </p:sp>
+      <p:sp>
+        <p:nvSpPr>
+          <p:cNvPr id="148" name="Text 141"/>
+          <p:cNvSpPr txBox="1"/>
+          <p:nvPr/>
+        </p:nvSpPr>
+        <p:spPr>
+          <a:xfrm>
+            <a:off x="6286500" y="3872484"/>
             <a:ext cx="566928" cy="274320"/>
           </a:xfrm>
           <a:prstGeom prst="rect">
@@ -16082,7 +14128,7 @@
                 <a:ea typeface="Meiryo" pitchFamily="34" charset="-122"/>
                 <a:cs typeface="Meiryo" pitchFamily="34" charset="-120"/>
               </a:rPr>
-              <a:t>HP 40</a:t>
+              <a:t>HP 50</a:t>
             </a:r>
             <a:endParaRPr lang="en-US" sz="1200" dirty="0"/>
           </a:p>
@@ -16090,20 +14136,20 @@
       </p:sp>
       <p:sp>
         <p:nvSpPr>
-          <p:cNvPr id="205" name="Shape 200"/>
-          <p:cNvSpPr/>
-          <p:nvPr/>
-        </p:nvSpPr>
-        <p:spPr>
-          <a:xfrm>
-            <a:off x="4613148" y="7082028"/>
+          <p:cNvPr id="149" name="Shape 142"/>
+          <p:cNvSpPr/>
+          <p:nvPr/>
+        </p:nvSpPr>
+        <p:spPr>
+          <a:xfrm>
+            <a:off x="6880860" y="3918204"/>
             <a:ext cx="173736" cy="173736"/>
           </a:xfrm>
           <a:prstGeom prst="ellipse">
             <a:avLst/>
           </a:prstGeom>
           <a:solidFill>
-            <a:srgbClr val="2F8FE0"/>
+            <a:srgbClr val="3FA535"/>
           </a:solidFill>
           <a:ln w="9525">
             <a:solidFill>
@@ -16115,13 +14161,13 @@
       </p:sp>
       <p:sp>
         <p:nvSpPr>
-          <p:cNvPr id="206" name="Shape 201"/>
-          <p:cNvSpPr/>
-          <p:nvPr/>
-        </p:nvSpPr>
-        <p:spPr>
-          <a:xfrm>
-            <a:off x="2820924" y="7338060"/>
+          <p:cNvPr id="150" name="Shape 143"/>
+          <p:cNvSpPr/>
+          <p:nvPr/>
+        </p:nvSpPr>
+        <p:spPr>
+          <a:xfrm>
+            <a:off x="5088636" y="4174236"/>
             <a:ext cx="1920240" cy="1225296"/>
           </a:xfrm>
           <a:prstGeom prst="rect">
@@ -16138,71 +14184,39 @@
           </a:ln>
         </p:spPr>
       </p:sp>
-      <p:sp>
-        <p:nvSpPr>
-          <p:cNvPr id="207" name="Text 202"/>
-          <p:cNvSpPr txBox="1"/>
-          <p:nvPr/>
-        </p:nvSpPr>
-        <p:spPr>
-          <a:xfrm>
-            <a:off x="2921508" y="7338060"/>
-            <a:ext cx="1719072" cy="1225296"/>
-          </a:xfrm>
-          <a:prstGeom prst="rect">
-            <a:avLst/>
-          </a:prstGeom>
-          <a:noFill/>
-          <a:ln/>
-        </p:spPr>
-        <p:txBody>
-          <a:bodyPr wrap="square" lIns="0" tIns="0" rIns="0" bIns="0" rtlCol="0" anchor="ctr"/>
-          <a:lstStyle/>
-          <a:p>
-            <a:pPr algn="ctr" indent="0" marL="0">
-              <a:buNone/>
-            </a:pPr>
-            <a:r>
-              <a:rPr lang="en-US" sz="950" dirty="0">
-                <a:solidFill>
-                  <a:srgbClr val="AAAAAA"/>
-                </a:solidFill>
-                <a:latin typeface="Meiryo" pitchFamily="34" charset="0"/>
-                <a:ea typeface="Meiryo" pitchFamily="34" charset="-122"/>
-                <a:cs typeface="Meiryo" pitchFamily="34" charset="-120"/>
-              </a:rPr>
-              <a:t>ここに絵をはる</a:t>
-            </a:r>
-            <a:endParaRPr lang="en-US" sz="950" dirty="0"/>
-          </a:p>
-          <a:p>
-            <a:pPr algn="ctr" indent="0" marL="0">
-              <a:buNone/>
-            </a:pPr>
-            <a:r>
-              <a:rPr lang="en-US" sz="950" dirty="0">
-                <a:solidFill>
-                  <a:srgbClr val="AAAAAA"/>
-                </a:solidFill>
-                <a:latin typeface="Meiryo" pitchFamily="34" charset="0"/>
-                <a:ea typeface="Meiryo" pitchFamily="34" charset="-122"/>
-                <a:cs typeface="Meiryo" pitchFamily="34" charset="-120"/>
-              </a:rPr>
-              <a:t>（小さなこうらの子ガメ。池のそば）</a:t>
-            </a:r>
-            <a:endParaRPr lang="en-US" sz="950" dirty="0"/>
-          </a:p>
-        </p:txBody>
-      </p:sp>
-      <p:sp>
-        <p:nvSpPr>
-          <p:cNvPr id="208" name="Text 203"/>
-          <p:cNvSpPr txBox="1"/>
-          <p:nvPr/>
-        </p:nvSpPr>
-        <p:spPr>
-          <a:xfrm>
-            <a:off x="2820924" y="8572500"/>
+      <p:pic>
+        <p:nvPicPr>
+          <p:cNvPr id="151" name="Image 5" descr="e14.jpg">    </p:cNvPr>
+          <p:cNvPicPr>
+            <a:picLocks noChangeAspect="1"/>
+          </p:cNvPicPr>
+          <p:nvPr/>
+        </p:nvPicPr>
+        <p:blipFill>
+          <a:blip r:embed="rId6"/>
+          <a:stretch>
+            <a:fillRect/>
+          </a:stretch>
+        </p:blipFill>
+        <p:spPr>
+          <a:xfrm>
+            <a:off x="5102352" y="4187952"/>
+            <a:ext cx="1892808" cy="1197864"/>
+          </a:xfrm>
+          <a:prstGeom prst="rect">
+            <a:avLst/>
+          </a:prstGeom>
+        </p:spPr>
+      </p:pic>
+      <p:sp>
+        <p:nvSpPr>
+          <p:cNvPr id="152" name="Text 144"/>
+          <p:cNvSpPr txBox="1"/>
+          <p:nvPr/>
+        </p:nvSpPr>
+        <p:spPr>
+          <a:xfrm>
+            <a:off x="5088636" y="5408676"/>
             <a:ext cx="822960" cy="146304"/>
           </a:xfrm>
           <a:prstGeom prst="rect">
@@ -16235,20 +14249,20 @@
       </p:sp>
       <p:sp>
         <p:nvSpPr>
-          <p:cNvPr id="209" name="Shape 204"/>
-          <p:cNvSpPr/>
-          <p:nvPr/>
-        </p:nvSpPr>
-        <p:spPr>
-          <a:xfrm>
-            <a:off x="2830068" y="8810244"/>
+          <p:cNvPr id="153" name="Shape 145"/>
+          <p:cNvSpPr/>
+          <p:nvPr/>
+        </p:nvSpPr>
+        <p:spPr>
+          <a:xfrm>
+            <a:off x="5097780" y="5646420"/>
             <a:ext cx="155448" cy="155448"/>
           </a:xfrm>
           <a:prstGeom prst="ellipse">
             <a:avLst/>
           </a:prstGeom>
           <a:solidFill>
-            <a:srgbClr val="2F8FE0"/>
+            <a:srgbClr val="3FA535"/>
           </a:solidFill>
           <a:ln w="9525">
             <a:solidFill>
@@ -16260,13 +14274,13 @@
       </p:sp>
       <p:sp>
         <p:nvSpPr>
-          <p:cNvPr id="210" name="Text 205"/>
-          <p:cNvSpPr txBox="1"/>
-          <p:nvPr/>
-        </p:nvSpPr>
-        <p:spPr>
-          <a:xfrm>
-            <a:off x="3287268" y="8773668"/>
+          <p:cNvPr id="154" name="Text 146"/>
+          <p:cNvSpPr txBox="1"/>
+          <p:nvPr/>
+        </p:nvSpPr>
+        <p:spPr>
+          <a:xfrm>
+            <a:off x="5554980" y="5609844"/>
             <a:ext cx="1097280" cy="228600"/>
           </a:xfrm>
           <a:prstGeom prst="rect">
@@ -16291,7 +14305,7 @@
                 <a:ea typeface="Meiryo" pitchFamily="34" charset="-122"/>
                 <a:cs typeface="Meiryo" pitchFamily="34" charset="-120"/>
               </a:rPr>
-              <a:t>あわ</a:t>
+              <a:t>ぽふぽふ</a:t>
             </a:r>
             <a:endParaRPr lang="en-US" sz="1200" dirty="0"/>
           </a:p>
@@ -16299,13 +14313,13 @@
       </p:sp>
       <p:sp>
         <p:nvSpPr>
-          <p:cNvPr id="211" name="Text 206"/>
-          <p:cNvSpPr txBox="1"/>
-          <p:nvPr/>
-        </p:nvSpPr>
-        <p:spPr>
-          <a:xfrm>
-            <a:off x="4247388" y="8773668"/>
+          <p:cNvPr id="155" name="Text 147"/>
+          <p:cNvSpPr txBox="1"/>
+          <p:nvPr/>
+        </p:nvSpPr>
+        <p:spPr>
+          <a:xfrm>
+            <a:off x="6515100" y="5609844"/>
             <a:ext cx="502920" cy="228600"/>
           </a:xfrm>
           <a:prstGeom prst="rect">
@@ -16338,13 +14352,13 @@
       </p:sp>
       <p:sp>
         <p:nvSpPr>
-          <p:cNvPr id="212" name="Text 207"/>
-          <p:cNvSpPr txBox="1"/>
-          <p:nvPr/>
-        </p:nvSpPr>
-        <p:spPr>
-          <a:xfrm>
-            <a:off x="2830068" y="9020556"/>
+          <p:cNvPr id="156" name="Text 148"/>
+          <p:cNvSpPr txBox="1"/>
+          <p:nvPr/>
+        </p:nvSpPr>
+        <p:spPr>
+          <a:xfrm>
+            <a:off x="5097780" y="5856732"/>
             <a:ext cx="1901952" cy="201168"/>
           </a:xfrm>
           <a:prstGeom prst="rect">
@@ -16377,20 +14391,20 @@
       </p:sp>
       <p:sp>
         <p:nvSpPr>
-          <p:cNvPr id="213" name="Shape 208"/>
-          <p:cNvSpPr/>
-          <p:nvPr/>
-        </p:nvSpPr>
-        <p:spPr>
-          <a:xfrm>
-            <a:off x="2830068" y="9294876"/>
+          <p:cNvPr id="157" name="Shape 149"/>
+          <p:cNvSpPr/>
+          <p:nvPr/>
+        </p:nvSpPr>
+        <p:spPr>
+          <a:xfrm>
+            <a:off x="5097780" y="6131052"/>
             <a:ext cx="155448" cy="155448"/>
           </a:xfrm>
           <a:prstGeom prst="ellipse">
             <a:avLst/>
           </a:prstGeom>
           <a:solidFill>
-            <a:srgbClr val="2F8FE0"/>
+            <a:srgbClr val="3FA535"/>
           </a:solidFill>
           <a:ln w="9525">
             <a:solidFill>
@@ -16402,20 +14416,20 @@
       </p:sp>
       <p:sp>
         <p:nvSpPr>
-          <p:cNvPr id="214" name="Shape 209"/>
-          <p:cNvSpPr/>
-          <p:nvPr/>
-        </p:nvSpPr>
-        <p:spPr>
-          <a:xfrm>
-            <a:off x="3012948" y="9294876"/>
+          <p:cNvPr id="158" name="Shape 150"/>
+          <p:cNvSpPr/>
+          <p:nvPr/>
+        </p:nvSpPr>
+        <p:spPr>
+          <a:xfrm>
+            <a:off x="5280660" y="6131052"/>
             <a:ext cx="155448" cy="155448"/>
           </a:xfrm>
           <a:prstGeom prst="ellipse">
             <a:avLst/>
           </a:prstGeom>
           <a:solidFill>
-            <a:srgbClr val="2F8FE0"/>
+            <a:srgbClr val="3FA535"/>
           </a:solidFill>
           <a:ln w="9525">
             <a:solidFill>
@@ -16427,13 +14441,13 @@
       </p:sp>
       <p:sp>
         <p:nvSpPr>
-          <p:cNvPr id="215" name="Text 210"/>
-          <p:cNvSpPr txBox="1"/>
-          <p:nvPr/>
-        </p:nvSpPr>
-        <p:spPr>
-          <a:xfrm>
-            <a:off x="3287268" y="9258300"/>
+          <p:cNvPr id="159" name="Text 151"/>
+          <p:cNvSpPr txBox="1"/>
+          <p:nvPr/>
+        </p:nvSpPr>
+        <p:spPr>
+          <a:xfrm>
+            <a:off x="5554980" y="6094476"/>
             <a:ext cx="1097280" cy="228600"/>
           </a:xfrm>
           <a:prstGeom prst="rect">
@@ -16450,29 +14464,29 @@
               <a:buNone/>
             </a:pPr>
             <a:r>
-              <a:rPr lang="en-US" sz="1000" b="1" dirty="0">
-                <a:solidFill>
-                  <a:srgbClr val="222222"/>
-                </a:solidFill>
-                <a:latin typeface="Meiryo" pitchFamily="34" charset="0"/>
-                <a:ea typeface="Meiryo" pitchFamily="34" charset="-122"/>
-                <a:cs typeface="Meiryo" pitchFamily="34" charset="-120"/>
-              </a:rPr>
-              <a:t>ころころタックル</a:t>
-            </a:r>
-            <a:endParaRPr lang="en-US" sz="1000" dirty="0"/>
-          </a:p>
-        </p:txBody>
-      </p:sp>
-      <p:sp>
-        <p:nvSpPr>
-          <p:cNvPr id="216" name="Text 211"/>
-          <p:cNvSpPr txBox="1"/>
-          <p:nvPr/>
-        </p:nvSpPr>
-        <p:spPr>
-          <a:xfrm>
-            <a:off x="4247388" y="9258300"/>
+              <a:rPr lang="en-US" sz="1200" b="1" dirty="0">
+                <a:solidFill>
+                  <a:srgbClr val="222222"/>
+                </a:solidFill>
+                <a:latin typeface="Meiryo" pitchFamily="34" charset="0"/>
+                <a:ea typeface="Meiryo" pitchFamily="34" charset="-122"/>
+                <a:cs typeface="Meiryo" pitchFamily="34" charset="-120"/>
+              </a:rPr>
+              <a:t>ほうしこうげき</a:t>
+            </a:r>
+            <a:endParaRPr lang="en-US" sz="1200" dirty="0"/>
+          </a:p>
+        </p:txBody>
+      </p:sp>
+      <p:sp>
+        <p:nvSpPr>
+          <p:cNvPr id="160" name="Text 152"/>
+          <p:cNvSpPr txBox="1"/>
+          <p:nvPr/>
+        </p:nvSpPr>
+        <p:spPr>
+          <a:xfrm>
+            <a:off x="6515100" y="6094476"/>
             <a:ext cx="502920" cy="228600"/>
           </a:xfrm>
           <a:prstGeom prst="rect">
@@ -16497,7 +14511,7 @@
                 <a:ea typeface="Meiryo" pitchFamily="34" charset="-122"/>
                 <a:cs typeface="Meiryo" pitchFamily="34" charset="-120"/>
               </a:rPr>
-              <a:t>40</a:t>
+              <a:t>30</a:t>
             </a:r>
             <a:endParaRPr lang="en-US" sz="1400" dirty="0"/>
           </a:p>
@@ -16505,13 +14519,13 @@
       </p:sp>
       <p:sp>
         <p:nvSpPr>
-          <p:cNvPr id="217" name="Text 212"/>
-          <p:cNvSpPr txBox="1"/>
-          <p:nvPr/>
-        </p:nvSpPr>
-        <p:spPr>
-          <a:xfrm>
-            <a:off x="2830068" y="9505188"/>
+          <p:cNvPr id="161" name="Text 153"/>
+          <p:cNvSpPr txBox="1"/>
+          <p:nvPr/>
+        </p:nvSpPr>
+        <p:spPr>
+          <a:xfrm>
+            <a:off x="5097780" y="6341364"/>
             <a:ext cx="1901952" cy="201168"/>
           </a:xfrm>
           <a:prstGeom prst="rect">
@@ -16544,13 +14558,13 @@
       </p:sp>
       <p:sp>
         <p:nvSpPr>
-          <p:cNvPr id="218" name="Shape 213"/>
-          <p:cNvSpPr/>
-          <p:nvPr/>
-        </p:nvSpPr>
-        <p:spPr>
-          <a:xfrm>
-            <a:off x="2738628" y="9742932"/>
+          <p:cNvPr id="162" name="Shape 154"/>
+          <p:cNvSpPr/>
+          <p:nvPr/>
+        </p:nvSpPr>
+        <p:spPr>
+          <a:xfrm>
+            <a:off x="5006340" y="6579108"/>
             <a:ext cx="2084832" cy="182880"/>
           </a:xfrm>
           <a:prstGeom prst="rect">
@@ -16569,13 +14583,13 @@
       </p:sp>
       <p:sp>
         <p:nvSpPr>
-          <p:cNvPr id="219" name="Text 214"/>
-          <p:cNvSpPr txBox="1"/>
-          <p:nvPr/>
-        </p:nvSpPr>
-        <p:spPr>
-          <a:xfrm>
-            <a:off x="2775204" y="9742932"/>
+          <p:cNvPr id="163" name="Text 155"/>
+          <p:cNvSpPr txBox="1"/>
+          <p:nvPr/>
+        </p:nvSpPr>
+        <p:spPr>
+          <a:xfrm>
+            <a:off x="5042916" y="6579108"/>
             <a:ext cx="274320" cy="182880"/>
           </a:xfrm>
           <a:prstGeom prst="rect">
@@ -16608,20 +14622,20 @@
       </p:sp>
       <p:sp>
         <p:nvSpPr>
-          <p:cNvPr id="220" name="Shape 215"/>
-          <p:cNvSpPr/>
-          <p:nvPr/>
-        </p:nvSpPr>
-        <p:spPr>
-          <a:xfrm>
-            <a:off x="3049524" y="9765792"/>
+          <p:cNvPr id="164" name="Shape 156"/>
+          <p:cNvSpPr/>
+          <p:nvPr/>
+        </p:nvSpPr>
+        <p:spPr>
+          <a:xfrm>
+            <a:off x="5317236" y="6601968"/>
             <a:ext cx="137160" cy="137160"/>
           </a:xfrm>
           <a:prstGeom prst="ellipse">
             <a:avLst/>
           </a:prstGeom>
           <a:solidFill>
-            <a:srgbClr val="3FA535"/>
+            <a:srgbClr val="E8452E"/>
           </a:solidFill>
           <a:ln w="9525">
             <a:solidFill>
@@ -16633,13 +14647,13 @@
       </p:sp>
       <p:sp>
         <p:nvSpPr>
-          <p:cNvPr id="221" name="Text 216"/>
-          <p:cNvSpPr txBox="1"/>
-          <p:nvPr/>
-        </p:nvSpPr>
-        <p:spPr>
-          <a:xfrm>
-            <a:off x="3204972" y="9742932"/>
+          <p:cNvPr id="165" name="Text 157"/>
+          <p:cNvSpPr txBox="1"/>
+          <p:nvPr/>
+        </p:nvSpPr>
+        <p:spPr>
+          <a:xfrm>
+            <a:off x="5472684" y="6579108"/>
             <a:ext cx="228600" cy="182880"/>
           </a:xfrm>
           <a:prstGeom prst="rect">
@@ -16672,13 +14686,13 @@
       </p:sp>
       <p:sp>
         <p:nvSpPr>
-          <p:cNvPr id="222" name="Text 217"/>
-          <p:cNvSpPr txBox="1"/>
-          <p:nvPr/>
-        </p:nvSpPr>
-        <p:spPr>
-          <a:xfrm>
-            <a:off x="3451860" y="9742932"/>
+          <p:cNvPr id="166" name="Text 158"/>
+          <p:cNvSpPr txBox="1"/>
+          <p:nvPr/>
+        </p:nvSpPr>
+        <p:spPr>
+          <a:xfrm>
+            <a:off x="5719572" y="6579108"/>
             <a:ext cx="365760" cy="182880"/>
           </a:xfrm>
           <a:prstGeom prst="rect">
@@ -16711,13 +14725,13 @@
       </p:sp>
       <p:sp>
         <p:nvSpPr>
-          <p:cNvPr id="223" name="Text 218"/>
-          <p:cNvSpPr txBox="1"/>
-          <p:nvPr/>
-        </p:nvSpPr>
-        <p:spPr>
-          <a:xfrm>
-            <a:off x="3799332" y="9742932"/>
+          <p:cNvPr id="167" name="Text 159"/>
+          <p:cNvSpPr txBox="1"/>
+          <p:nvPr/>
+        </p:nvSpPr>
+        <p:spPr>
+          <a:xfrm>
+            <a:off x="6067044" y="6579108"/>
             <a:ext cx="274320" cy="182880"/>
           </a:xfrm>
           <a:prstGeom prst="rect">
@@ -16750,13 +14764,13 @@
       </p:sp>
       <p:sp>
         <p:nvSpPr>
-          <p:cNvPr id="224" name="Text 219"/>
-          <p:cNvSpPr txBox="1"/>
-          <p:nvPr/>
-        </p:nvSpPr>
-        <p:spPr>
-          <a:xfrm>
-            <a:off x="4219956" y="9742932"/>
+          <p:cNvPr id="168" name="Text 160"/>
+          <p:cNvSpPr txBox="1"/>
+          <p:nvPr/>
+        </p:nvSpPr>
+        <p:spPr>
+          <a:xfrm>
+            <a:off x="6487668" y="6579108"/>
             <a:ext cx="320040" cy="182880"/>
           </a:xfrm>
           <a:prstGeom prst="rect">
@@ -16789,13 +14803,13 @@
       </p:sp>
       <p:sp>
         <p:nvSpPr>
-          <p:cNvPr id="225" name="Shape 220"/>
-          <p:cNvSpPr/>
-          <p:nvPr/>
-        </p:nvSpPr>
-        <p:spPr>
-          <a:xfrm>
-            <a:off x="4549140" y="9765792"/>
+          <p:cNvPr id="169" name="Shape 161"/>
+          <p:cNvSpPr/>
+          <p:nvPr/>
+        </p:nvSpPr>
+        <p:spPr>
+          <a:xfrm>
+            <a:off x="6816852" y="6601968"/>
             <a:ext cx="137160" cy="137160"/>
           </a:xfrm>
           <a:prstGeom prst="ellipse">
@@ -16814,13 +14828,13 @@
       </p:sp>
       <p:sp>
         <p:nvSpPr>
-          <p:cNvPr id="226" name="Shape 221"/>
-          <p:cNvSpPr/>
-          <p:nvPr/>
-        </p:nvSpPr>
-        <p:spPr>
-          <a:xfrm>
-            <a:off x="4914900" y="6926580"/>
+          <p:cNvPr id="170" name="Shape 162"/>
+          <p:cNvSpPr/>
+          <p:nvPr/>
+        </p:nvSpPr>
+        <p:spPr>
+          <a:xfrm>
+            <a:off x="379476" y="6926580"/>
             <a:ext cx="2267712" cy="3163824"/>
           </a:xfrm>
           <a:prstGeom prst="rect">
@@ -16839,13 +14853,13 @@
       </p:sp>
       <p:sp>
         <p:nvSpPr>
-          <p:cNvPr id="227" name="Shape 222"/>
-          <p:cNvSpPr/>
-          <p:nvPr/>
-        </p:nvSpPr>
-        <p:spPr>
-          <a:xfrm>
-            <a:off x="4942332" y="6954012"/>
+          <p:cNvPr id="171" name="Shape 163"/>
+          <p:cNvSpPr/>
+          <p:nvPr/>
+        </p:nvSpPr>
+        <p:spPr>
+          <a:xfrm>
+            <a:off x="406908" y="6954012"/>
             <a:ext cx="2212848" cy="3108960"/>
           </a:xfrm>
           <a:prstGeom prst="roundRect">
@@ -16866,38 +14880,38 @@
       </p:sp>
       <p:sp>
         <p:nvSpPr>
-          <p:cNvPr id="228" name="Shape 223"/>
-          <p:cNvSpPr/>
-          <p:nvPr/>
-        </p:nvSpPr>
-        <p:spPr>
-          <a:xfrm>
-            <a:off x="5006340" y="7018020"/>
+          <p:cNvPr id="172" name="Shape 164"/>
+          <p:cNvSpPr/>
+          <p:nvPr/>
+        </p:nvSpPr>
+        <p:spPr>
+          <a:xfrm>
+            <a:off x="470916" y="7018020"/>
             <a:ext cx="2084832" cy="2980944"/>
           </a:xfrm>
           <a:prstGeom prst="rect">
             <a:avLst/>
           </a:prstGeom>
           <a:solidFill>
-            <a:srgbClr val="BFE35A"/>
+            <a:srgbClr val="F6B58A"/>
           </a:solidFill>
           <a:ln w="6350">
             <a:solidFill>
-              <a:srgbClr val="BFE35A"/>
-            </a:solidFill>
-            <a:prstDash val="solid"/>
-          </a:ln>
-        </p:spPr>
-      </p:sp>
-      <p:sp>
-        <p:nvSpPr>
-          <p:cNvPr id="229" name="Shape 224"/>
-          <p:cNvSpPr/>
-          <p:nvPr/>
-        </p:nvSpPr>
-        <p:spPr>
-          <a:xfrm>
-            <a:off x="5006340" y="7018020"/>
+              <a:srgbClr val="F6B58A"/>
+            </a:solidFill>
+            <a:prstDash val="solid"/>
+          </a:ln>
+        </p:spPr>
+      </p:sp>
+      <p:sp>
+        <p:nvSpPr>
+          <p:cNvPr id="173" name="Shape 165"/>
+          <p:cNvSpPr/>
+          <p:nvPr/>
+        </p:nvSpPr>
+        <p:spPr>
+          <a:xfrm>
+            <a:off x="470916" y="7018020"/>
             <a:ext cx="384048" cy="155448"/>
           </a:xfrm>
           <a:prstGeom prst="roundRect">
@@ -16918,8 +14932,1807 @@
       </p:sp>
       <p:sp>
         <p:nvSpPr>
-          <p:cNvPr id="230" name="Text 225"/>
-          <p:cNvSpPr txBox="1"/>
+          <p:cNvPr id="174" name="Text 166"/>
+          <p:cNvSpPr txBox="1"/>
+          <p:nvPr/>
+        </p:nvSpPr>
+        <p:spPr>
+          <a:xfrm>
+            <a:off x="470916" y="7018020"/>
+            <a:ext cx="384048" cy="155448"/>
+          </a:xfrm>
+          <a:prstGeom prst="rect">
+            <a:avLst/>
+          </a:prstGeom>
+          <a:noFill/>
+          <a:ln/>
+        </p:spPr>
+        <p:txBody>
+          <a:bodyPr wrap="square" lIns="0" tIns="0" rIns="0" bIns="0" rtlCol="0" anchor="ctr"/>
+          <a:lstStyle/>
+          <a:p>
+            <a:pPr algn="ctr" indent="0" marL="0">
+              <a:buNone/>
+            </a:pPr>
+            <a:r>
+              <a:rPr lang="en-US" sz="800" b="1" i="1" dirty="0">
+                <a:solidFill>
+                  <a:srgbClr val="222222"/>
+                </a:solidFill>
+                <a:latin typeface="Meiryo" pitchFamily="34" charset="0"/>
+                <a:ea typeface="Meiryo" pitchFamily="34" charset="-122"/>
+                <a:cs typeface="Meiryo" pitchFamily="34" charset="-120"/>
+              </a:rPr>
+              <a:t>たね</a:t>
+            </a:r>
+            <a:endParaRPr lang="en-US" sz="800" dirty="0"/>
+          </a:p>
+        </p:txBody>
+      </p:sp>
+      <p:sp>
+        <p:nvSpPr>
+          <p:cNvPr id="175" name="Text 167"/>
+          <p:cNvSpPr txBox="1"/>
+          <p:nvPr/>
+        </p:nvSpPr>
+        <p:spPr>
+          <a:xfrm>
+            <a:off x="900684" y="7036308"/>
+            <a:ext cx="914400" cy="274320"/>
+          </a:xfrm>
+          <a:prstGeom prst="rect">
+            <a:avLst/>
+          </a:prstGeom>
+          <a:noFill/>
+          <a:ln/>
+        </p:spPr>
+        <p:txBody>
+          <a:bodyPr wrap="none" lIns="0" tIns="0" rIns="0" bIns="0" rtlCol="0" anchor="ctr"/>
+          <a:lstStyle/>
+          <a:p>
+            <a:pPr indent="0" marL="0">
+              <a:buNone/>
+            </a:pPr>
+            <a:r>
+              <a:rPr lang="en-US" sz="1300" b="1" dirty="0">
+                <a:solidFill>
+                  <a:srgbClr val="222222"/>
+                </a:solidFill>
+                <a:latin typeface="Meiryo" pitchFamily="34" charset="0"/>
+                <a:ea typeface="Meiryo" pitchFamily="34" charset="-122"/>
+                <a:cs typeface="Meiryo" pitchFamily="34" charset="-120"/>
+              </a:rPr>
+              <a:t>ちびキツネ</a:t>
+            </a:r>
+            <a:endParaRPr lang="en-US" sz="1300" dirty="0"/>
+          </a:p>
+        </p:txBody>
+      </p:sp>
+      <p:sp>
+        <p:nvSpPr>
+          <p:cNvPr id="176" name="Text 168"/>
+          <p:cNvSpPr txBox="1"/>
+          <p:nvPr/>
+        </p:nvSpPr>
+        <p:spPr>
+          <a:xfrm>
+            <a:off x="1751076" y="7036308"/>
+            <a:ext cx="566928" cy="274320"/>
+          </a:xfrm>
+          <a:prstGeom prst="rect">
+            <a:avLst/>
+          </a:prstGeom>
+          <a:noFill/>
+          <a:ln/>
+        </p:spPr>
+        <p:txBody>
+          <a:bodyPr wrap="square" lIns="0" tIns="0" rIns="0" bIns="0" rtlCol="0" anchor="ctr"/>
+          <a:lstStyle/>
+          <a:p>
+            <a:pPr algn="r" indent="0" marL="0">
+              <a:buNone/>
+            </a:pPr>
+            <a:r>
+              <a:rPr lang="en-US" sz="1200" b="1" dirty="0">
+                <a:solidFill>
+                  <a:srgbClr val="222222"/>
+                </a:solidFill>
+                <a:latin typeface="Meiryo" pitchFamily="34" charset="0"/>
+                <a:ea typeface="Meiryo" pitchFamily="34" charset="-122"/>
+                <a:cs typeface="Meiryo" pitchFamily="34" charset="-120"/>
+              </a:rPr>
+              <a:t>HP 50</a:t>
+            </a:r>
+            <a:endParaRPr lang="en-US" sz="1200" dirty="0"/>
+          </a:p>
+        </p:txBody>
+      </p:sp>
+      <p:sp>
+        <p:nvSpPr>
+          <p:cNvPr id="177" name="Shape 169"/>
+          <p:cNvSpPr/>
+          <p:nvPr/>
+        </p:nvSpPr>
+        <p:spPr>
+          <a:xfrm>
+            <a:off x="2345436" y="7082028"/>
+            <a:ext cx="173736" cy="173736"/>
+          </a:xfrm>
+          <a:prstGeom prst="ellipse">
+            <a:avLst/>
+          </a:prstGeom>
+          <a:solidFill>
+            <a:srgbClr val="E8452E"/>
+          </a:solidFill>
+          <a:ln w="9525">
+            <a:solidFill>
+              <a:srgbClr val="555555"/>
+            </a:solidFill>
+            <a:prstDash val="solid"/>
+          </a:ln>
+        </p:spPr>
+      </p:sp>
+      <p:sp>
+        <p:nvSpPr>
+          <p:cNvPr id="178" name="Shape 170"/>
+          <p:cNvSpPr/>
+          <p:nvPr/>
+        </p:nvSpPr>
+        <p:spPr>
+          <a:xfrm>
+            <a:off x="553212" y="7338060"/>
+            <a:ext cx="1920240" cy="1225296"/>
+          </a:xfrm>
+          <a:prstGeom prst="rect">
+            <a:avLst/>
+          </a:prstGeom>
+          <a:solidFill>
+            <a:srgbClr val="FFFFFF"/>
+          </a:solidFill>
+          <a:ln w="31750">
+            <a:solidFill>
+              <a:srgbClr val="C9CCD0"/>
+            </a:solidFill>
+            <a:prstDash val="solid"/>
+          </a:ln>
+        </p:spPr>
+      </p:sp>
+      <p:pic>
+        <p:nvPicPr>
+          <p:cNvPr id="179" name="Image 6" descr="e12.jpg">    </p:cNvPr>
+          <p:cNvPicPr>
+            <a:picLocks noChangeAspect="1"/>
+          </p:cNvPicPr>
+          <p:nvPr/>
+        </p:nvPicPr>
+        <p:blipFill>
+          <a:blip r:embed="rId7"/>
+          <a:stretch>
+            <a:fillRect/>
+          </a:stretch>
+        </p:blipFill>
+        <p:spPr>
+          <a:xfrm>
+            <a:off x="566928" y="7351776"/>
+            <a:ext cx="1892808" cy="1197864"/>
+          </a:xfrm>
+          <a:prstGeom prst="rect">
+            <a:avLst/>
+          </a:prstGeom>
+        </p:spPr>
+      </p:pic>
+      <p:sp>
+        <p:nvSpPr>
+          <p:cNvPr id="180" name="Text 171"/>
+          <p:cNvSpPr txBox="1"/>
+          <p:nvPr/>
+        </p:nvSpPr>
+        <p:spPr>
+          <a:xfrm>
+            <a:off x="553212" y="8572500"/>
+            <a:ext cx="822960" cy="146304"/>
+          </a:xfrm>
+          <a:prstGeom prst="rect">
+            <a:avLst/>
+          </a:prstGeom>
+          <a:noFill/>
+          <a:ln/>
+        </p:spPr>
+        <p:txBody>
+          <a:bodyPr wrap="square" lIns="0" tIns="0" rIns="0" bIns="0" rtlCol="0" anchor="ctr"/>
+          <a:lstStyle/>
+          <a:p>
+            <a:pPr indent="0" marL="0">
+              <a:buNone/>
+            </a:pPr>
+            <a:r>
+              <a:rPr lang="en-US" sz="800" b="1" dirty="0">
+                <a:solidFill>
+                  <a:srgbClr val="444444"/>
+                </a:solidFill>
+                <a:latin typeface="Meiryo" pitchFamily="34" charset="0"/>
+                <a:ea typeface="Meiryo" pitchFamily="34" charset="-122"/>
+                <a:cs typeface="Meiryo" pitchFamily="34" charset="-120"/>
+              </a:rPr>
+              <a:t>ランク C</a:t>
+            </a:r>
+            <a:endParaRPr lang="en-US" sz="800" dirty="0"/>
+          </a:p>
+        </p:txBody>
+      </p:sp>
+      <p:sp>
+        <p:nvSpPr>
+          <p:cNvPr id="181" name="Shape 172"/>
+          <p:cNvSpPr/>
+          <p:nvPr/>
+        </p:nvSpPr>
+        <p:spPr>
+          <a:xfrm>
+            <a:off x="562356" y="8810244"/>
+            <a:ext cx="155448" cy="155448"/>
+          </a:xfrm>
+          <a:prstGeom prst="ellipse">
+            <a:avLst/>
+          </a:prstGeom>
+          <a:solidFill>
+            <a:srgbClr val="E8452E"/>
+          </a:solidFill>
+          <a:ln w="9525">
+            <a:solidFill>
+              <a:srgbClr val="555555"/>
+            </a:solidFill>
+            <a:prstDash val="solid"/>
+          </a:ln>
+        </p:spPr>
+      </p:sp>
+      <p:sp>
+        <p:nvSpPr>
+          <p:cNvPr id="182" name="Text 173"/>
+          <p:cNvSpPr txBox="1"/>
+          <p:nvPr/>
+        </p:nvSpPr>
+        <p:spPr>
+          <a:xfrm>
+            <a:off x="1019556" y="8773668"/>
+            <a:ext cx="1097280" cy="228600"/>
+          </a:xfrm>
+          <a:prstGeom prst="rect">
+            <a:avLst/>
+          </a:prstGeom>
+          <a:noFill/>
+          <a:ln/>
+        </p:spPr>
+        <p:txBody>
+          <a:bodyPr wrap="none" lIns="0" tIns="0" rIns="0" bIns="0" rtlCol="0" anchor="ctr"/>
+          <a:lstStyle/>
+          <a:p>
+            <a:pPr indent="0" marL="0">
+              <a:buNone/>
+            </a:pPr>
+            <a:r>
+              <a:rPr lang="en-US" sz="1200" b="1" dirty="0">
+                <a:solidFill>
+                  <a:srgbClr val="222222"/>
+                </a:solidFill>
+                <a:latin typeface="Meiryo" pitchFamily="34" charset="0"/>
+                <a:ea typeface="Meiryo" pitchFamily="34" charset="-122"/>
+                <a:cs typeface="Meiryo" pitchFamily="34" charset="-120"/>
+              </a:rPr>
+              <a:t>ぽっぽひ</a:t>
+            </a:r>
+            <a:endParaRPr lang="en-US" sz="1200" dirty="0"/>
+          </a:p>
+        </p:txBody>
+      </p:sp>
+      <p:sp>
+        <p:nvSpPr>
+          <p:cNvPr id="183" name="Text 174"/>
+          <p:cNvSpPr txBox="1"/>
+          <p:nvPr/>
+        </p:nvSpPr>
+        <p:spPr>
+          <a:xfrm>
+            <a:off x="1979676" y="8773668"/>
+            <a:ext cx="502920" cy="228600"/>
+          </a:xfrm>
+          <a:prstGeom prst="rect">
+            <a:avLst/>
+          </a:prstGeom>
+          <a:noFill/>
+          <a:ln/>
+        </p:spPr>
+        <p:txBody>
+          <a:bodyPr wrap="square" lIns="0" tIns="0" rIns="0" bIns="0" rtlCol="0" anchor="ctr"/>
+          <a:lstStyle/>
+          <a:p>
+            <a:pPr algn="r" indent="0" marL="0">
+              <a:buNone/>
+            </a:pPr>
+            <a:r>
+              <a:rPr lang="en-US" sz="1400" b="1" dirty="0">
+                <a:solidFill>
+                  <a:srgbClr val="222222"/>
+                </a:solidFill>
+                <a:latin typeface="Meiryo" pitchFamily="34" charset="0"/>
+                <a:ea typeface="Meiryo" pitchFamily="34" charset="-122"/>
+                <a:cs typeface="Meiryo" pitchFamily="34" charset="-120"/>
+              </a:rPr>
+              <a:t>10</a:t>
+            </a:r>
+            <a:endParaRPr lang="en-US" sz="1400" dirty="0"/>
+          </a:p>
+        </p:txBody>
+      </p:sp>
+      <p:sp>
+        <p:nvSpPr>
+          <p:cNvPr id="184" name="Text 175"/>
+          <p:cNvSpPr txBox="1"/>
+          <p:nvPr/>
+        </p:nvSpPr>
+        <p:spPr>
+          <a:xfrm>
+            <a:off x="562356" y="9020556"/>
+            <a:ext cx="1901952" cy="201168"/>
+          </a:xfrm>
+          <a:prstGeom prst="rect">
+            <a:avLst/>
+          </a:prstGeom>
+          <a:noFill/>
+          <a:ln/>
+        </p:spPr>
+        <p:txBody>
+          <a:bodyPr wrap="square" lIns="0" tIns="0" rIns="0" bIns="0" rtlCol="0" anchor="t"/>
+          <a:lstStyle/>
+          <a:p>
+            <a:pPr indent="0" marL="0">
+              <a:buNone/>
+            </a:pPr>
+            <a:r>
+              <a:rPr lang="en-US" sz="850" dirty="0">
+                <a:solidFill>
+                  <a:srgbClr val="444444"/>
+                </a:solidFill>
+                <a:latin typeface="Meiryo" pitchFamily="34" charset="0"/>
+                <a:ea typeface="Meiryo" pitchFamily="34" charset="-122"/>
+                <a:cs typeface="Meiryo" pitchFamily="34" charset="-120"/>
+              </a:rPr>
+              <a:t>せつめいをかく</a:t>
+            </a:r>
+            <a:endParaRPr lang="en-US" sz="850" dirty="0"/>
+          </a:p>
+        </p:txBody>
+      </p:sp>
+      <p:sp>
+        <p:nvSpPr>
+          <p:cNvPr id="185" name="Shape 176"/>
+          <p:cNvSpPr/>
+          <p:nvPr/>
+        </p:nvSpPr>
+        <p:spPr>
+          <a:xfrm>
+            <a:off x="562356" y="9294876"/>
+            <a:ext cx="155448" cy="155448"/>
+          </a:xfrm>
+          <a:prstGeom prst="ellipse">
+            <a:avLst/>
+          </a:prstGeom>
+          <a:solidFill>
+            <a:srgbClr val="E8452E"/>
+          </a:solidFill>
+          <a:ln w="9525">
+            <a:solidFill>
+              <a:srgbClr val="555555"/>
+            </a:solidFill>
+            <a:prstDash val="solid"/>
+          </a:ln>
+        </p:spPr>
+      </p:sp>
+      <p:sp>
+        <p:nvSpPr>
+          <p:cNvPr id="186" name="Shape 177"/>
+          <p:cNvSpPr/>
+          <p:nvPr/>
+        </p:nvSpPr>
+        <p:spPr>
+          <a:xfrm>
+            <a:off x="745236" y="9294876"/>
+            <a:ext cx="155448" cy="155448"/>
+          </a:xfrm>
+          <a:prstGeom prst="ellipse">
+            <a:avLst/>
+          </a:prstGeom>
+          <a:solidFill>
+            <a:srgbClr val="E8452E"/>
+          </a:solidFill>
+          <a:ln w="9525">
+            <a:solidFill>
+              <a:srgbClr val="555555"/>
+            </a:solidFill>
+            <a:prstDash val="solid"/>
+          </a:ln>
+        </p:spPr>
+      </p:sp>
+      <p:sp>
+        <p:nvSpPr>
+          <p:cNvPr id="187" name="Text 178"/>
+          <p:cNvSpPr txBox="1"/>
+          <p:nvPr/>
+        </p:nvSpPr>
+        <p:spPr>
+          <a:xfrm>
+            <a:off x="1019556" y="9258300"/>
+            <a:ext cx="1097280" cy="228600"/>
+          </a:xfrm>
+          <a:prstGeom prst="rect">
+            <a:avLst/>
+          </a:prstGeom>
+          <a:noFill/>
+          <a:ln/>
+        </p:spPr>
+        <p:txBody>
+          <a:bodyPr wrap="none" lIns="0" tIns="0" rIns="0" bIns="0" rtlCol="0" anchor="ctr"/>
+          <a:lstStyle/>
+          <a:p>
+            <a:pPr indent="0" marL="0">
+              <a:buNone/>
+            </a:pPr>
+            <a:r>
+              <a:rPr lang="en-US" sz="1200" b="1" dirty="0">
+                <a:solidFill>
+                  <a:srgbClr val="222222"/>
+                </a:solidFill>
+                <a:latin typeface="Meiryo" pitchFamily="34" charset="0"/>
+                <a:ea typeface="Meiryo" pitchFamily="34" charset="-122"/>
+                <a:cs typeface="Meiryo" pitchFamily="34" charset="-120"/>
+              </a:rPr>
+              <a:t>ほのおダッシュ</a:t>
+            </a:r>
+            <a:endParaRPr lang="en-US" sz="1200" dirty="0"/>
+          </a:p>
+        </p:txBody>
+      </p:sp>
+      <p:sp>
+        <p:nvSpPr>
+          <p:cNvPr id="188" name="Text 179"/>
+          <p:cNvSpPr txBox="1"/>
+          <p:nvPr/>
+        </p:nvSpPr>
+        <p:spPr>
+          <a:xfrm>
+            <a:off x="1979676" y="9258300"/>
+            <a:ext cx="502920" cy="228600"/>
+          </a:xfrm>
+          <a:prstGeom prst="rect">
+            <a:avLst/>
+          </a:prstGeom>
+          <a:noFill/>
+          <a:ln/>
+        </p:spPr>
+        <p:txBody>
+          <a:bodyPr wrap="square" lIns="0" tIns="0" rIns="0" bIns="0" rtlCol="0" anchor="ctr"/>
+          <a:lstStyle/>
+          <a:p>
+            <a:pPr algn="r" indent="0" marL="0">
+              <a:buNone/>
+            </a:pPr>
+            <a:r>
+              <a:rPr lang="en-US" sz="1400" b="1" dirty="0">
+                <a:solidFill>
+                  <a:srgbClr val="222222"/>
+                </a:solidFill>
+                <a:latin typeface="Meiryo" pitchFamily="34" charset="0"/>
+                <a:ea typeface="Meiryo" pitchFamily="34" charset="-122"/>
+                <a:cs typeface="Meiryo" pitchFamily="34" charset="-120"/>
+              </a:rPr>
+              <a:t>30</a:t>
+            </a:r>
+            <a:endParaRPr lang="en-US" sz="1400" dirty="0"/>
+          </a:p>
+        </p:txBody>
+      </p:sp>
+      <p:sp>
+        <p:nvSpPr>
+          <p:cNvPr id="189" name="Text 180"/>
+          <p:cNvSpPr txBox="1"/>
+          <p:nvPr/>
+        </p:nvSpPr>
+        <p:spPr>
+          <a:xfrm>
+            <a:off x="562356" y="9505188"/>
+            <a:ext cx="1901952" cy="201168"/>
+          </a:xfrm>
+          <a:prstGeom prst="rect">
+            <a:avLst/>
+          </a:prstGeom>
+          <a:noFill/>
+          <a:ln/>
+        </p:spPr>
+        <p:txBody>
+          <a:bodyPr wrap="square" lIns="0" tIns="0" rIns="0" bIns="0" rtlCol="0" anchor="t"/>
+          <a:lstStyle/>
+          <a:p>
+            <a:pPr indent="0" marL="0">
+              <a:buNone/>
+            </a:pPr>
+            <a:r>
+              <a:rPr lang="en-US" sz="850" dirty="0">
+                <a:solidFill>
+                  <a:srgbClr val="444444"/>
+                </a:solidFill>
+                <a:latin typeface="Meiryo" pitchFamily="34" charset="0"/>
+                <a:ea typeface="Meiryo" pitchFamily="34" charset="-122"/>
+                <a:cs typeface="Meiryo" pitchFamily="34" charset="-120"/>
+              </a:rPr>
+              <a:t>せつめいをかく</a:t>
+            </a:r>
+            <a:endParaRPr lang="en-US" sz="850" dirty="0"/>
+          </a:p>
+        </p:txBody>
+      </p:sp>
+      <p:sp>
+        <p:nvSpPr>
+          <p:cNvPr id="190" name="Shape 181"/>
+          <p:cNvSpPr/>
+          <p:nvPr/>
+        </p:nvSpPr>
+        <p:spPr>
+          <a:xfrm>
+            <a:off x="470916" y="9742932"/>
+            <a:ext cx="2084832" cy="182880"/>
+          </a:xfrm>
+          <a:prstGeom prst="rect">
+            <a:avLst/>
+          </a:prstGeom>
+          <a:solidFill>
+            <a:srgbClr val="DADDE0"/>
+          </a:solidFill>
+          <a:ln w="6350">
+            <a:solidFill>
+              <a:srgbClr val="DADDE0"/>
+            </a:solidFill>
+            <a:prstDash val="solid"/>
+          </a:ln>
+        </p:spPr>
+      </p:sp>
+      <p:sp>
+        <p:nvSpPr>
+          <p:cNvPr id="191" name="Text 182"/>
+          <p:cNvSpPr txBox="1"/>
+          <p:nvPr/>
+        </p:nvSpPr>
+        <p:spPr>
+          <a:xfrm>
+            <a:off x="507492" y="9742932"/>
+            <a:ext cx="274320" cy="182880"/>
+          </a:xfrm>
+          <a:prstGeom prst="rect">
+            <a:avLst/>
+          </a:prstGeom>
+          <a:noFill/>
+          <a:ln/>
+        </p:spPr>
+        <p:txBody>
+          <a:bodyPr wrap="square" lIns="0" tIns="0" rIns="0" bIns="0" rtlCol="0" anchor="ctr"/>
+          <a:lstStyle/>
+          <a:p>
+            <a:pPr indent="0" marL="0">
+              <a:buNone/>
+            </a:pPr>
+            <a:r>
+              <a:rPr lang="en-US" sz="700" b="1" dirty="0">
+                <a:solidFill>
+                  <a:srgbClr val="222222"/>
+                </a:solidFill>
+                <a:latin typeface="Meiryo" pitchFamily="34" charset="0"/>
+                <a:ea typeface="Meiryo" pitchFamily="34" charset="-122"/>
+                <a:cs typeface="Meiryo" pitchFamily="34" charset="-120"/>
+              </a:rPr>
+              <a:t>弱点</a:t>
+            </a:r>
+            <a:endParaRPr lang="en-US" sz="700" dirty="0"/>
+          </a:p>
+        </p:txBody>
+      </p:sp>
+      <p:sp>
+        <p:nvSpPr>
+          <p:cNvPr id="192" name="Shape 183"/>
+          <p:cNvSpPr/>
+          <p:nvPr/>
+        </p:nvSpPr>
+        <p:spPr>
+          <a:xfrm>
+            <a:off x="781812" y="9765792"/>
+            <a:ext cx="137160" cy="137160"/>
+          </a:xfrm>
+          <a:prstGeom prst="ellipse">
+            <a:avLst/>
+          </a:prstGeom>
+          <a:solidFill>
+            <a:srgbClr val="2F8FE0"/>
+          </a:solidFill>
+          <a:ln w="9525">
+            <a:solidFill>
+              <a:srgbClr val="555555"/>
+            </a:solidFill>
+            <a:prstDash val="solid"/>
+          </a:ln>
+        </p:spPr>
+      </p:sp>
+      <p:sp>
+        <p:nvSpPr>
+          <p:cNvPr id="193" name="Text 184"/>
+          <p:cNvSpPr txBox="1"/>
+          <p:nvPr/>
+        </p:nvSpPr>
+        <p:spPr>
+          <a:xfrm>
+            <a:off x="937260" y="9742932"/>
+            <a:ext cx="228600" cy="182880"/>
+          </a:xfrm>
+          <a:prstGeom prst="rect">
+            <a:avLst/>
+          </a:prstGeom>
+          <a:noFill/>
+          <a:ln/>
+        </p:spPr>
+        <p:txBody>
+          <a:bodyPr wrap="square" lIns="0" tIns="0" rIns="0" bIns="0" rtlCol="0" anchor="ctr"/>
+          <a:lstStyle/>
+          <a:p>
+            <a:pPr indent="0" marL="0">
+              <a:buNone/>
+            </a:pPr>
+            <a:r>
+              <a:rPr lang="en-US" sz="900" b="1" dirty="0">
+                <a:solidFill>
+                  <a:srgbClr val="222222"/>
+                </a:solidFill>
+                <a:latin typeface="Meiryo" pitchFamily="34" charset="0"/>
+                <a:ea typeface="Meiryo" pitchFamily="34" charset="-122"/>
+                <a:cs typeface="Meiryo" pitchFamily="34" charset="-120"/>
+              </a:rPr>
+              <a:t>×2</a:t>
+            </a:r>
+            <a:endParaRPr lang="en-US" sz="900" dirty="0"/>
+          </a:p>
+        </p:txBody>
+      </p:sp>
+      <p:sp>
+        <p:nvSpPr>
+          <p:cNvPr id="194" name="Text 185"/>
+          <p:cNvSpPr txBox="1"/>
+          <p:nvPr/>
+        </p:nvSpPr>
+        <p:spPr>
+          <a:xfrm>
+            <a:off x="1184148" y="9742932"/>
+            <a:ext cx="365760" cy="182880"/>
+          </a:xfrm>
+          <a:prstGeom prst="rect">
+            <a:avLst/>
+          </a:prstGeom>
+          <a:noFill/>
+          <a:ln/>
+        </p:spPr>
+        <p:txBody>
+          <a:bodyPr wrap="square" lIns="0" tIns="0" rIns="0" bIns="0" rtlCol="0" anchor="ctr"/>
+          <a:lstStyle/>
+          <a:p>
+            <a:pPr indent="0" marL="0">
+              <a:buNone/>
+            </a:pPr>
+            <a:r>
+              <a:rPr lang="en-US" sz="700" b="1" dirty="0">
+                <a:solidFill>
+                  <a:srgbClr val="222222"/>
+                </a:solidFill>
+                <a:latin typeface="Meiryo" pitchFamily="34" charset="0"/>
+                <a:ea typeface="Meiryo" pitchFamily="34" charset="-122"/>
+                <a:cs typeface="Meiryo" pitchFamily="34" charset="-120"/>
+              </a:rPr>
+              <a:t>抵抗力</a:t>
+            </a:r>
+            <a:endParaRPr lang="en-US" sz="700" dirty="0"/>
+          </a:p>
+        </p:txBody>
+      </p:sp>
+      <p:sp>
+        <p:nvSpPr>
+          <p:cNvPr id="195" name="Text 186"/>
+          <p:cNvSpPr txBox="1"/>
+          <p:nvPr/>
+        </p:nvSpPr>
+        <p:spPr>
+          <a:xfrm>
+            <a:off x="1531620" y="9742932"/>
+            <a:ext cx="274320" cy="182880"/>
+          </a:xfrm>
+          <a:prstGeom prst="rect">
+            <a:avLst/>
+          </a:prstGeom>
+          <a:noFill/>
+          <a:ln/>
+        </p:spPr>
+        <p:txBody>
+          <a:bodyPr wrap="square" lIns="0" tIns="0" rIns="0" bIns="0" rtlCol="0" anchor="ctr"/>
+          <a:lstStyle/>
+          <a:p>
+            <a:pPr indent="0" marL="0">
+              <a:buNone/>
+            </a:pPr>
+            <a:r>
+              <a:rPr lang="en-US" sz="800" b="1" dirty="0">
+                <a:solidFill>
+                  <a:srgbClr val="222222"/>
+                </a:solidFill>
+                <a:latin typeface="Meiryo" pitchFamily="34" charset="0"/>
+                <a:ea typeface="Meiryo" pitchFamily="34" charset="-122"/>
+                <a:cs typeface="Meiryo" pitchFamily="34" charset="-120"/>
+              </a:rPr>
+              <a:t>－20</a:t>
+            </a:r>
+            <a:endParaRPr lang="en-US" sz="800" dirty="0"/>
+          </a:p>
+        </p:txBody>
+      </p:sp>
+      <p:sp>
+        <p:nvSpPr>
+          <p:cNvPr id="196" name="Text 187"/>
+          <p:cNvSpPr txBox="1"/>
+          <p:nvPr/>
+        </p:nvSpPr>
+        <p:spPr>
+          <a:xfrm>
+            <a:off x="1952244" y="9742932"/>
+            <a:ext cx="320040" cy="182880"/>
+          </a:xfrm>
+          <a:prstGeom prst="rect">
+            <a:avLst/>
+          </a:prstGeom>
+          <a:noFill/>
+          <a:ln/>
+        </p:spPr>
+        <p:txBody>
+          <a:bodyPr wrap="square" lIns="0" tIns="0" rIns="0" bIns="0" rtlCol="0" anchor="ctr"/>
+          <a:lstStyle/>
+          <a:p>
+            <a:pPr indent="0" marL="0">
+              <a:buNone/>
+            </a:pPr>
+            <a:r>
+              <a:rPr lang="en-US" sz="700" b="1" dirty="0">
+                <a:solidFill>
+                  <a:srgbClr val="222222"/>
+                </a:solidFill>
+                <a:latin typeface="Meiryo" pitchFamily="34" charset="0"/>
+                <a:ea typeface="Meiryo" pitchFamily="34" charset="-122"/>
+                <a:cs typeface="Meiryo" pitchFamily="34" charset="-120"/>
+              </a:rPr>
+              <a:t>にげる</a:t>
+            </a:r>
+            <a:endParaRPr lang="en-US" sz="700" dirty="0"/>
+          </a:p>
+        </p:txBody>
+      </p:sp>
+      <p:sp>
+        <p:nvSpPr>
+          <p:cNvPr id="197" name="Shape 188"/>
+          <p:cNvSpPr/>
+          <p:nvPr/>
+        </p:nvSpPr>
+        <p:spPr>
+          <a:xfrm>
+            <a:off x="2281428" y="9765792"/>
+            <a:ext cx="137160" cy="137160"/>
+          </a:xfrm>
+          <a:prstGeom prst="ellipse">
+            <a:avLst/>
+          </a:prstGeom>
+          <a:solidFill>
+            <a:srgbClr val="F2F2F2"/>
+          </a:solidFill>
+          <a:ln w="9525">
+            <a:solidFill>
+              <a:srgbClr val="555555"/>
+            </a:solidFill>
+            <a:prstDash val="solid"/>
+          </a:ln>
+        </p:spPr>
+      </p:sp>
+      <p:sp>
+        <p:nvSpPr>
+          <p:cNvPr id="198" name="Shape 189"/>
+          <p:cNvSpPr/>
+          <p:nvPr/>
+        </p:nvSpPr>
+        <p:spPr>
+          <a:xfrm>
+            <a:off x="2647188" y="6926580"/>
+            <a:ext cx="2267712" cy="3163824"/>
+          </a:xfrm>
+          <a:prstGeom prst="rect">
+            <a:avLst/>
+          </a:prstGeom>
+          <a:solidFill>
+            <a:srgbClr val="FFFFFF"/>
+          </a:solidFill>
+          <a:ln w="6350">
+            <a:solidFill>
+              <a:srgbClr val="999999"/>
+            </a:solidFill>
+            <a:prstDash val="dash"/>
+          </a:ln>
+        </p:spPr>
+      </p:sp>
+      <p:sp>
+        <p:nvSpPr>
+          <p:cNvPr id="199" name="Shape 190"/>
+          <p:cNvSpPr/>
+          <p:nvPr/>
+        </p:nvSpPr>
+        <p:spPr>
+          <a:xfrm>
+            <a:off x="2674620" y="6954012"/>
+            <a:ext cx="2212848" cy="3108960"/>
+          </a:xfrm>
+          <a:prstGeom prst="roundRect">
+            <a:avLst>
+              <a:gd name="adj" fmla="val 4132"/>
+            </a:avLst>
+          </a:prstGeom>
+          <a:solidFill>
+            <a:srgbClr val="C9CCD0"/>
+          </a:solidFill>
+          <a:ln w="6350">
+            <a:solidFill>
+              <a:srgbClr val="C9CCD0"/>
+            </a:solidFill>
+            <a:prstDash val="solid"/>
+          </a:ln>
+        </p:spPr>
+      </p:sp>
+      <p:sp>
+        <p:nvSpPr>
+          <p:cNvPr id="200" name="Shape 191"/>
+          <p:cNvSpPr/>
+          <p:nvPr/>
+        </p:nvSpPr>
+        <p:spPr>
+          <a:xfrm>
+            <a:off x="2738628" y="7018020"/>
+            <a:ext cx="2084832" cy="2980944"/>
+          </a:xfrm>
+          <a:prstGeom prst="rect">
+            <a:avLst/>
+          </a:prstGeom>
+          <a:solidFill>
+            <a:srgbClr val="A9D6F5"/>
+          </a:solidFill>
+          <a:ln w="6350">
+            <a:solidFill>
+              <a:srgbClr val="A9D6F5"/>
+            </a:solidFill>
+            <a:prstDash val="solid"/>
+          </a:ln>
+        </p:spPr>
+      </p:sp>
+      <p:sp>
+        <p:nvSpPr>
+          <p:cNvPr id="201" name="Shape 192"/>
+          <p:cNvSpPr/>
+          <p:nvPr/>
+        </p:nvSpPr>
+        <p:spPr>
+          <a:xfrm>
+            <a:off x="2738628" y="7018020"/>
+            <a:ext cx="384048" cy="155448"/>
+          </a:xfrm>
+          <a:prstGeom prst="roundRect">
+            <a:avLst>
+              <a:gd name="adj" fmla="val 29412"/>
+            </a:avLst>
+          </a:prstGeom>
+          <a:solidFill>
+            <a:srgbClr val="C9CCD0"/>
+          </a:solidFill>
+          <a:ln w="6350">
+            <a:solidFill>
+              <a:srgbClr val="C9CCD0"/>
+            </a:solidFill>
+            <a:prstDash val="solid"/>
+          </a:ln>
+        </p:spPr>
+      </p:sp>
+      <p:sp>
+        <p:nvSpPr>
+          <p:cNvPr id="202" name="Text 193"/>
+          <p:cNvSpPr txBox="1"/>
+          <p:nvPr/>
+        </p:nvSpPr>
+        <p:spPr>
+          <a:xfrm>
+            <a:off x="2738628" y="7018020"/>
+            <a:ext cx="384048" cy="155448"/>
+          </a:xfrm>
+          <a:prstGeom prst="rect">
+            <a:avLst/>
+          </a:prstGeom>
+          <a:noFill/>
+          <a:ln/>
+        </p:spPr>
+        <p:txBody>
+          <a:bodyPr wrap="square" lIns="0" tIns="0" rIns="0" bIns="0" rtlCol="0" anchor="ctr"/>
+          <a:lstStyle/>
+          <a:p>
+            <a:pPr algn="ctr" indent="0" marL="0">
+              <a:buNone/>
+            </a:pPr>
+            <a:r>
+              <a:rPr lang="en-US" sz="800" b="1" i="1" dirty="0">
+                <a:solidFill>
+                  <a:srgbClr val="222222"/>
+                </a:solidFill>
+                <a:latin typeface="Meiryo" pitchFamily="34" charset="0"/>
+                <a:ea typeface="Meiryo" pitchFamily="34" charset="-122"/>
+                <a:cs typeface="Meiryo" pitchFamily="34" charset="-120"/>
+              </a:rPr>
+              <a:t>たね</a:t>
+            </a:r>
+            <a:endParaRPr lang="en-US" sz="800" dirty="0"/>
+          </a:p>
+        </p:txBody>
+      </p:sp>
+      <p:sp>
+        <p:nvSpPr>
+          <p:cNvPr id="203" name="Text 194"/>
+          <p:cNvSpPr txBox="1"/>
+          <p:nvPr/>
+        </p:nvSpPr>
+        <p:spPr>
+          <a:xfrm>
+            <a:off x="3168396" y="7036308"/>
+            <a:ext cx="914400" cy="274320"/>
+          </a:xfrm>
+          <a:prstGeom prst="rect">
+            <a:avLst/>
+          </a:prstGeom>
+          <a:noFill/>
+          <a:ln/>
+        </p:spPr>
+        <p:txBody>
+          <a:bodyPr wrap="none" lIns="0" tIns="0" rIns="0" bIns="0" rtlCol="0" anchor="ctr"/>
+          <a:lstStyle/>
+          <a:p>
+            <a:pPr indent="0" marL="0">
+              <a:buNone/>
+            </a:pPr>
+            <a:r>
+              <a:rPr lang="en-US" sz="1500" b="1" dirty="0">
+                <a:solidFill>
+                  <a:srgbClr val="222222"/>
+                </a:solidFill>
+                <a:latin typeface="Meiryo" pitchFamily="34" charset="0"/>
+                <a:ea typeface="Meiryo" pitchFamily="34" charset="-122"/>
+                <a:cs typeface="Meiryo" pitchFamily="34" charset="-120"/>
+              </a:rPr>
+              <a:t>ちびカメ</a:t>
+            </a:r>
+            <a:endParaRPr lang="en-US" sz="1500" dirty="0"/>
+          </a:p>
+        </p:txBody>
+      </p:sp>
+      <p:sp>
+        <p:nvSpPr>
+          <p:cNvPr id="204" name="Text 195"/>
+          <p:cNvSpPr txBox="1"/>
+          <p:nvPr/>
+        </p:nvSpPr>
+        <p:spPr>
+          <a:xfrm>
+            <a:off x="4018788" y="7036308"/>
+            <a:ext cx="566928" cy="274320"/>
+          </a:xfrm>
+          <a:prstGeom prst="rect">
+            <a:avLst/>
+          </a:prstGeom>
+          <a:noFill/>
+          <a:ln/>
+        </p:spPr>
+        <p:txBody>
+          <a:bodyPr wrap="square" lIns="0" tIns="0" rIns="0" bIns="0" rtlCol="0" anchor="ctr"/>
+          <a:lstStyle/>
+          <a:p>
+            <a:pPr algn="r" indent="0" marL="0">
+              <a:buNone/>
+            </a:pPr>
+            <a:r>
+              <a:rPr lang="en-US" sz="1200" b="1" dirty="0">
+                <a:solidFill>
+                  <a:srgbClr val="222222"/>
+                </a:solidFill>
+                <a:latin typeface="Meiryo" pitchFamily="34" charset="0"/>
+                <a:ea typeface="Meiryo" pitchFamily="34" charset="-122"/>
+                <a:cs typeface="Meiryo" pitchFamily="34" charset="-120"/>
+              </a:rPr>
+              <a:t>HP 40</a:t>
+            </a:r>
+            <a:endParaRPr lang="en-US" sz="1200" dirty="0"/>
+          </a:p>
+        </p:txBody>
+      </p:sp>
+      <p:sp>
+        <p:nvSpPr>
+          <p:cNvPr id="205" name="Shape 196"/>
+          <p:cNvSpPr/>
+          <p:nvPr/>
+        </p:nvSpPr>
+        <p:spPr>
+          <a:xfrm>
+            <a:off x="4613148" y="7082028"/>
+            <a:ext cx="173736" cy="173736"/>
+          </a:xfrm>
+          <a:prstGeom prst="ellipse">
+            <a:avLst/>
+          </a:prstGeom>
+          <a:solidFill>
+            <a:srgbClr val="2F8FE0"/>
+          </a:solidFill>
+          <a:ln w="9525">
+            <a:solidFill>
+              <a:srgbClr val="555555"/>
+            </a:solidFill>
+            <a:prstDash val="solid"/>
+          </a:ln>
+        </p:spPr>
+      </p:sp>
+      <p:sp>
+        <p:nvSpPr>
+          <p:cNvPr id="206" name="Shape 197"/>
+          <p:cNvSpPr/>
+          <p:nvPr/>
+        </p:nvSpPr>
+        <p:spPr>
+          <a:xfrm>
+            <a:off x="2820924" y="7338060"/>
+            <a:ext cx="1920240" cy="1225296"/>
+          </a:xfrm>
+          <a:prstGeom prst="rect">
+            <a:avLst/>
+          </a:prstGeom>
+          <a:solidFill>
+            <a:srgbClr val="FFFFFF"/>
+          </a:solidFill>
+          <a:ln w="31750">
+            <a:solidFill>
+              <a:srgbClr val="C9CCD0"/>
+            </a:solidFill>
+            <a:prstDash val="solid"/>
+          </a:ln>
+        </p:spPr>
+      </p:sp>
+      <p:pic>
+        <p:nvPicPr>
+          <p:cNvPr id="207" name="Image 7" descr="e13.jpg">    </p:cNvPr>
+          <p:cNvPicPr>
+            <a:picLocks noChangeAspect="1"/>
+          </p:cNvPicPr>
+          <p:nvPr/>
+        </p:nvPicPr>
+        <p:blipFill>
+          <a:blip r:embed="rId8"/>
+          <a:stretch>
+            <a:fillRect/>
+          </a:stretch>
+        </p:blipFill>
+        <p:spPr>
+          <a:xfrm>
+            <a:off x="2834640" y="7351776"/>
+            <a:ext cx="1892808" cy="1197864"/>
+          </a:xfrm>
+          <a:prstGeom prst="rect">
+            <a:avLst/>
+          </a:prstGeom>
+        </p:spPr>
+      </p:pic>
+      <p:sp>
+        <p:nvSpPr>
+          <p:cNvPr id="208" name="Text 198"/>
+          <p:cNvSpPr txBox="1"/>
+          <p:nvPr/>
+        </p:nvSpPr>
+        <p:spPr>
+          <a:xfrm>
+            <a:off x="2820924" y="8572500"/>
+            <a:ext cx="822960" cy="146304"/>
+          </a:xfrm>
+          <a:prstGeom prst="rect">
+            <a:avLst/>
+          </a:prstGeom>
+          <a:noFill/>
+          <a:ln/>
+        </p:spPr>
+        <p:txBody>
+          <a:bodyPr wrap="square" lIns="0" tIns="0" rIns="0" bIns="0" rtlCol="0" anchor="ctr"/>
+          <a:lstStyle/>
+          <a:p>
+            <a:pPr indent="0" marL="0">
+              <a:buNone/>
+            </a:pPr>
+            <a:r>
+              <a:rPr lang="en-US" sz="800" b="1" dirty="0">
+                <a:solidFill>
+                  <a:srgbClr val="444444"/>
+                </a:solidFill>
+                <a:latin typeface="Meiryo" pitchFamily="34" charset="0"/>
+                <a:ea typeface="Meiryo" pitchFamily="34" charset="-122"/>
+                <a:cs typeface="Meiryo" pitchFamily="34" charset="-120"/>
+              </a:rPr>
+              <a:t>ランク C</a:t>
+            </a:r>
+            <a:endParaRPr lang="en-US" sz="800" dirty="0"/>
+          </a:p>
+        </p:txBody>
+      </p:sp>
+      <p:sp>
+        <p:nvSpPr>
+          <p:cNvPr id="209" name="Shape 199"/>
+          <p:cNvSpPr/>
+          <p:nvPr/>
+        </p:nvSpPr>
+        <p:spPr>
+          <a:xfrm>
+            <a:off x="2830068" y="8810244"/>
+            <a:ext cx="155448" cy="155448"/>
+          </a:xfrm>
+          <a:prstGeom prst="ellipse">
+            <a:avLst/>
+          </a:prstGeom>
+          <a:solidFill>
+            <a:srgbClr val="2F8FE0"/>
+          </a:solidFill>
+          <a:ln w="9525">
+            <a:solidFill>
+              <a:srgbClr val="555555"/>
+            </a:solidFill>
+            <a:prstDash val="solid"/>
+          </a:ln>
+        </p:spPr>
+      </p:sp>
+      <p:sp>
+        <p:nvSpPr>
+          <p:cNvPr id="210" name="Text 200"/>
+          <p:cNvSpPr txBox="1"/>
+          <p:nvPr/>
+        </p:nvSpPr>
+        <p:spPr>
+          <a:xfrm>
+            <a:off x="3287268" y="8773668"/>
+            <a:ext cx="1097280" cy="228600"/>
+          </a:xfrm>
+          <a:prstGeom prst="rect">
+            <a:avLst/>
+          </a:prstGeom>
+          <a:noFill/>
+          <a:ln/>
+        </p:spPr>
+        <p:txBody>
+          <a:bodyPr wrap="none" lIns="0" tIns="0" rIns="0" bIns="0" rtlCol="0" anchor="ctr"/>
+          <a:lstStyle/>
+          <a:p>
+            <a:pPr indent="0" marL="0">
+              <a:buNone/>
+            </a:pPr>
+            <a:r>
+              <a:rPr lang="en-US" sz="1200" b="1" dirty="0">
+                <a:solidFill>
+                  <a:srgbClr val="222222"/>
+                </a:solidFill>
+                <a:latin typeface="Meiryo" pitchFamily="34" charset="0"/>
+                <a:ea typeface="Meiryo" pitchFamily="34" charset="-122"/>
+                <a:cs typeface="Meiryo" pitchFamily="34" charset="-120"/>
+              </a:rPr>
+              <a:t>あわ</a:t>
+            </a:r>
+            <a:endParaRPr lang="en-US" sz="1200" dirty="0"/>
+          </a:p>
+        </p:txBody>
+      </p:sp>
+      <p:sp>
+        <p:nvSpPr>
+          <p:cNvPr id="211" name="Text 201"/>
+          <p:cNvSpPr txBox="1"/>
+          <p:nvPr/>
+        </p:nvSpPr>
+        <p:spPr>
+          <a:xfrm>
+            <a:off x="4247388" y="8773668"/>
+            <a:ext cx="502920" cy="228600"/>
+          </a:xfrm>
+          <a:prstGeom prst="rect">
+            <a:avLst/>
+          </a:prstGeom>
+          <a:noFill/>
+          <a:ln/>
+        </p:spPr>
+        <p:txBody>
+          <a:bodyPr wrap="square" lIns="0" tIns="0" rIns="0" bIns="0" rtlCol="0" anchor="ctr"/>
+          <a:lstStyle/>
+          <a:p>
+            <a:pPr algn="r" indent="0" marL="0">
+              <a:buNone/>
+            </a:pPr>
+            <a:r>
+              <a:rPr lang="en-US" sz="1400" b="1" dirty="0">
+                <a:solidFill>
+                  <a:srgbClr val="222222"/>
+                </a:solidFill>
+                <a:latin typeface="Meiryo" pitchFamily="34" charset="0"/>
+                <a:ea typeface="Meiryo" pitchFamily="34" charset="-122"/>
+                <a:cs typeface="Meiryo" pitchFamily="34" charset="-120"/>
+              </a:rPr>
+              <a:t>10</a:t>
+            </a:r>
+            <a:endParaRPr lang="en-US" sz="1400" dirty="0"/>
+          </a:p>
+        </p:txBody>
+      </p:sp>
+      <p:sp>
+        <p:nvSpPr>
+          <p:cNvPr id="212" name="Text 202"/>
+          <p:cNvSpPr txBox="1"/>
+          <p:nvPr/>
+        </p:nvSpPr>
+        <p:spPr>
+          <a:xfrm>
+            <a:off x="2830068" y="9020556"/>
+            <a:ext cx="1901952" cy="201168"/>
+          </a:xfrm>
+          <a:prstGeom prst="rect">
+            <a:avLst/>
+          </a:prstGeom>
+          <a:noFill/>
+          <a:ln/>
+        </p:spPr>
+        <p:txBody>
+          <a:bodyPr wrap="square" lIns="0" tIns="0" rIns="0" bIns="0" rtlCol="0" anchor="t"/>
+          <a:lstStyle/>
+          <a:p>
+            <a:pPr indent="0" marL="0">
+              <a:buNone/>
+            </a:pPr>
+            <a:r>
+              <a:rPr lang="en-US" sz="850" dirty="0">
+                <a:solidFill>
+                  <a:srgbClr val="444444"/>
+                </a:solidFill>
+                <a:latin typeface="Meiryo" pitchFamily="34" charset="0"/>
+                <a:ea typeface="Meiryo" pitchFamily="34" charset="-122"/>
+                <a:cs typeface="Meiryo" pitchFamily="34" charset="-120"/>
+              </a:rPr>
+              <a:t>せつめいをかく</a:t>
+            </a:r>
+            <a:endParaRPr lang="en-US" sz="850" dirty="0"/>
+          </a:p>
+        </p:txBody>
+      </p:sp>
+      <p:sp>
+        <p:nvSpPr>
+          <p:cNvPr id="213" name="Shape 203"/>
+          <p:cNvSpPr/>
+          <p:nvPr/>
+        </p:nvSpPr>
+        <p:spPr>
+          <a:xfrm>
+            <a:off x="2830068" y="9294876"/>
+            <a:ext cx="155448" cy="155448"/>
+          </a:xfrm>
+          <a:prstGeom prst="ellipse">
+            <a:avLst/>
+          </a:prstGeom>
+          <a:solidFill>
+            <a:srgbClr val="2F8FE0"/>
+          </a:solidFill>
+          <a:ln w="9525">
+            <a:solidFill>
+              <a:srgbClr val="555555"/>
+            </a:solidFill>
+            <a:prstDash val="solid"/>
+          </a:ln>
+        </p:spPr>
+      </p:sp>
+      <p:sp>
+        <p:nvSpPr>
+          <p:cNvPr id="214" name="Shape 204"/>
+          <p:cNvSpPr/>
+          <p:nvPr/>
+        </p:nvSpPr>
+        <p:spPr>
+          <a:xfrm>
+            <a:off x="3012948" y="9294876"/>
+            <a:ext cx="155448" cy="155448"/>
+          </a:xfrm>
+          <a:prstGeom prst="ellipse">
+            <a:avLst/>
+          </a:prstGeom>
+          <a:solidFill>
+            <a:srgbClr val="2F8FE0"/>
+          </a:solidFill>
+          <a:ln w="9525">
+            <a:solidFill>
+              <a:srgbClr val="555555"/>
+            </a:solidFill>
+            <a:prstDash val="solid"/>
+          </a:ln>
+        </p:spPr>
+      </p:sp>
+      <p:sp>
+        <p:nvSpPr>
+          <p:cNvPr id="215" name="Text 205"/>
+          <p:cNvSpPr txBox="1"/>
+          <p:nvPr/>
+        </p:nvSpPr>
+        <p:spPr>
+          <a:xfrm>
+            <a:off x="3287268" y="9258300"/>
+            <a:ext cx="1097280" cy="228600"/>
+          </a:xfrm>
+          <a:prstGeom prst="rect">
+            <a:avLst/>
+          </a:prstGeom>
+          <a:noFill/>
+          <a:ln/>
+        </p:spPr>
+        <p:txBody>
+          <a:bodyPr wrap="none" lIns="0" tIns="0" rIns="0" bIns="0" rtlCol="0" anchor="ctr"/>
+          <a:lstStyle/>
+          <a:p>
+            <a:pPr indent="0" marL="0">
+              <a:buNone/>
+            </a:pPr>
+            <a:r>
+              <a:rPr lang="en-US" sz="1000" b="1" dirty="0">
+                <a:solidFill>
+                  <a:srgbClr val="222222"/>
+                </a:solidFill>
+                <a:latin typeface="Meiryo" pitchFamily="34" charset="0"/>
+                <a:ea typeface="Meiryo" pitchFamily="34" charset="-122"/>
+                <a:cs typeface="Meiryo" pitchFamily="34" charset="-120"/>
+              </a:rPr>
+              <a:t>ころころタックル</a:t>
+            </a:r>
+            <a:endParaRPr lang="en-US" sz="1000" dirty="0"/>
+          </a:p>
+        </p:txBody>
+      </p:sp>
+      <p:sp>
+        <p:nvSpPr>
+          <p:cNvPr id="216" name="Text 206"/>
+          <p:cNvSpPr txBox="1"/>
+          <p:nvPr/>
+        </p:nvSpPr>
+        <p:spPr>
+          <a:xfrm>
+            <a:off x="4247388" y="9258300"/>
+            <a:ext cx="502920" cy="228600"/>
+          </a:xfrm>
+          <a:prstGeom prst="rect">
+            <a:avLst/>
+          </a:prstGeom>
+          <a:noFill/>
+          <a:ln/>
+        </p:spPr>
+        <p:txBody>
+          <a:bodyPr wrap="square" lIns="0" tIns="0" rIns="0" bIns="0" rtlCol="0" anchor="ctr"/>
+          <a:lstStyle/>
+          <a:p>
+            <a:pPr algn="r" indent="0" marL="0">
+              <a:buNone/>
+            </a:pPr>
+            <a:r>
+              <a:rPr lang="en-US" sz="1400" b="1" dirty="0">
+                <a:solidFill>
+                  <a:srgbClr val="222222"/>
+                </a:solidFill>
+                <a:latin typeface="Meiryo" pitchFamily="34" charset="0"/>
+                <a:ea typeface="Meiryo" pitchFamily="34" charset="-122"/>
+                <a:cs typeface="Meiryo" pitchFamily="34" charset="-120"/>
+              </a:rPr>
+              <a:t>40</a:t>
+            </a:r>
+            <a:endParaRPr lang="en-US" sz="1400" dirty="0"/>
+          </a:p>
+        </p:txBody>
+      </p:sp>
+      <p:sp>
+        <p:nvSpPr>
+          <p:cNvPr id="217" name="Text 207"/>
+          <p:cNvSpPr txBox="1"/>
+          <p:nvPr/>
+        </p:nvSpPr>
+        <p:spPr>
+          <a:xfrm>
+            <a:off x="2830068" y="9505188"/>
+            <a:ext cx="1901952" cy="201168"/>
+          </a:xfrm>
+          <a:prstGeom prst="rect">
+            <a:avLst/>
+          </a:prstGeom>
+          <a:noFill/>
+          <a:ln/>
+        </p:spPr>
+        <p:txBody>
+          <a:bodyPr wrap="square" lIns="0" tIns="0" rIns="0" bIns="0" rtlCol="0" anchor="t"/>
+          <a:lstStyle/>
+          <a:p>
+            <a:pPr indent="0" marL="0">
+              <a:buNone/>
+            </a:pPr>
+            <a:r>
+              <a:rPr lang="en-US" sz="850" dirty="0">
+                <a:solidFill>
+                  <a:srgbClr val="444444"/>
+                </a:solidFill>
+                <a:latin typeface="Meiryo" pitchFamily="34" charset="0"/>
+                <a:ea typeface="Meiryo" pitchFamily="34" charset="-122"/>
+                <a:cs typeface="Meiryo" pitchFamily="34" charset="-120"/>
+              </a:rPr>
+              <a:t>せつめいをかく</a:t>
+            </a:r>
+            <a:endParaRPr lang="en-US" sz="850" dirty="0"/>
+          </a:p>
+        </p:txBody>
+      </p:sp>
+      <p:sp>
+        <p:nvSpPr>
+          <p:cNvPr id="218" name="Shape 208"/>
+          <p:cNvSpPr/>
+          <p:nvPr/>
+        </p:nvSpPr>
+        <p:spPr>
+          <a:xfrm>
+            <a:off x="2738628" y="9742932"/>
+            <a:ext cx="2084832" cy="182880"/>
+          </a:xfrm>
+          <a:prstGeom prst="rect">
+            <a:avLst/>
+          </a:prstGeom>
+          <a:solidFill>
+            <a:srgbClr val="DADDE0"/>
+          </a:solidFill>
+          <a:ln w="6350">
+            <a:solidFill>
+              <a:srgbClr val="DADDE0"/>
+            </a:solidFill>
+            <a:prstDash val="solid"/>
+          </a:ln>
+        </p:spPr>
+      </p:sp>
+      <p:sp>
+        <p:nvSpPr>
+          <p:cNvPr id="219" name="Text 209"/>
+          <p:cNvSpPr txBox="1"/>
+          <p:nvPr/>
+        </p:nvSpPr>
+        <p:spPr>
+          <a:xfrm>
+            <a:off x="2775204" y="9742932"/>
+            <a:ext cx="274320" cy="182880"/>
+          </a:xfrm>
+          <a:prstGeom prst="rect">
+            <a:avLst/>
+          </a:prstGeom>
+          <a:noFill/>
+          <a:ln/>
+        </p:spPr>
+        <p:txBody>
+          <a:bodyPr wrap="square" lIns="0" tIns="0" rIns="0" bIns="0" rtlCol="0" anchor="ctr"/>
+          <a:lstStyle/>
+          <a:p>
+            <a:pPr indent="0" marL="0">
+              <a:buNone/>
+            </a:pPr>
+            <a:r>
+              <a:rPr lang="en-US" sz="700" b="1" dirty="0">
+                <a:solidFill>
+                  <a:srgbClr val="222222"/>
+                </a:solidFill>
+                <a:latin typeface="Meiryo" pitchFamily="34" charset="0"/>
+                <a:ea typeface="Meiryo" pitchFamily="34" charset="-122"/>
+                <a:cs typeface="Meiryo" pitchFamily="34" charset="-120"/>
+              </a:rPr>
+              <a:t>弱点</a:t>
+            </a:r>
+            <a:endParaRPr lang="en-US" sz="700" dirty="0"/>
+          </a:p>
+        </p:txBody>
+      </p:sp>
+      <p:sp>
+        <p:nvSpPr>
+          <p:cNvPr id="220" name="Shape 210"/>
+          <p:cNvSpPr/>
+          <p:nvPr/>
+        </p:nvSpPr>
+        <p:spPr>
+          <a:xfrm>
+            <a:off x="3049524" y="9765792"/>
+            <a:ext cx="137160" cy="137160"/>
+          </a:xfrm>
+          <a:prstGeom prst="ellipse">
+            <a:avLst/>
+          </a:prstGeom>
+          <a:solidFill>
+            <a:srgbClr val="3FA535"/>
+          </a:solidFill>
+          <a:ln w="9525">
+            <a:solidFill>
+              <a:srgbClr val="555555"/>
+            </a:solidFill>
+            <a:prstDash val="solid"/>
+          </a:ln>
+        </p:spPr>
+      </p:sp>
+      <p:sp>
+        <p:nvSpPr>
+          <p:cNvPr id="221" name="Text 211"/>
+          <p:cNvSpPr txBox="1"/>
+          <p:nvPr/>
+        </p:nvSpPr>
+        <p:spPr>
+          <a:xfrm>
+            <a:off x="3204972" y="9742932"/>
+            <a:ext cx="228600" cy="182880"/>
+          </a:xfrm>
+          <a:prstGeom prst="rect">
+            <a:avLst/>
+          </a:prstGeom>
+          <a:noFill/>
+          <a:ln/>
+        </p:spPr>
+        <p:txBody>
+          <a:bodyPr wrap="square" lIns="0" tIns="0" rIns="0" bIns="0" rtlCol="0" anchor="ctr"/>
+          <a:lstStyle/>
+          <a:p>
+            <a:pPr indent="0" marL="0">
+              <a:buNone/>
+            </a:pPr>
+            <a:r>
+              <a:rPr lang="en-US" sz="900" b="1" dirty="0">
+                <a:solidFill>
+                  <a:srgbClr val="222222"/>
+                </a:solidFill>
+                <a:latin typeface="Meiryo" pitchFamily="34" charset="0"/>
+                <a:ea typeface="Meiryo" pitchFamily="34" charset="-122"/>
+                <a:cs typeface="Meiryo" pitchFamily="34" charset="-120"/>
+              </a:rPr>
+              <a:t>×2</a:t>
+            </a:r>
+            <a:endParaRPr lang="en-US" sz="900" dirty="0"/>
+          </a:p>
+        </p:txBody>
+      </p:sp>
+      <p:sp>
+        <p:nvSpPr>
+          <p:cNvPr id="222" name="Text 212"/>
+          <p:cNvSpPr txBox="1"/>
+          <p:nvPr/>
+        </p:nvSpPr>
+        <p:spPr>
+          <a:xfrm>
+            <a:off x="3451860" y="9742932"/>
+            <a:ext cx="365760" cy="182880"/>
+          </a:xfrm>
+          <a:prstGeom prst="rect">
+            <a:avLst/>
+          </a:prstGeom>
+          <a:noFill/>
+          <a:ln/>
+        </p:spPr>
+        <p:txBody>
+          <a:bodyPr wrap="square" lIns="0" tIns="0" rIns="0" bIns="0" rtlCol="0" anchor="ctr"/>
+          <a:lstStyle/>
+          <a:p>
+            <a:pPr indent="0" marL="0">
+              <a:buNone/>
+            </a:pPr>
+            <a:r>
+              <a:rPr lang="en-US" sz="700" b="1" dirty="0">
+                <a:solidFill>
+                  <a:srgbClr val="222222"/>
+                </a:solidFill>
+                <a:latin typeface="Meiryo" pitchFamily="34" charset="0"/>
+                <a:ea typeface="Meiryo" pitchFamily="34" charset="-122"/>
+                <a:cs typeface="Meiryo" pitchFamily="34" charset="-120"/>
+              </a:rPr>
+              <a:t>抵抗力</a:t>
+            </a:r>
+            <a:endParaRPr lang="en-US" sz="700" dirty="0"/>
+          </a:p>
+        </p:txBody>
+      </p:sp>
+      <p:sp>
+        <p:nvSpPr>
+          <p:cNvPr id="223" name="Text 213"/>
+          <p:cNvSpPr txBox="1"/>
+          <p:nvPr/>
+        </p:nvSpPr>
+        <p:spPr>
+          <a:xfrm>
+            <a:off x="3799332" y="9742932"/>
+            <a:ext cx="274320" cy="182880"/>
+          </a:xfrm>
+          <a:prstGeom prst="rect">
+            <a:avLst/>
+          </a:prstGeom>
+          <a:noFill/>
+          <a:ln/>
+        </p:spPr>
+        <p:txBody>
+          <a:bodyPr wrap="square" lIns="0" tIns="0" rIns="0" bIns="0" rtlCol="0" anchor="ctr"/>
+          <a:lstStyle/>
+          <a:p>
+            <a:pPr indent="0" marL="0">
+              <a:buNone/>
+            </a:pPr>
+            <a:r>
+              <a:rPr lang="en-US" sz="800" b="1" dirty="0">
+                <a:solidFill>
+                  <a:srgbClr val="222222"/>
+                </a:solidFill>
+                <a:latin typeface="Meiryo" pitchFamily="34" charset="0"/>
+                <a:ea typeface="Meiryo" pitchFamily="34" charset="-122"/>
+                <a:cs typeface="Meiryo" pitchFamily="34" charset="-120"/>
+              </a:rPr>
+              <a:t>－20</a:t>
+            </a:r>
+            <a:endParaRPr lang="en-US" sz="800" dirty="0"/>
+          </a:p>
+        </p:txBody>
+      </p:sp>
+      <p:sp>
+        <p:nvSpPr>
+          <p:cNvPr id="224" name="Text 214"/>
+          <p:cNvSpPr txBox="1"/>
+          <p:nvPr/>
+        </p:nvSpPr>
+        <p:spPr>
+          <a:xfrm>
+            <a:off x="4219956" y="9742932"/>
+            <a:ext cx="320040" cy="182880"/>
+          </a:xfrm>
+          <a:prstGeom prst="rect">
+            <a:avLst/>
+          </a:prstGeom>
+          <a:noFill/>
+          <a:ln/>
+        </p:spPr>
+        <p:txBody>
+          <a:bodyPr wrap="square" lIns="0" tIns="0" rIns="0" bIns="0" rtlCol="0" anchor="ctr"/>
+          <a:lstStyle/>
+          <a:p>
+            <a:pPr indent="0" marL="0">
+              <a:buNone/>
+            </a:pPr>
+            <a:r>
+              <a:rPr lang="en-US" sz="700" b="1" dirty="0">
+                <a:solidFill>
+                  <a:srgbClr val="222222"/>
+                </a:solidFill>
+                <a:latin typeface="Meiryo" pitchFamily="34" charset="0"/>
+                <a:ea typeface="Meiryo" pitchFamily="34" charset="-122"/>
+                <a:cs typeface="Meiryo" pitchFamily="34" charset="-120"/>
+              </a:rPr>
+              <a:t>にげる</a:t>
+            </a:r>
+            <a:endParaRPr lang="en-US" sz="700" dirty="0"/>
+          </a:p>
+        </p:txBody>
+      </p:sp>
+      <p:sp>
+        <p:nvSpPr>
+          <p:cNvPr id="225" name="Shape 215"/>
+          <p:cNvSpPr/>
+          <p:nvPr/>
+        </p:nvSpPr>
+        <p:spPr>
+          <a:xfrm>
+            <a:off x="4549140" y="9765792"/>
+            <a:ext cx="137160" cy="137160"/>
+          </a:xfrm>
+          <a:prstGeom prst="ellipse">
+            <a:avLst/>
+          </a:prstGeom>
+          <a:solidFill>
+            <a:srgbClr val="F2F2F2"/>
+          </a:solidFill>
+          <a:ln w="9525">
+            <a:solidFill>
+              <a:srgbClr val="555555"/>
+            </a:solidFill>
+            <a:prstDash val="solid"/>
+          </a:ln>
+        </p:spPr>
+      </p:sp>
+      <p:sp>
+        <p:nvSpPr>
+          <p:cNvPr id="226" name="Shape 216"/>
+          <p:cNvSpPr/>
+          <p:nvPr/>
+        </p:nvSpPr>
+        <p:spPr>
+          <a:xfrm>
+            <a:off x="4914900" y="6926580"/>
+            <a:ext cx="2267712" cy="3163824"/>
+          </a:xfrm>
+          <a:prstGeom prst="rect">
+            <a:avLst/>
+          </a:prstGeom>
+          <a:solidFill>
+            <a:srgbClr val="FFFFFF"/>
+          </a:solidFill>
+          <a:ln w="6350">
+            <a:solidFill>
+              <a:srgbClr val="999999"/>
+            </a:solidFill>
+            <a:prstDash val="dash"/>
+          </a:ln>
+        </p:spPr>
+      </p:sp>
+      <p:sp>
+        <p:nvSpPr>
+          <p:cNvPr id="227" name="Shape 217"/>
+          <p:cNvSpPr/>
+          <p:nvPr/>
+        </p:nvSpPr>
+        <p:spPr>
+          <a:xfrm>
+            <a:off x="4942332" y="6954012"/>
+            <a:ext cx="2212848" cy="3108960"/>
+          </a:xfrm>
+          <a:prstGeom prst="roundRect">
+            <a:avLst>
+              <a:gd name="adj" fmla="val 4132"/>
+            </a:avLst>
+          </a:prstGeom>
+          <a:solidFill>
+            <a:srgbClr val="C9CCD0"/>
+          </a:solidFill>
+          <a:ln w="6350">
+            <a:solidFill>
+              <a:srgbClr val="C9CCD0"/>
+            </a:solidFill>
+            <a:prstDash val="solid"/>
+          </a:ln>
+        </p:spPr>
+      </p:sp>
+      <p:sp>
+        <p:nvSpPr>
+          <p:cNvPr id="228" name="Shape 218"/>
+          <p:cNvSpPr/>
+          <p:nvPr/>
+        </p:nvSpPr>
+        <p:spPr>
+          <a:xfrm>
+            <a:off x="5006340" y="7018020"/>
+            <a:ext cx="2084832" cy="2980944"/>
+          </a:xfrm>
+          <a:prstGeom prst="rect">
+            <a:avLst/>
+          </a:prstGeom>
+          <a:solidFill>
+            <a:srgbClr val="BFE35A"/>
+          </a:solidFill>
+          <a:ln w="6350">
+            <a:solidFill>
+              <a:srgbClr val="BFE35A"/>
+            </a:solidFill>
+            <a:prstDash val="solid"/>
+          </a:ln>
+        </p:spPr>
+      </p:sp>
+      <p:sp>
+        <p:nvSpPr>
+          <p:cNvPr id="229" name="Shape 219"/>
+          <p:cNvSpPr/>
           <p:nvPr/>
         </p:nvSpPr>
         <p:spPr>
@@ -16927,6 +16740,33 @@
             <a:off x="5006340" y="7018020"/>
             <a:ext cx="384048" cy="155448"/>
           </a:xfrm>
+          <a:prstGeom prst="roundRect">
+            <a:avLst>
+              <a:gd name="adj" fmla="val 29412"/>
+            </a:avLst>
+          </a:prstGeom>
+          <a:solidFill>
+            <a:srgbClr val="C9CCD0"/>
+          </a:solidFill>
+          <a:ln w="6350">
+            <a:solidFill>
+              <a:srgbClr val="C9CCD0"/>
+            </a:solidFill>
+            <a:prstDash val="solid"/>
+          </a:ln>
+        </p:spPr>
+      </p:sp>
+      <p:sp>
+        <p:nvSpPr>
+          <p:cNvPr id="230" name="Text 220"/>
+          <p:cNvSpPr txBox="1"/>
+          <p:nvPr/>
+        </p:nvSpPr>
+        <p:spPr>
+          <a:xfrm>
+            <a:off x="5006340" y="7018020"/>
+            <a:ext cx="384048" cy="155448"/>
+          </a:xfrm>
           <a:prstGeom prst="rect">
             <a:avLst/>
           </a:prstGeom>
@@ -16957,7 +16797,7 @@
       </p:sp>
       <p:sp>
         <p:nvSpPr>
-          <p:cNvPr id="231" name="Text 226"/>
+          <p:cNvPr id="231" name="Text 221"/>
           <p:cNvSpPr txBox="1"/>
           <p:nvPr/>
         </p:nvSpPr>
@@ -16996,7 +16836,7 @@
       </p:sp>
       <p:sp>
         <p:nvSpPr>
-          <p:cNvPr id="232" name="Text 227"/>
+          <p:cNvPr id="232" name="Text 222"/>
           <p:cNvSpPr txBox="1"/>
           <p:nvPr/>
         </p:nvSpPr>
@@ -17035,7 +16875,7 @@
       </p:sp>
       <p:sp>
         <p:nvSpPr>
-          <p:cNvPr id="233" name="Shape 228"/>
+          <p:cNvPr id="233" name="Shape 223"/>
           <p:cNvSpPr/>
           <p:nvPr/>
         </p:nvSpPr>
@@ -17060,7 +16900,7 @@
       </p:sp>
       <p:sp>
         <p:nvSpPr>
-          <p:cNvPr id="234" name="Shape 229"/>
+          <p:cNvPr id="234" name="Shape 224"/>
           <p:cNvSpPr/>
           <p:nvPr/>
         </p:nvSpPr>
@@ -17083,65 +16923,33 @@
           </a:ln>
         </p:spPr>
       </p:sp>
-      <p:sp>
-        <p:nvSpPr>
-          <p:cNvPr id="235" name="Text 230"/>
-          <p:cNvSpPr txBox="1"/>
-          <p:nvPr/>
-        </p:nvSpPr>
-        <p:spPr>
-          <a:xfrm>
-            <a:off x="5189220" y="7338060"/>
-            <a:ext cx="1719072" cy="1225296"/>
-          </a:xfrm>
-          <a:prstGeom prst="rect">
-            <a:avLst/>
-          </a:prstGeom>
-          <a:noFill/>
-          <a:ln/>
-        </p:spPr>
-        <p:txBody>
-          <a:bodyPr wrap="square" lIns="0" tIns="0" rIns="0" bIns="0" rtlCol="0" anchor="ctr"/>
-          <a:lstStyle/>
-          <a:p>
-            <a:pPr algn="ctr" indent="0" marL="0">
-              <a:buNone/>
-            </a:pPr>
-            <a:r>
-              <a:rPr lang="en-US" sz="950" dirty="0">
-                <a:solidFill>
-                  <a:srgbClr val="AAAAAA"/>
-                </a:solidFill>
-                <a:latin typeface="Meiryo" pitchFamily="34" charset="0"/>
-                <a:ea typeface="Meiryo" pitchFamily="34" charset="-122"/>
-                <a:cs typeface="Meiryo" pitchFamily="34" charset="-120"/>
-              </a:rPr>
-              <a:t>ここに絵をはる</a:t>
-            </a:r>
-            <a:endParaRPr lang="en-US" sz="950" dirty="0"/>
-          </a:p>
-          <a:p>
-            <a:pPr algn="ctr" indent="0" marL="0">
-              <a:buNone/>
-            </a:pPr>
-            <a:r>
-              <a:rPr lang="en-US" sz="950" dirty="0">
-                <a:solidFill>
-                  <a:srgbClr val="AAAAAA"/>
-                </a:solidFill>
-                <a:latin typeface="Meiryo" pitchFamily="34" charset="0"/>
-                <a:ea typeface="Meiryo" pitchFamily="34" charset="-122"/>
-                <a:cs typeface="Meiryo" pitchFamily="34" charset="-120"/>
-              </a:rPr>
-              <a:t>（ひまわりのかんむりをかぶったヒヨコ）</a:t>
-            </a:r>
-            <a:endParaRPr lang="en-US" sz="950" dirty="0"/>
-          </a:p>
-        </p:txBody>
-      </p:sp>
-      <p:sp>
-        <p:nvSpPr>
-          <p:cNvPr id="236" name="Text 231"/>
+      <p:pic>
+        <p:nvPicPr>
+          <p:cNvPr id="235" name="Image 8" descr="e15.jpg">    </p:cNvPr>
+          <p:cNvPicPr>
+            <a:picLocks noChangeAspect="1"/>
+          </p:cNvPicPr>
+          <p:nvPr/>
+        </p:nvPicPr>
+        <p:blipFill>
+          <a:blip r:embed="rId9"/>
+          <a:stretch>
+            <a:fillRect/>
+          </a:stretch>
+        </p:blipFill>
+        <p:spPr>
+          <a:xfrm>
+            <a:off x="5102352" y="7351776"/>
+            <a:ext cx="1892808" cy="1197864"/>
+          </a:xfrm>
+          <a:prstGeom prst="rect">
+            <a:avLst/>
+          </a:prstGeom>
+        </p:spPr>
+      </p:pic>
+      <p:sp>
+        <p:nvSpPr>
+          <p:cNvPr id="236" name="Text 225"/>
           <p:cNvSpPr txBox="1"/>
           <p:nvPr/>
         </p:nvSpPr>
@@ -17180,7 +16988,7 @@
       </p:sp>
       <p:sp>
         <p:nvSpPr>
-          <p:cNvPr id="237" name="Shape 232"/>
+          <p:cNvPr id="237" name="Shape 226"/>
           <p:cNvSpPr/>
           <p:nvPr/>
         </p:nvSpPr>
@@ -17205,7 +17013,7 @@
       </p:sp>
       <p:sp>
         <p:nvSpPr>
-          <p:cNvPr id="238" name="Text 233"/>
+          <p:cNvPr id="238" name="Text 227"/>
           <p:cNvSpPr txBox="1"/>
           <p:nvPr/>
         </p:nvSpPr>
@@ -17244,7 +17052,7 @@
       </p:sp>
       <p:sp>
         <p:nvSpPr>
-          <p:cNvPr id="239" name="Text 234"/>
+          <p:cNvPr id="239" name="Text 228"/>
           <p:cNvSpPr txBox="1"/>
           <p:nvPr/>
         </p:nvSpPr>
@@ -17283,7 +17091,7 @@
       </p:sp>
       <p:sp>
         <p:nvSpPr>
-          <p:cNvPr id="240" name="Text 235"/>
+          <p:cNvPr id="240" name="Text 229"/>
           <p:cNvSpPr txBox="1"/>
           <p:nvPr/>
         </p:nvSpPr>
@@ -17322,7 +17130,7 @@
       </p:sp>
       <p:sp>
         <p:nvSpPr>
-          <p:cNvPr id="241" name="Shape 236"/>
+          <p:cNvPr id="241" name="Shape 230"/>
           <p:cNvSpPr/>
           <p:nvPr/>
         </p:nvSpPr>
@@ -17347,7 +17155,7 @@
       </p:sp>
       <p:sp>
         <p:nvSpPr>
-          <p:cNvPr id="242" name="Shape 237"/>
+          <p:cNvPr id="242" name="Shape 231"/>
           <p:cNvSpPr/>
           <p:nvPr/>
         </p:nvSpPr>
@@ -17372,7 +17180,7 @@
       </p:sp>
       <p:sp>
         <p:nvSpPr>
-          <p:cNvPr id="243" name="Text 238"/>
+          <p:cNvPr id="243" name="Text 232"/>
           <p:cNvSpPr txBox="1"/>
           <p:nvPr/>
         </p:nvSpPr>
@@ -17411,7 +17219,7 @@
       </p:sp>
       <p:sp>
         <p:nvSpPr>
-          <p:cNvPr id="244" name="Text 239"/>
+          <p:cNvPr id="244" name="Text 233"/>
           <p:cNvSpPr txBox="1"/>
           <p:nvPr/>
         </p:nvSpPr>
@@ -17450,7 +17258,7 @@
       </p:sp>
       <p:sp>
         <p:nvSpPr>
-          <p:cNvPr id="245" name="Text 240"/>
+          <p:cNvPr id="245" name="Text 234"/>
           <p:cNvSpPr txBox="1"/>
           <p:nvPr/>
         </p:nvSpPr>
@@ -17489,7 +17297,7 @@
       </p:sp>
       <p:sp>
         <p:nvSpPr>
-          <p:cNvPr id="246" name="Shape 241"/>
+          <p:cNvPr id="246" name="Shape 235"/>
           <p:cNvSpPr/>
           <p:nvPr/>
         </p:nvSpPr>
@@ -17514,7 +17322,7 @@
       </p:sp>
       <p:sp>
         <p:nvSpPr>
-          <p:cNvPr id="247" name="Text 242"/>
+          <p:cNvPr id="247" name="Text 236"/>
           <p:cNvSpPr txBox="1"/>
           <p:nvPr/>
         </p:nvSpPr>
@@ -17553,7 +17361,7 @@
       </p:sp>
       <p:sp>
         <p:nvSpPr>
-          <p:cNvPr id="248" name="Shape 243"/>
+          <p:cNvPr id="248" name="Shape 237"/>
           <p:cNvSpPr/>
           <p:nvPr/>
         </p:nvSpPr>
@@ -17578,7 +17386,7 @@
       </p:sp>
       <p:sp>
         <p:nvSpPr>
-          <p:cNvPr id="249" name="Text 244"/>
+          <p:cNvPr id="249" name="Text 238"/>
           <p:cNvSpPr txBox="1"/>
           <p:nvPr/>
         </p:nvSpPr>
@@ -17617,7 +17425,7 @@
       </p:sp>
       <p:sp>
         <p:nvSpPr>
-          <p:cNvPr id="250" name="Text 245"/>
+          <p:cNvPr id="250" name="Text 239"/>
           <p:cNvSpPr txBox="1"/>
           <p:nvPr/>
         </p:nvSpPr>
@@ -17656,7 +17464,7 @@
       </p:sp>
       <p:sp>
         <p:nvSpPr>
-          <p:cNvPr id="251" name="Text 246"/>
+          <p:cNvPr id="251" name="Text 240"/>
           <p:cNvSpPr txBox="1"/>
           <p:nvPr/>
         </p:nvSpPr>
@@ -17695,7 +17503,7 @@
       </p:sp>
       <p:sp>
         <p:nvSpPr>
-          <p:cNvPr id="252" name="Text 247"/>
+          <p:cNvPr id="252" name="Text 241"/>
           <p:cNvSpPr txBox="1"/>
           <p:nvPr/>
         </p:nvSpPr>
@@ -17734,7 +17542,7 @@
       </p:sp>
       <p:sp>
         <p:nvSpPr>
-          <p:cNvPr id="253" name="Shape 248"/>
+          <p:cNvPr id="253" name="Shape 242"/>
           <p:cNvSpPr/>
           <p:nvPr/>
         </p:nvSpPr>
